--- a/docs/2026-10-23/작업_등록_매뉴얼.pptx
+++ b/docs/2026-10-23/작업_등록_매뉴얼.pptx
@@ -3178,7 +3178,7 @@
         <p:spPr>
           <a:xfrm>
             <a:off x="6766560" y="1005840"/>
-            <a:ext cx="1920240" cy="457200"/>
+            <a:ext cx="1920240" cy="388620"/>
           </a:xfrm>
           <a:prstGeom prst="rect">
             <a:avLst/>
@@ -3216,7 +3216,7 @@
         </p:nvSpPr>
         <p:spPr>
           <a:xfrm>
-            <a:off x="6446520" y="1527048"/>
+            <a:off x="6446520" y="1458468"/>
             <a:ext cx="237744" cy="237744"/>
           </a:xfrm>
           <a:prstGeom prst="ellipse">
@@ -3236,7 +3236,7 @@
         </p:nvSpPr>
         <p:spPr>
           <a:xfrm>
-            <a:off x="6446520" y="1527048"/>
+            <a:off x="6446520" y="1458468"/>
             <a:ext cx="237744" cy="237744"/>
           </a:xfrm>
           <a:prstGeom prst="rect">
@@ -3275,8 +3275,8 @@
         </p:nvSpPr>
         <p:spPr>
           <a:xfrm>
-            <a:off x="6766560" y="1508760"/>
-            <a:ext cx="1920240" cy="457200"/>
+            <a:off x="6766560" y="1440180"/>
+            <a:ext cx="1920240" cy="388620"/>
           </a:xfrm>
           <a:prstGeom prst="rect">
             <a:avLst/>
@@ -3300,7 +3300,7 @@
                 <a:ea typeface="Arial" pitchFamily="34" charset="-122"/>
                 <a:cs typeface="Arial" pitchFamily="34" charset="-120"/>
               </a:rPr>
-              <a:t>작업 — 이 작업으로 고정</a:t>
+              <a:t>주제 (선택) — 사람이 적는 짧은 글. 서버 metadata.subject</a:t>
             </a:r>
             <a:endParaRPr lang="en-US" sz="1100" dirty="0"/>
           </a:p>
@@ -3314,7 +3314,7 @@
         </p:nvSpPr>
         <p:spPr>
           <a:xfrm>
-            <a:off x="6446520" y="2029968"/>
+            <a:off x="6446520" y="1892808"/>
             <a:ext cx="237744" cy="237744"/>
           </a:xfrm>
           <a:prstGeom prst="ellipse">
@@ -3334,7 +3334,7 @@
         </p:nvSpPr>
         <p:spPr>
           <a:xfrm>
-            <a:off x="6446520" y="2029968"/>
+            <a:off x="6446520" y="1892808"/>
             <a:ext cx="237744" cy="237744"/>
           </a:xfrm>
           <a:prstGeom prst="rect">
@@ -3373,8 +3373,8 @@
         </p:nvSpPr>
         <p:spPr>
           <a:xfrm>
-            <a:off x="6766560" y="2011680"/>
-            <a:ext cx="1920240" cy="457200"/>
+            <a:off x="6766560" y="1874520"/>
+            <a:ext cx="1920240" cy="388620"/>
           </a:xfrm>
           <a:prstGeom prst="rect">
             <a:avLst/>
@@ -3398,7 +3398,7 @@
                 <a:ea typeface="Arial" pitchFamily="34" charset="-122"/>
                 <a:cs typeface="Arial" pitchFamily="34" charset="-120"/>
               </a:rPr>
-              <a:t>패스 — 또는 작업 공용</a:t>
+              <a:t>상황 (선택) — 사람이 적는 짧은 글. 서버 metadata.situation</a:t>
             </a:r>
             <a:endParaRPr lang="en-US" sz="1100" dirty="0"/>
           </a:p>
@@ -3412,7 +3412,7 @@
         </p:nvSpPr>
         <p:spPr>
           <a:xfrm>
-            <a:off x="6446520" y="2532888"/>
+            <a:off x="6446520" y="2327148"/>
             <a:ext cx="237744" cy="237744"/>
           </a:xfrm>
           <a:prstGeom prst="ellipse">
@@ -3432,7 +3432,7 @@
         </p:nvSpPr>
         <p:spPr>
           <a:xfrm>
-            <a:off x="6446520" y="2532888"/>
+            <a:off x="6446520" y="2327148"/>
             <a:ext cx="237744" cy="237744"/>
           </a:xfrm>
           <a:prstGeom prst="rect">
@@ -3471,8 +3471,8 @@
         </p:nvSpPr>
         <p:spPr>
           <a:xfrm>
-            <a:off x="6766560" y="2514600"/>
-            <a:ext cx="1920240" cy="457200"/>
+            <a:off x="6766560" y="2308860"/>
+            <a:ext cx="1920240" cy="388620"/>
           </a:xfrm>
           <a:prstGeom prst="rect">
             <a:avLst/>
@@ -3496,7 +3496,7 @@
                 <a:ea typeface="Arial" pitchFamily="34" charset="-122"/>
                 <a:cs typeface="Arial" pitchFamily="34" charset="-120"/>
               </a:rPr>
-              <a:t>장비 (선택)</a:t>
+              <a:t>작업 — 이 작업으로 고정(상세에서 열면)</a:t>
             </a:r>
             <a:endParaRPr lang="en-US" sz="1100" dirty="0"/>
           </a:p>
@@ -3510,7 +3510,7 @@
         </p:nvSpPr>
         <p:spPr>
           <a:xfrm>
-            <a:off x="6446520" y="3035808"/>
+            <a:off x="6446520" y="2761488"/>
             <a:ext cx="237744" cy="237744"/>
           </a:xfrm>
           <a:prstGeom prst="ellipse">
@@ -3530,7 +3530,7 @@
         </p:nvSpPr>
         <p:spPr>
           <a:xfrm>
-            <a:off x="6446520" y="3035808"/>
+            <a:off x="6446520" y="2761488"/>
             <a:ext cx="237744" cy="237744"/>
           </a:xfrm>
           <a:prstGeom prst="rect">
@@ -3569,8 +3569,8 @@
         </p:nvSpPr>
         <p:spPr>
           <a:xfrm>
-            <a:off x="6766560" y="3017520"/>
-            <a:ext cx="1920240" cy="457200"/>
+            <a:off x="6766560" y="2743200"/>
+            <a:ext cx="1920240" cy="388620"/>
           </a:xfrm>
           <a:prstGeom prst="rect">
             <a:avLst/>
@@ -3594,7 +3594,7 @@
                 <a:ea typeface="Arial" pitchFamily="34" charset="-122"/>
                 <a:cs typeface="Arial" pitchFamily="34" charset="-120"/>
               </a:rPr>
-              <a:t>시간 0의 시각 — 시간 자료면 필수 *</a:t>
+              <a:t>패스 — 또는 작업 공용</a:t>
             </a:r>
             <a:endParaRPr lang="en-US" sz="1100" dirty="0"/>
           </a:p>
@@ -3608,7 +3608,7 @@
         </p:nvSpPr>
         <p:spPr>
           <a:xfrm>
-            <a:off x="6446520" y="3538728"/>
+            <a:off x="6446520" y="3195828"/>
             <a:ext cx="237744" cy="237744"/>
           </a:xfrm>
           <a:prstGeom prst="ellipse">
@@ -3628,7 +3628,7 @@
         </p:nvSpPr>
         <p:spPr>
           <a:xfrm>
-            <a:off x="6446520" y="3538728"/>
+            <a:off x="6446520" y="3195828"/>
             <a:ext cx="237744" cy="237744"/>
           </a:xfrm>
           <a:prstGeom prst="rect">
@@ -3667,8 +3667,8 @@
         </p:nvSpPr>
         <p:spPr>
           <a:xfrm>
-            <a:off x="6766560" y="3520440"/>
-            <a:ext cx="1920240" cy="457200"/>
+            <a:off x="6766560" y="3177540"/>
+            <a:ext cx="1920240" cy="388620"/>
           </a:xfrm>
           <a:prstGeom prst="rect">
             <a:avLst/>
@@ -3692,7 +3692,7 @@
                 <a:ea typeface="Arial" pitchFamily="34" charset="-122"/>
                 <a:cs typeface="Arial" pitchFamily="34" charset="-120"/>
               </a:rPr>
-              <a:t>[올리기]</a:t>
+              <a:t>장비 (선택)</a:t>
             </a:r>
             <a:endParaRPr lang="en-US" sz="1100" dirty="0"/>
           </a:p>
@@ -3706,8 +3706,8 @@
         </p:nvSpPr>
         <p:spPr>
           <a:xfrm>
-            <a:off x="8503920" y="4663440"/>
-            <a:ext cx="365760" cy="365760"/>
+            <a:off x="6446520" y="3630168"/>
+            <a:ext cx="237744" cy="237744"/>
           </a:xfrm>
           <a:prstGeom prst="ellipse">
             <a:avLst/>
@@ -3721,6 +3721,202 @@
       <p:sp>
         <p:nvSpPr>
           <p:cNvPr id="25" name="Text 22"/>
+          <p:cNvSpPr/>
+          <p:nvPr/>
+        </p:nvSpPr>
+        <p:spPr>
+          <a:xfrm>
+            <a:off x="6446520" y="3630168"/>
+            <a:ext cx="237744" cy="237744"/>
+          </a:xfrm>
+          <a:prstGeom prst="rect">
+            <a:avLst/>
+          </a:prstGeom>
+          <a:noFill/>
+          <a:ln/>
+        </p:spPr>
+        <p:txBody>
+          <a:bodyPr wrap="square" lIns="0" tIns="0" rIns="0" bIns="0" rtlCol="0" anchor="ctr"/>
+          <a:lstStyle/>
+          <a:p>
+            <a:pPr algn="ctr" indent="0" marL="0">
+              <a:buNone/>
+            </a:pPr>
+            <a:r>
+              <a:rPr lang="en-US" sz="1100" b="1" dirty="0">
+                <a:solidFill>
+                  <a:srgbClr val="FFFFFF"/>
+                </a:solidFill>
+                <a:latin typeface="Arial" pitchFamily="34" charset="0"/>
+                <a:ea typeface="Arial" pitchFamily="34" charset="-122"/>
+                <a:cs typeface="Arial" pitchFamily="34" charset="-120"/>
+              </a:rPr>
+              <a:t>7</a:t>
+            </a:r>
+            <a:endParaRPr lang="en-US" sz="1100" dirty="0"/>
+          </a:p>
+        </p:txBody>
+      </p:sp>
+      <p:sp>
+        <p:nvSpPr>
+          <p:cNvPr id="26" name="Text 23"/>
+          <p:cNvSpPr/>
+          <p:nvPr/>
+        </p:nvSpPr>
+        <p:spPr>
+          <a:xfrm>
+            <a:off x="6766560" y="3611880"/>
+            <a:ext cx="1920240" cy="388620"/>
+          </a:xfrm>
+          <a:prstGeom prst="rect">
+            <a:avLst/>
+          </a:prstGeom>
+          <a:noFill/>
+          <a:ln/>
+        </p:spPr>
+        <p:txBody>
+          <a:bodyPr wrap="square" lIns="0" tIns="0" rIns="0" bIns="0" rtlCol="0" anchor="ctr"/>
+          <a:lstStyle/>
+          <a:p>
+            <a:pPr indent="0" marL="0">
+              <a:buNone/>
+            </a:pPr>
+            <a:r>
+              <a:rPr lang="en-US" sz="1100" dirty="0">
+                <a:solidFill>
+                  <a:srgbClr val="4A5560"/>
+                </a:solidFill>
+                <a:latin typeface="Arial" pitchFamily="34" charset="0"/>
+                <a:ea typeface="Arial" pitchFamily="34" charset="-122"/>
+                <a:cs typeface="Arial" pitchFamily="34" charset="-120"/>
+              </a:rPr>
+              <a:t>시간 0의 시각 — 시간 자료면 필수 *</a:t>
+            </a:r>
+            <a:endParaRPr lang="en-US" sz="1100" dirty="0"/>
+          </a:p>
+        </p:txBody>
+      </p:sp>
+      <p:sp>
+        <p:nvSpPr>
+          <p:cNvPr id="27" name="Shape 24"/>
+          <p:cNvSpPr/>
+          <p:nvPr/>
+        </p:nvSpPr>
+        <p:spPr>
+          <a:xfrm>
+            <a:off x="6446520" y="4064508"/>
+            <a:ext cx="237744" cy="237744"/>
+          </a:xfrm>
+          <a:prstGeom prst="ellipse">
+            <a:avLst/>
+          </a:prstGeom>
+          <a:solidFill>
+            <a:srgbClr val="E76F51"/>
+          </a:solidFill>
+          <a:ln/>
+        </p:spPr>
+      </p:sp>
+      <p:sp>
+        <p:nvSpPr>
+          <p:cNvPr id="28" name="Text 25"/>
+          <p:cNvSpPr/>
+          <p:nvPr/>
+        </p:nvSpPr>
+        <p:spPr>
+          <a:xfrm>
+            <a:off x="6446520" y="4064508"/>
+            <a:ext cx="237744" cy="237744"/>
+          </a:xfrm>
+          <a:prstGeom prst="rect">
+            <a:avLst/>
+          </a:prstGeom>
+          <a:noFill/>
+          <a:ln/>
+        </p:spPr>
+        <p:txBody>
+          <a:bodyPr wrap="square" lIns="0" tIns="0" rIns="0" bIns="0" rtlCol="0" anchor="ctr"/>
+          <a:lstStyle/>
+          <a:p>
+            <a:pPr algn="ctr" indent="0" marL="0">
+              <a:buNone/>
+            </a:pPr>
+            <a:r>
+              <a:rPr lang="en-US" sz="1100" b="1" dirty="0">
+                <a:solidFill>
+                  <a:srgbClr val="FFFFFF"/>
+                </a:solidFill>
+                <a:latin typeface="Arial" pitchFamily="34" charset="0"/>
+                <a:ea typeface="Arial" pitchFamily="34" charset="-122"/>
+                <a:cs typeface="Arial" pitchFamily="34" charset="-120"/>
+              </a:rPr>
+              <a:t>8</a:t>
+            </a:r>
+            <a:endParaRPr lang="en-US" sz="1100" dirty="0"/>
+          </a:p>
+        </p:txBody>
+      </p:sp>
+      <p:sp>
+        <p:nvSpPr>
+          <p:cNvPr id="29" name="Text 26"/>
+          <p:cNvSpPr/>
+          <p:nvPr/>
+        </p:nvSpPr>
+        <p:spPr>
+          <a:xfrm>
+            <a:off x="6766560" y="4046220"/>
+            <a:ext cx="1920240" cy="388620"/>
+          </a:xfrm>
+          <a:prstGeom prst="rect">
+            <a:avLst/>
+          </a:prstGeom>
+          <a:noFill/>
+          <a:ln/>
+        </p:spPr>
+        <p:txBody>
+          <a:bodyPr wrap="square" lIns="0" tIns="0" rIns="0" bIns="0" rtlCol="0" anchor="ctr"/>
+          <a:lstStyle/>
+          <a:p>
+            <a:pPr indent="0" marL="0">
+              <a:buNone/>
+            </a:pPr>
+            <a:r>
+              <a:rPr lang="en-US" sz="1100" dirty="0">
+                <a:solidFill>
+                  <a:srgbClr val="4A5560"/>
+                </a:solidFill>
+                <a:latin typeface="Arial" pitchFamily="34" charset="0"/>
+                <a:ea typeface="Arial" pitchFamily="34" charset="-122"/>
+                <a:cs typeface="Arial" pitchFamily="34" charset="-120"/>
+              </a:rPr>
+              <a:t>[올리기]</a:t>
+            </a:r>
+            <a:endParaRPr lang="en-US" sz="1100" dirty="0"/>
+          </a:p>
+        </p:txBody>
+      </p:sp>
+      <p:sp>
+        <p:nvSpPr>
+          <p:cNvPr id="30" name="Shape 27"/>
+          <p:cNvSpPr/>
+          <p:nvPr/>
+        </p:nvSpPr>
+        <p:spPr>
+          <a:xfrm>
+            <a:off x="8503920" y="4663440"/>
+            <a:ext cx="365760" cy="365760"/>
+          </a:xfrm>
+          <a:prstGeom prst="ellipse">
+            <a:avLst/>
+          </a:prstGeom>
+          <a:solidFill>
+            <a:srgbClr val="E76F51"/>
+          </a:solidFill>
+          <a:ln/>
+        </p:spPr>
+      </p:sp>
+      <p:sp>
+        <p:nvSpPr>
+          <p:cNvPr id="31" name="Text 28"/>
           <p:cNvSpPr/>
           <p:nvPr/>
         </p:nvSpPr>
@@ -7516,7 +7712,7 @@
                 <a:ea typeface="Arial" pitchFamily="34" charset="-122"/>
                 <a:cs typeface="Arial" pitchFamily="34" charset="-120"/>
               </a:rPr>
-              <a:t>첨부 — 에셋 올리기 창 — 파일 · 작업 · 패스 · 장비 · 시간 0 · 올리기</a:t>
+              <a:t>첨부 — 에셋 올리기 창 — 파일 · 주제 · 상황 · 작업 · 패스 · 장비 · 시간 0 · 올리기</a:t>
             </a:r>
             <a:endParaRPr lang="en-US" sz="1100" dirty="0"/>
           </a:p>

--- a/docs/2026-10-23/작업_등록_매뉴얼.pptx
+++ b/docs/2026-10-23/작업_등록_매뉴얼.pptx
@@ -21,9 +21,11 @@
     <p:sldId id="269" r:id="rId15"/>
     <p:sldId id="270" r:id="rId16"/>
     <p:sldId id="271" r:id="rId17"/>
+    <p:sldId id="272" r:id="rId18"/>
+    <p:sldId id="273" r:id="rId19"/>
   </p:sldIdLst>
   <p:notesMasterIdLst>
-    <p:notesMasterId r:id="rId18"/>
+    <p:notesMasterId r:id="rId20"/>
   </p:notesMasterIdLst>
   <p:sldSz cx="9144000" cy="5143500"/>
   <p:notesSz cx="5143500" cy="9144000"/>
@@ -1157,6 +1159,182 @@
             <a:fld id="{F7021451-1387-4CA6-816F-3879F97B5CBC}" type="slidenum">
               <a:rPr lang="en-US"/>
               <a:t>16</a:t>
+            </a:fld>
+            <a:endParaRPr lang="en-US"/>
+          </a:p>
+        </p:txBody>
+      </p:sp>
+    </p:spTree>
+    <p:extLst>
+      <p:ext uri="{BB962C8B-B14F-4D97-AF65-F5344CB8AC3E}">
+        <p14:creationId xmlns:p14="http://schemas.microsoft.com/office/powerpoint/2010/main" val="1024086991"/>
+      </p:ext>
+    </p:extLst>
+  </p:cSld>
+  <p:clrMapOvr>
+    <a:masterClrMapping/>
+  </p:clrMapOvr>
+</p:notes>
+</file>
+
+<file path=ppt/notesSlides/notesSlide17.xml><?xml version="1.0" encoding="utf-8"?>
+<p:notes xmlns:a="http://schemas.openxmlformats.org/drawingml/2006/main" xmlns:r="http://schemas.openxmlformats.org/officeDocument/2006/relationships" xmlns:p="http://schemas.openxmlformats.org/presentationml/2006/main">
+  <p:cSld>
+    <p:spTree>
+      <p:nvGrpSpPr>
+        <p:cNvPr id="1" name=""/>
+        <p:cNvGrpSpPr/>
+        <p:nvPr/>
+      </p:nvGrpSpPr>
+      <p:grpSpPr>
+        <a:xfrm>
+          <a:off x="0" y="0"/>
+          <a:ext cx="0" cy="0"/>
+          <a:chOff x="0" y="0"/>
+          <a:chExt cx="0" cy="0"/>
+        </a:xfrm>
+      </p:grpSpPr>
+      <p:sp>
+        <p:nvSpPr>
+          <p:cNvPr id="2" name="Slide Image Placeholder 1"/>
+          <p:cNvSpPr>
+            <a:spLocks noGrp="1" noRot="1" noChangeAspect="1"/>
+          </p:cNvSpPr>
+          <p:nvPr>
+            <p:ph type="sldImg"/>
+          </p:nvPr>
+        </p:nvSpPr>
+        <p:spPr/>
+      </p:sp>
+      <p:sp>
+        <p:nvSpPr>
+          <p:cNvPr id="3" name="Notes Placeholder 2"/>
+          <p:cNvSpPr>
+            <a:spLocks noGrp="1"/>
+          </p:cNvSpPr>
+          <p:nvPr>
+            <p:ph type="body" idx="1"/>
+          </p:nvPr>
+        </p:nvSpPr>
+        <p:spPr/>
+        <p:txBody>
+          <a:bodyPr/>
+          <a:lstStyle/>
+          <a:p>
+            <a:r>
+              <a:rPr lang="en-US" dirty="0"/>
+              <a:t/>
+            </a:r>
+            <a:endParaRPr lang="en-US" dirty="0"/>
+          </a:p>
+        </p:txBody>
+      </p:sp>
+      <p:sp>
+        <p:nvSpPr>
+          <p:cNvPr id="4" name="Slide Number Placeholder 3"/>
+          <p:cNvSpPr>
+            <a:spLocks noGrp="1"/>
+          </p:cNvSpPr>
+          <p:nvPr>
+            <p:ph type="sldNum" sz="quarter" idx="10"/>
+          </p:nvPr>
+        </p:nvSpPr>
+        <p:spPr/>
+        <p:txBody>
+          <a:bodyPr/>
+          <a:lstStyle/>
+          <a:p>
+            <a:fld id="{F7021451-1387-4CA6-816F-3879F97B5CBC}" type="slidenum">
+              <a:rPr lang="en-US"/>
+              <a:t>17</a:t>
+            </a:fld>
+            <a:endParaRPr lang="en-US"/>
+          </a:p>
+        </p:txBody>
+      </p:sp>
+    </p:spTree>
+    <p:extLst>
+      <p:ext uri="{BB962C8B-B14F-4D97-AF65-F5344CB8AC3E}">
+        <p14:creationId xmlns:p14="http://schemas.microsoft.com/office/powerpoint/2010/main" val="1024086991"/>
+      </p:ext>
+    </p:extLst>
+  </p:cSld>
+  <p:clrMapOvr>
+    <a:masterClrMapping/>
+  </p:clrMapOvr>
+</p:notes>
+</file>
+
+<file path=ppt/notesSlides/notesSlide18.xml><?xml version="1.0" encoding="utf-8"?>
+<p:notes xmlns:a="http://schemas.openxmlformats.org/drawingml/2006/main" xmlns:r="http://schemas.openxmlformats.org/officeDocument/2006/relationships" xmlns:p="http://schemas.openxmlformats.org/presentationml/2006/main">
+  <p:cSld>
+    <p:spTree>
+      <p:nvGrpSpPr>
+        <p:cNvPr id="1" name=""/>
+        <p:cNvGrpSpPr/>
+        <p:nvPr/>
+      </p:nvGrpSpPr>
+      <p:grpSpPr>
+        <a:xfrm>
+          <a:off x="0" y="0"/>
+          <a:ext cx="0" cy="0"/>
+          <a:chOff x="0" y="0"/>
+          <a:chExt cx="0" cy="0"/>
+        </a:xfrm>
+      </p:grpSpPr>
+      <p:sp>
+        <p:nvSpPr>
+          <p:cNvPr id="2" name="Slide Image Placeholder 1"/>
+          <p:cNvSpPr>
+            <a:spLocks noGrp="1" noRot="1" noChangeAspect="1"/>
+          </p:cNvSpPr>
+          <p:nvPr>
+            <p:ph type="sldImg"/>
+          </p:nvPr>
+        </p:nvSpPr>
+        <p:spPr/>
+      </p:sp>
+      <p:sp>
+        <p:nvSpPr>
+          <p:cNvPr id="3" name="Notes Placeholder 2"/>
+          <p:cNvSpPr>
+            <a:spLocks noGrp="1"/>
+          </p:cNvSpPr>
+          <p:nvPr>
+            <p:ph type="body" idx="1"/>
+          </p:nvPr>
+        </p:nvSpPr>
+        <p:spPr/>
+        <p:txBody>
+          <a:bodyPr/>
+          <a:lstStyle/>
+          <a:p>
+            <a:r>
+              <a:rPr lang="en-US" dirty="0"/>
+              <a:t/>
+            </a:r>
+            <a:endParaRPr lang="en-US" dirty="0"/>
+          </a:p>
+        </p:txBody>
+      </p:sp>
+      <p:sp>
+        <p:nvSpPr>
+          <p:cNvPr id="4" name="Slide Number Placeholder 3"/>
+          <p:cNvSpPr>
+            <a:spLocks noGrp="1"/>
+          </p:cNvSpPr>
+          <p:nvPr>
+            <p:ph type="sldNum" sz="quarter" idx="10"/>
+          </p:nvPr>
+        </p:nvSpPr>
+        <p:spPr/>
+        <p:txBody>
+          <a:bodyPr/>
+          <a:lstStyle/>
+          <a:p>
+            <a:fld id="{F7021451-1387-4CA6-816F-3879F97B5CBC}" type="slidenum">
+              <a:rPr lang="en-US"/>
+              <a:t>18</a:t>
             </a:fld>
             <a:endParaRPr lang="en-US"/>
           </a:p>
@@ -2341,7 +2519,7 @@
                 <a:ea typeface="Arial" pitchFamily="34" charset="-122"/>
                 <a:cs typeface="Arial" pitchFamily="34" charset="-120"/>
               </a:rPr>
-              <a:t>현장에서 새 작업을 등록하고, 패스·자료를 정리한 뒤 프로파일·품질 화면까지 이어 보는 순서를 담았습니다.</a:t>
+              <a:t>로그인부터 수집 모니터링·작업 등록·첨부, 프로파일·품질 조회까지 현장에서 쓰는 순서를 담았습니다.</a:t>
             </a:r>
             <a:endParaRPr lang="en-US" sz="1500" dirty="0"/>
           </a:p>
@@ -2412,7 +2590,7 @@
                 <a:ea typeface="Arial" pitchFamily="34" charset="-122"/>
                 <a:cs typeface="Arial" pitchFamily="34" charset="-120"/>
               </a:rPr>
-              <a:t>8. 작업 상세 — 첨부</a:t>
+              <a:t>7. 작업 상세 — 패스</a:t>
             </a:r>
             <a:endParaRPr lang="en-US" sz="1800" dirty="0"/>
           </a:p>
@@ -2420,7 +2598,7 @@
       </p:sp>
       <p:pic>
         <p:nvPicPr>
-          <p:cNvPr id="3" name="Image 0" descr="/Users/geosoft/Documents/weld-dashboard/docs/2026-10-23/slides/imgs/06-job-detail-attach-n.png">    </p:cNvPr>
+          <p:cNvPr id="3" name="Image 0" descr="/Users/geosoft/Documents/weld-dashboard/docs/2026-10-23/slides/imgs/05-job-detail-pass-n.png">    </p:cNvPr>
           <p:cNvPicPr>
             <a:picLocks noChangeAspect="1"/>
           </p:cNvPicPr>
@@ -2595,7 +2773,7 @@
                 <a:ea typeface="Arial" pitchFamily="34" charset="-122"/>
                 <a:cs typeface="Arial" pitchFamily="34" charset="-120"/>
               </a:rPr>
-              <a:t>[에셋 올리기] — 새 파일 올리기</a:t>
+              <a:t>[+ 패스 추가]</a:t>
             </a:r>
             <a:endParaRPr lang="en-US" sz="1100" dirty="0"/>
           </a:p>
@@ -2693,7 +2871,7 @@
                 <a:ea typeface="Arial" pitchFamily="34" charset="-122"/>
                 <a:cs typeface="Arial" pitchFamily="34" charset="-120"/>
               </a:rPr>
-              <a:t>[에셋 붙이기] — 기존 자료 연결</a:t>
+              <a:t>패스 목록 (시작 · 종료)</a:t>
             </a:r>
             <a:endParaRPr lang="en-US" sz="1100" dirty="0"/>
           </a:p>
@@ -2791,7 +2969,7 @@
                 <a:ea typeface="Arial" pitchFamily="34" charset="-122"/>
                 <a:cs typeface="Arial" pitchFamily="34" charset="-120"/>
               </a:rPr>
-              <a:t>패스 칸 — 어느 패스에 속할지</a:t>
+              <a:t>수정 · 지우기 아이콘</a:t>
             </a:r>
             <a:endParaRPr lang="en-US" sz="1100" dirty="0"/>
           </a:p>
@@ -2805,8 +2983,8 @@
         </p:nvSpPr>
         <p:spPr>
           <a:xfrm>
-            <a:off x="6446520" y="2532888"/>
-            <a:ext cx="237744" cy="237744"/>
+            <a:off x="8503920" y="4663440"/>
+            <a:ext cx="365760" cy="365760"/>
           </a:xfrm>
           <a:prstGeom prst="ellipse">
             <a:avLst/>
@@ -2820,104 +2998,6 @@
       <p:sp>
         <p:nvSpPr>
           <p:cNvPr id="16" name="Text 13"/>
-          <p:cNvSpPr/>
-          <p:nvPr/>
-        </p:nvSpPr>
-        <p:spPr>
-          <a:xfrm>
-            <a:off x="6446520" y="2532888"/>
-            <a:ext cx="237744" cy="237744"/>
-          </a:xfrm>
-          <a:prstGeom prst="rect">
-            <a:avLst/>
-          </a:prstGeom>
-          <a:noFill/>
-          <a:ln/>
-        </p:spPr>
-        <p:txBody>
-          <a:bodyPr wrap="square" lIns="0" tIns="0" rIns="0" bIns="0" rtlCol="0" anchor="ctr"/>
-          <a:lstStyle/>
-          <a:p>
-            <a:pPr algn="ctr" indent="0" marL="0">
-              <a:buNone/>
-            </a:pPr>
-            <a:r>
-              <a:rPr lang="en-US" sz="1100" b="1" dirty="0">
-                <a:solidFill>
-                  <a:srgbClr val="FFFFFF"/>
-                </a:solidFill>
-                <a:latin typeface="Arial" pitchFamily="34" charset="0"/>
-                <a:ea typeface="Arial" pitchFamily="34" charset="-122"/>
-                <a:cs typeface="Arial" pitchFamily="34" charset="-120"/>
-              </a:rPr>
-              <a:t>4</a:t>
-            </a:r>
-            <a:endParaRPr lang="en-US" sz="1100" dirty="0"/>
-          </a:p>
-        </p:txBody>
-      </p:sp>
-      <p:sp>
-        <p:nvSpPr>
-          <p:cNvPr id="17" name="Text 14"/>
-          <p:cNvSpPr/>
-          <p:nvPr/>
-        </p:nvSpPr>
-        <p:spPr>
-          <a:xfrm>
-            <a:off x="6766560" y="2514600"/>
-            <a:ext cx="1920240" cy="457200"/>
-          </a:xfrm>
-          <a:prstGeom prst="rect">
-            <a:avLst/>
-          </a:prstGeom>
-          <a:noFill/>
-          <a:ln/>
-        </p:spPr>
-        <p:txBody>
-          <a:bodyPr wrap="square" lIns="0" tIns="0" rIns="0" bIns="0" rtlCol="0" anchor="ctr"/>
-          <a:lstStyle/>
-          <a:p>
-            <a:pPr indent="0" marL="0">
-              <a:buNone/>
-            </a:pPr>
-            <a:r>
-              <a:rPr lang="en-US" sz="1100" dirty="0">
-                <a:solidFill>
-                  <a:srgbClr val="4A5560"/>
-                </a:solidFill>
-                <a:latin typeface="Arial" pitchFamily="34" charset="0"/>
-                <a:ea typeface="Arial" pitchFamily="34" charset="-122"/>
-                <a:cs typeface="Arial" pitchFamily="34" charset="-120"/>
-              </a:rPr>
-              <a:t>연결 끊기 — 작업과의 연결만 끊김 (파일은 남음)</a:t>
-            </a:r>
-            <a:endParaRPr lang="en-US" sz="1100" dirty="0"/>
-          </a:p>
-        </p:txBody>
-      </p:sp>
-      <p:sp>
-        <p:nvSpPr>
-          <p:cNvPr id="18" name="Shape 15"/>
-          <p:cNvSpPr/>
-          <p:nvPr/>
-        </p:nvSpPr>
-        <p:spPr>
-          <a:xfrm>
-            <a:off x="8503920" y="4663440"/>
-            <a:ext cx="365760" cy="365760"/>
-          </a:xfrm>
-          <a:prstGeom prst="ellipse">
-            <a:avLst/>
-          </a:prstGeom>
-          <a:solidFill>
-            <a:srgbClr val="E76F51"/>
-          </a:solidFill>
-          <a:ln/>
-        </p:spPr>
-      </p:sp>
-      <p:sp>
-        <p:nvSpPr>
-          <p:cNvPr id="19" name="Text 16"/>
           <p:cNvSpPr/>
           <p:nvPr/>
         </p:nvSpPr>
@@ -3019,7 +3099,7 @@
                 <a:ea typeface="Arial" pitchFamily="34" charset="-122"/>
                 <a:cs typeface="Arial" pitchFamily="34" charset="-120"/>
               </a:rPr>
-              <a:t>9. 첨부 — 에셋 올리기 창</a:t>
+              <a:t>8. 작업 상세 — 패스 추가 창</a:t>
             </a:r>
             <a:endParaRPr lang="en-US" sz="1800" dirty="0"/>
           </a:p>
@@ -3027,7 +3107,7 @@
       </p:sp>
       <p:pic>
         <p:nvPicPr>
-          <p:cNvPr id="3" name="Image 0" descr="/Users/geosoft/Documents/weld-dashboard/docs/2026-10-23/slides/imgs/10-asset-upload-n.png">    </p:cNvPr>
+          <p:cNvPr id="3" name="Image 0" descr="/Users/geosoft/Documents/weld-dashboard/docs/2026-10-23/slides/imgs/08-pass-add-n.png">    </p:cNvPr>
           <p:cNvPicPr>
             <a:picLocks noChangeAspect="1"/>
           </p:cNvPicPr>
@@ -3178,7 +3258,7 @@
         <p:spPr>
           <a:xfrm>
             <a:off x="6766560" y="1005840"/>
-            <a:ext cx="1920240" cy="388620"/>
+            <a:ext cx="1920240" cy="457200"/>
           </a:xfrm>
           <a:prstGeom prst="rect">
             <a:avLst/>
@@ -3202,7 +3282,7 @@
                 <a:ea typeface="Arial" pitchFamily="34" charset="-122"/>
                 <a:cs typeface="Arial" pitchFamily="34" charset="-120"/>
               </a:rPr>
-              <a:t>파일 고르기 — 고르면 종류 · 후처리 안내가 뜸</a:t>
+              <a:t>패스 번호 * — 중복되면 안 됩니다</a:t>
             </a:r>
             <a:endParaRPr lang="en-US" sz="1100" dirty="0"/>
           </a:p>
@@ -3216,7 +3296,7 @@
         </p:nvSpPr>
         <p:spPr>
           <a:xfrm>
-            <a:off x="6446520" y="1458468"/>
+            <a:off x="6446520" y="1527048"/>
             <a:ext cx="237744" cy="237744"/>
           </a:xfrm>
           <a:prstGeom prst="ellipse">
@@ -3236,7 +3316,7 @@
         </p:nvSpPr>
         <p:spPr>
           <a:xfrm>
-            <a:off x="6446520" y="1458468"/>
+            <a:off x="6446520" y="1527048"/>
             <a:ext cx="237744" cy="237744"/>
           </a:xfrm>
           <a:prstGeom prst="rect">
@@ -3275,8 +3355,8 @@
         </p:nvSpPr>
         <p:spPr>
           <a:xfrm>
-            <a:off x="6766560" y="1440180"/>
-            <a:ext cx="1920240" cy="388620"/>
+            <a:off x="6766560" y="1508760"/>
+            <a:ext cx="1920240" cy="457200"/>
           </a:xfrm>
           <a:prstGeom prst="rect">
             <a:avLst/>
@@ -3300,7 +3380,7 @@
                 <a:ea typeface="Arial" pitchFamily="34" charset="-122"/>
                 <a:cs typeface="Arial" pitchFamily="34" charset="-120"/>
               </a:rPr>
-              <a:t>주제 (선택) — 사람이 적는 짧은 글. 서버 metadata.subject</a:t>
+              <a:t>종류 — 초층 · 채움 · 캡 등</a:t>
             </a:r>
             <a:endParaRPr lang="en-US" sz="1100" dirty="0"/>
           </a:p>
@@ -3314,7 +3394,7 @@
         </p:nvSpPr>
         <p:spPr>
           <a:xfrm>
-            <a:off x="6446520" y="1892808"/>
+            <a:off x="6446520" y="2029968"/>
             <a:ext cx="237744" cy="237744"/>
           </a:xfrm>
           <a:prstGeom prst="ellipse">
@@ -3334,7 +3414,7 @@
         </p:nvSpPr>
         <p:spPr>
           <a:xfrm>
-            <a:off x="6446520" y="1892808"/>
+            <a:off x="6446520" y="2029968"/>
             <a:ext cx="237744" cy="237744"/>
           </a:xfrm>
           <a:prstGeom prst="rect">
@@ -3373,8 +3453,8 @@
         </p:nvSpPr>
         <p:spPr>
           <a:xfrm>
-            <a:off x="6766560" y="1874520"/>
-            <a:ext cx="1920240" cy="388620"/>
+            <a:off x="6766560" y="2011680"/>
+            <a:ext cx="1920240" cy="457200"/>
           </a:xfrm>
           <a:prstGeom prst="rect">
             <a:avLst/>
@@ -3398,7 +3478,7 @@
                 <a:ea typeface="Arial" pitchFamily="34" charset="-122"/>
                 <a:cs typeface="Arial" pitchFamily="34" charset="-120"/>
               </a:rPr>
-              <a:t>상황 (선택) — 사람이 적는 짧은 글. 서버 metadata.situation</a:t>
+              <a:t>시작 — 비워 둘 수 있습니다</a:t>
             </a:r>
             <a:endParaRPr lang="en-US" sz="1100" dirty="0"/>
           </a:p>
@@ -3412,7 +3492,7 @@
         </p:nvSpPr>
         <p:spPr>
           <a:xfrm>
-            <a:off x="6446520" y="2327148"/>
+            <a:off x="6446520" y="2532888"/>
             <a:ext cx="237744" cy="237744"/>
           </a:xfrm>
           <a:prstGeom prst="ellipse">
@@ -3432,7 +3512,7 @@
         </p:nvSpPr>
         <p:spPr>
           <a:xfrm>
-            <a:off x="6446520" y="2327148"/>
+            <a:off x="6446520" y="2532888"/>
             <a:ext cx="237744" cy="237744"/>
           </a:xfrm>
           <a:prstGeom prst="rect">
@@ -3471,8 +3551,8 @@
         </p:nvSpPr>
         <p:spPr>
           <a:xfrm>
-            <a:off x="6766560" y="2308860"/>
-            <a:ext cx="1920240" cy="388620"/>
+            <a:off x="6766560" y="2514600"/>
+            <a:ext cx="1920240" cy="457200"/>
           </a:xfrm>
           <a:prstGeom prst="rect">
             <a:avLst/>
@@ -3496,7 +3576,7 @@
                 <a:ea typeface="Arial" pitchFamily="34" charset="-122"/>
                 <a:cs typeface="Arial" pitchFamily="34" charset="-120"/>
               </a:rPr>
-              <a:t>작업 — 이 작업으로 고정(상세에서 열면)</a:t>
+              <a:t>종료 — 비워 둘 수 있습니다</a:t>
             </a:r>
             <a:endParaRPr lang="en-US" sz="1100" dirty="0"/>
           </a:p>
@@ -3510,7 +3590,7 @@
         </p:nvSpPr>
         <p:spPr>
           <a:xfrm>
-            <a:off x="6446520" y="2761488"/>
+            <a:off x="6446520" y="3035808"/>
             <a:ext cx="237744" cy="237744"/>
           </a:xfrm>
           <a:prstGeom prst="ellipse">
@@ -3530,7 +3610,7 @@
         </p:nvSpPr>
         <p:spPr>
           <a:xfrm>
-            <a:off x="6446520" y="2761488"/>
+            <a:off x="6446520" y="3035808"/>
             <a:ext cx="237744" cy="237744"/>
           </a:xfrm>
           <a:prstGeom prst="rect">
@@ -3569,8 +3649,8 @@
         </p:nvSpPr>
         <p:spPr>
           <a:xfrm>
-            <a:off x="6766560" y="2743200"/>
-            <a:ext cx="1920240" cy="388620"/>
+            <a:off x="6766560" y="3017520"/>
+            <a:ext cx="1920240" cy="457200"/>
           </a:xfrm>
           <a:prstGeom prst="rect">
             <a:avLst/>
@@ -3594,7 +3674,7 @@
                 <a:ea typeface="Arial" pitchFamily="34" charset="-122"/>
                 <a:cs typeface="Arial" pitchFamily="34" charset="-120"/>
               </a:rPr>
-              <a:t>패스 — 또는 작업 공용</a:t>
+              <a:t>[추가] — 저장</a:t>
             </a:r>
             <a:endParaRPr lang="en-US" sz="1100" dirty="0"/>
           </a:p>
@@ -3608,8 +3688,8 @@
         </p:nvSpPr>
         <p:spPr>
           <a:xfrm>
-            <a:off x="6446520" y="3195828"/>
-            <a:ext cx="237744" cy="237744"/>
+            <a:off x="8503920" y="4663440"/>
+            <a:ext cx="365760" cy="365760"/>
           </a:xfrm>
           <a:prstGeom prst="ellipse">
             <a:avLst/>
@@ -3623,300 +3703,6 @@
       <p:sp>
         <p:nvSpPr>
           <p:cNvPr id="22" name="Text 19"/>
-          <p:cNvSpPr/>
-          <p:nvPr/>
-        </p:nvSpPr>
-        <p:spPr>
-          <a:xfrm>
-            <a:off x="6446520" y="3195828"/>
-            <a:ext cx="237744" cy="237744"/>
-          </a:xfrm>
-          <a:prstGeom prst="rect">
-            <a:avLst/>
-          </a:prstGeom>
-          <a:noFill/>
-          <a:ln/>
-        </p:spPr>
-        <p:txBody>
-          <a:bodyPr wrap="square" lIns="0" tIns="0" rIns="0" bIns="0" rtlCol="0" anchor="ctr"/>
-          <a:lstStyle/>
-          <a:p>
-            <a:pPr algn="ctr" indent="0" marL="0">
-              <a:buNone/>
-            </a:pPr>
-            <a:r>
-              <a:rPr lang="en-US" sz="1100" b="1" dirty="0">
-                <a:solidFill>
-                  <a:srgbClr val="FFFFFF"/>
-                </a:solidFill>
-                <a:latin typeface="Arial" pitchFamily="34" charset="0"/>
-                <a:ea typeface="Arial" pitchFamily="34" charset="-122"/>
-                <a:cs typeface="Arial" pitchFamily="34" charset="-120"/>
-              </a:rPr>
-              <a:t>6</a:t>
-            </a:r>
-            <a:endParaRPr lang="en-US" sz="1100" dirty="0"/>
-          </a:p>
-        </p:txBody>
-      </p:sp>
-      <p:sp>
-        <p:nvSpPr>
-          <p:cNvPr id="23" name="Text 20"/>
-          <p:cNvSpPr/>
-          <p:nvPr/>
-        </p:nvSpPr>
-        <p:spPr>
-          <a:xfrm>
-            <a:off x="6766560" y="3177540"/>
-            <a:ext cx="1920240" cy="388620"/>
-          </a:xfrm>
-          <a:prstGeom prst="rect">
-            <a:avLst/>
-          </a:prstGeom>
-          <a:noFill/>
-          <a:ln/>
-        </p:spPr>
-        <p:txBody>
-          <a:bodyPr wrap="square" lIns="0" tIns="0" rIns="0" bIns="0" rtlCol="0" anchor="ctr"/>
-          <a:lstStyle/>
-          <a:p>
-            <a:pPr indent="0" marL="0">
-              <a:buNone/>
-            </a:pPr>
-            <a:r>
-              <a:rPr lang="en-US" sz="1100" dirty="0">
-                <a:solidFill>
-                  <a:srgbClr val="4A5560"/>
-                </a:solidFill>
-                <a:latin typeface="Arial" pitchFamily="34" charset="0"/>
-                <a:ea typeface="Arial" pitchFamily="34" charset="-122"/>
-                <a:cs typeface="Arial" pitchFamily="34" charset="-120"/>
-              </a:rPr>
-              <a:t>장비 (선택)</a:t>
-            </a:r>
-            <a:endParaRPr lang="en-US" sz="1100" dirty="0"/>
-          </a:p>
-        </p:txBody>
-      </p:sp>
-      <p:sp>
-        <p:nvSpPr>
-          <p:cNvPr id="24" name="Shape 21"/>
-          <p:cNvSpPr/>
-          <p:nvPr/>
-        </p:nvSpPr>
-        <p:spPr>
-          <a:xfrm>
-            <a:off x="6446520" y="3630168"/>
-            <a:ext cx="237744" cy="237744"/>
-          </a:xfrm>
-          <a:prstGeom prst="ellipse">
-            <a:avLst/>
-          </a:prstGeom>
-          <a:solidFill>
-            <a:srgbClr val="E76F51"/>
-          </a:solidFill>
-          <a:ln/>
-        </p:spPr>
-      </p:sp>
-      <p:sp>
-        <p:nvSpPr>
-          <p:cNvPr id="25" name="Text 22"/>
-          <p:cNvSpPr/>
-          <p:nvPr/>
-        </p:nvSpPr>
-        <p:spPr>
-          <a:xfrm>
-            <a:off x="6446520" y="3630168"/>
-            <a:ext cx="237744" cy="237744"/>
-          </a:xfrm>
-          <a:prstGeom prst="rect">
-            <a:avLst/>
-          </a:prstGeom>
-          <a:noFill/>
-          <a:ln/>
-        </p:spPr>
-        <p:txBody>
-          <a:bodyPr wrap="square" lIns="0" tIns="0" rIns="0" bIns="0" rtlCol="0" anchor="ctr"/>
-          <a:lstStyle/>
-          <a:p>
-            <a:pPr algn="ctr" indent="0" marL="0">
-              <a:buNone/>
-            </a:pPr>
-            <a:r>
-              <a:rPr lang="en-US" sz="1100" b="1" dirty="0">
-                <a:solidFill>
-                  <a:srgbClr val="FFFFFF"/>
-                </a:solidFill>
-                <a:latin typeface="Arial" pitchFamily="34" charset="0"/>
-                <a:ea typeface="Arial" pitchFamily="34" charset="-122"/>
-                <a:cs typeface="Arial" pitchFamily="34" charset="-120"/>
-              </a:rPr>
-              <a:t>7</a:t>
-            </a:r>
-            <a:endParaRPr lang="en-US" sz="1100" dirty="0"/>
-          </a:p>
-        </p:txBody>
-      </p:sp>
-      <p:sp>
-        <p:nvSpPr>
-          <p:cNvPr id="26" name="Text 23"/>
-          <p:cNvSpPr/>
-          <p:nvPr/>
-        </p:nvSpPr>
-        <p:spPr>
-          <a:xfrm>
-            <a:off x="6766560" y="3611880"/>
-            <a:ext cx="1920240" cy="388620"/>
-          </a:xfrm>
-          <a:prstGeom prst="rect">
-            <a:avLst/>
-          </a:prstGeom>
-          <a:noFill/>
-          <a:ln/>
-        </p:spPr>
-        <p:txBody>
-          <a:bodyPr wrap="square" lIns="0" tIns="0" rIns="0" bIns="0" rtlCol="0" anchor="ctr"/>
-          <a:lstStyle/>
-          <a:p>
-            <a:pPr indent="0" marL="0">
-              <a:buNone/>
-            </a:pPr>
-            <a:r>
-              <a:rPr lang="en-US" sz="1100" dirty="0">
-                <a:solidFill>
-                  <a:srgbClr val="4A5560"/>
-                </a:solidFill>
-                <a:latin typeface="Arial" pitchFamily="34" charset="0"/>
-                <a:ea typeface="Arial" pitchFamily="34" charset="-122"/>
-                <a:cs typeface="Arial" pitchFamily="34" charset="-120"/>
-              </a:rPr>
-              <a:t>시간 0의 시각 — 시간 자료면 필수 *</a:t>
-            </a:r>
-            <a:endParaRPr lang="en-US" sz="1100" dirty="0"/>
-          </a:p>
-        </p:txBody>
-      </p:sp>
-      <p:sp>
-        <p:nvSpPr>
-          <p:cNvPr id="27" name="Shape 24"/>
-          <p:cNvSpPr/>
-          <p:nvPr/>
-        </p:nvSpPr>
-        <p:spPr>
-          <a:xfrm>
-            <a:off x="6446520" y="4064508"/>
-            <a:ext cx="237744" cy="237744"/>
-          </a:xfrm>
-          <a:prstGeom prst="ellipse">
-            <a:avLst/>
-          </a:prstGeom>
-          <a:solidFill>
-            <a:srgbClr val="E76F51"/>
-          </a:solidFill>
-          <a:ln/>
-        </p:spPr>
-      </p:sp>
-      <p:sp>
-        <p:nvSpPr>
-          <p:cNvPr id="28" name="Text 25"/>
-          <p:cNvSpPr/>
-          <p:nvPr/>
-        </p:nvSpPr>
-        <p:spPr>
-          <a:xfrm>
-            <a:off x="6446520" y="4064508"/>
-            <a:ext cx="237744" cy="237744"/>
-          </a:xfrm>
-          <a:prstGeom prst="rect">
-            <a:avLst/>
-          </a:prstGeom>
-          <a:noFill/>
-          <a:ln/>
-        </p:spPr>
-        <p:txBody>
-          <a:bodyPr wrap="square" lIns="0" tIns="0" rIns="0" bIns="0" rtlCol="0" anchor="ctr"/>
-          <a:lstStyle/>
-          <a:p>
-            <a:pPr algn="ctr" indent="0" marL="0">
-              <a:buNone/>
-            </a:pPr>
-            <a:r>
-              <a:rPr lang="en-US" sz="1100" b="1" dirty="0">
-                <a:solidFill>
-                  <a:srgbClr val="FFFFFF"/>
-                </a:solidFill>
-                <a:latin typeface="Arial" pitchFamily="34" charset="0"/>
-                <a:ea typeface="Arial" pitchFamily="34" charset="-122"/>
-                <a:cs typeface="Arial" pitchFamily="34" charset="-120"/>
-              </a:rPr>
-              <a:t>8</a:t>
-            </a:r>
-            <a:endParaRPr lang="en-US" sz="1100" dirty="0"/>
-          </a:p>
-        </p:txBody>
-      </p:sp>
-      <p:sp>
-        <p:nvSpPr>
-          <p:cNvPr id="29" name="Text 26"/>
-          <p:cNvSpPr/>
-          <p:nvPr/>
-        </p:nvSpPr>
-        <p:spPr>
-          <a:xfrm>
-            <a:off x="6766560" y="4046220"/>
-            <a:ext cx="1920240" cy="388620"/>
-          </a:xfrm>
-          <a:prstGeom prst="rect">
-            <a:avLst/>
-          </a:prstGeom>
-          <a:noFill/>
-          <a:ln/>
-        </p:spPr>
-        <p:txBody>
-          <a:bodyPr wrap="square" lIns="0" tIns="0" rIns="0" bIns="0" rtlCol="0" anchor="ctr"/>
-          <a:lstStyle/>
-          <a:p>
-            <a:pPr indent="0" marL="0">
-              <a:buNone/>
-            </a:pPr>
-            <a:r>
-              <a:rPr lang="en-US" sz="1100" dirty="0">
-                <a:solidFill>
-                  <a:srgbClr val="4A5560"/>
-                </a:solidFill>
-                <a:latin typeface="Arial" pitchFamily="34" charset="0"/>
-                <a:ea typeface="Arial" pitchFamily="34" charset="-122"/>
-                <a:cs typeface="Arial" pitchFamily="34" charset="-120"/>
-              </a:rPr>
-              <a:t>[올리기]</a:t>
-            </a:r>
-            <a:endParaRPr lang="en-US" sz="1100" dirty="0"/>
-          </a:p>
-        </p:txBody>
-      </p:sp>
-      <p:sp>
-        <p:nvSpPr>
-          <p:cNvPr id="30" name="Shape 27"/>
-          <p:cNvSpPr/>
-          <p:nvPr/>
-        </p:nvSpPr>
-        <p:spPr>
-          <a:xfrm>
-            <a:off x="8503920" y="4663440"/>
-            <a:ext cx="365760" cy="365760"/>
-          </a:xfrm>
-          <a:prstGeom prst="ellipse">
-            <a:avLst/>
-          </a:prstGeom>
-          <a:solidFill>
-            <a:srgbClr val="E76F51"/>
-          </a:solidFill>
-          <a:ln/>
-        </p:spPr>
-      </p:sp>
-      <p:sp>
-        <p:nvSpPr>
-          <p:cNvPr id="31" name="Text 28"/>
           <p:cNvSpPr/>
           <p:nvPr/>
         </p:nvSpPr>
@@ -4018,7 +3804,7 @@
                 <a:ea typeface="Arial" pitchFamily="34" charset="-122"/>
                 <a:cs typeface="Arial" pitchFamily="34" charset="-120"/>
               </a:rPr>
-              <a:t>10. 파일 종류 — 시간 자료</a:t>
+              <a:t>9. 작업 상세 — 첨부</a:t>
             </a:r>
             <a:endParaRPr lang="en-US" sz="1800" dirty="0"/>
           </a:p>
@@ -4026,7 +3812,7 @@
       </p:sp>
       <p:pic>
         <p:nvPicPr>
-          <p:cNvPr id="3" name="Image 0" descr="/Users/geosoft/Documents/weld-dashboard/docs/2026-10-23/slides/imgs/11-upload-video-n.png">    </p:cNvPr>
+          <p:cNvPr id="3" name="Image 0" descr="/Users/geosoft/Documents/weld-dashboard/docs/2026-10-23/slides/imgs/06-job-detail-attach-n.png">    </p:cNvPr>
           <p:cNvPicPr>
             <a:picLocks noChangeAspect="1"/>
           </p:cNvPicPr>
@@ -4201,7 +3987,7 @@
                 <a:ea typeface="Arial" pitchFamily="34" charset="-122"/>
                 <a:cs typeface="Arial" pitchFamily="34" charset="-120"/>
               </a:rPr>
-              <a:t>종류 안내 — 확장자로 짐작, 최종은 서버가 내용으로 판별</a:t>
+              <a:t>[에셋 올리기] — 새 파일 올리기</a:t>
             </a:r>
             <a:endParaRPr lang="en-US" sz="1100" dirty="0"/>
           </a:p>
@@ -4299,7 +4085,7 @@
                 <a:ea typeface="Arial" pitchFamily="34" charset="-122"/>
                 <a:cs typeface="Arial" pitchFamily="34" charset="-120"/>
               </a:rPr>
-              <a:t>올린 뒤 후처리 — 예: 속성 → 길이 → 타임라인 배치</a:t>
+              <a:t>[에셋 붙이기(첨부만)] — 기존 자료 연결</a:t>
             </a:r>
             <a:endParaRPr lang="en-US" sz="1100" dirty="0"/>
           </a:p>
@@ -4397,7 +4183,7 @@
                 <a:ea typeface="Arial" pitchFamily="34" charset="-122"/>
                 <a:cs typeface="Arial" pitchFamily="34" charset="-120"/>
               </a:rPr>
-              <a:t>시간 0의 시각 * — 시간 자료는 필수. 없으면 올릴 수 없음</a:t>
+              <a:t>패스 칸 — 어느 패스에 속할지</a:t>
             </a:r>
             <a:endParaRPr lang="en-US" sz="1100" dirty="0"/>
           </a:p>
@@ -4495,7 +4281,7 @@
                 <a:ea typeface="Arial" pitchFamily="34" charset="-122"/>
                 <a:cs typeface="Arial" pitchFamily="34" charset="-120"/>
               </a:rPr>
-              <a:t>빠른 채우기 — 작업 시작 · 파일 시각 · 현재 시각</a:t>
+              <a:t>[떼기] — 작업과의 연결만 끊김 (파일은 남음)</a:t>
             </a:r>
             <a:endParaRPr lang="en-US" sz="1100" dirty="0"/>
           </a:p>
@@ -4625,7 +4411,7 @@
                 <a:ea typeface="Arial" pitchFamily="34" charset="-122"/>
                 <a:cs typeface="Arial" pitchFamily="34" charset="-120"/>
               </a:rPr>
-              <a:t>11. 파일 종류 — 문서 · 이미지</a:t>
+              <a:t>10. 첨부 — 에셋 올리기 창</a:t>
             </a:r>
             <a:endParaRPr lang="en-US" sz="1800" dirty="0"/>
           </a:p>
@@ -4633,7 +4419,7 @@
       </p:sp>
       <p:pic>
         <p:nvPicPr>
-          <p:cNvPr id="3" name="Image 0" descr="/Users/geosoft/Documents/weld-dashboard/docs/2026-10-23/slides/imgs/11-upload-pdf-n.png">    </p:cNvPr>
+          <p:cNvPr id="3" name="Image 0" descr="/Users/geosoft/Documents/weld-dashboard/docs/2026-10-23/slides/imgs/10-asset-upload-n.png">    </p:cNvPr>
           <p:cNvPicPr>
             <a:picLocks noChangeAspect="1"/>
           </p:cNvPicPr>
@@ -4784,7 +4570,7 @@
         <p:spPr>
           <a:xfrm>
             <a:off x="6766560" y="1005840"/>
-            <a:ext cx="1920240" cy="457200"/>
+            <a:ext cx="1920240" cy="340360"/>
           </a:xfrm>
           <a:prstGeom prst="rect">
             <a:avLst/>
@@ -4808,7 +4594,7 @@
                 <a:ea typeface="Arial" pitchFamily="34" charset="-122"/>
                 <a:cs typeface="Arial" pitchFamily="34" charset="-120"/>
               </a:rPr>
-              <a:t>종류 짐작 — pdf → 문서 · 성적서, jpg · png → 이미지</a:t>
+              <a:t>주제 (선택) — 이번 올리기에 공통으로 쓰는 짧은 글</a:t>
             </a:r>
             <a:endParaRPr lang="en-US" sz="1100" dirty="0"/>
           </a:p>
@@ -4822,7 +4608,7 @@
         </p:nvSpPr>
         <p:spPr>
           <a:xfrm>
-            <a:off x="6446520" y="1527048"/>
+            <a:off x="6446520" y="1410208"/>
             <a:ext cx="237744" cy="237744"/>
           </a:xfrm>
           <a:prstGeom prst="ellipse">
@@ -4842,7 +4628,7 @@
         </p:nvSpPr>
         <p:spPr>
           <a:xfrm>
-            <a:off x="6446520" y="1527048"/>
+            <a:off x="6446520" y="1410208"/>
             <a:ext cx="237744" cy="237744"/>
           </a:xfrm>
           <a:prstGeom prst="rect">
@@ -4881,8 +4667,8 @@
         </p:nvSpPr>
         <p:spPr>
           <a:xfrm>
-            <a:off x="6766560" y="1508760"/>
-            <a:ext cx="1920240" cy="457200"/>
+            <a:off x="6766560" y="1391920"/>
+            <a:ext cx="1920240" cy="340360"/>
           </a:xfrm>
           <a:prstGeom prst="rect">
             <a:avLst/>
@@ -4906,7 +4692,7 @@
                 <a:ea typeface="Arial" pitchFamily="34" charset="-122"/>
                 <a:cs typeface="Arial" pitchFamily="34" charset="-120"/>
               </a:rPr>
-              <a:t>올린 뒤 후처리 — pdf: 속성 → 글자 인식 · 성적서 / 이미지: 속성만</a:t>
+              <a:t>상황 (선택) — 공통으로 쓰는 짧은 글</a:t>
             </a:r>
             <a:endParaRPr lang="en-US" sz="1100" dirty="0"/>
           </a:p>
@@ -4920,7 +4706,7 @@
         </p:nvSpPr>
         <p:spPr>
           <a:xfrm>
-            <a:off x="6446520" y="2029968"/>
+            <a:off x="6446520" y="1796288"/>
             <a:ext cx="237744" cy="237744"/>
           </a:xfrm>
           <a:prstGeom prst="ellipse">
@@ -4940,7 +4726,7 @@
         </p:nvSpPr>
         <p:spPr>
           <a:xfrm>
-            <a:off x="6446520" y="2029968"/>
+            <a:off x="6446520" y="1796288"/>
             <a:ext cx="237744" cy="237744"/>
           </a:xfrm>
           <a:prstGeom prst="rect">
@@ -4979,8 +4765,8 @@
         </p:nvSpPr>
         <p:spPr>
           <a:xfrm>
-            <a:off x="6766560" y="2011680"/>
-            <a:ext cx="1920240" cy="457200"/>
+            <a:off x="6766560" y="1778000"/>
+            <a:ext cx="1920240" cy="340360"/>
           </a:xfrm>
           <a:prstGeom prst="rect">
             <a:avLst/>
@@ -5004,7 +4790,7 @@
                 <a:ea typeface="Arial" pitchFamily="34" charset="-122"/>
                 <a:cs typeface="Arial" pitchFamily="34" charset="-120"/>
               </a:rPr>
-              <a:t>시간 0의 시각 — 필수 표시(*) 없음. 비워도 올릴 수 있음</a:t>
+              <a:t>작업 — 상세·첨부에서 열면 이 작업으로 고정</a:t>
             </a:r>
             <a:endParaRPr lang="en-US" sz="1100" dirty="0"/>
           </a:p>
@@ -5018,8 +4804,8 @@
         </p:nvSpPr>
         <p:spPr>
           <a:xfrm>
-            <a:off x="8503920" y="4663440"/>
-            <a:ext cx="365760" cy="365760"/>
+            <a:off x="6446520" y="2182368"/>
+            <a:ext cx="237744" cy="237744"/>
           </a:xfrm>
           <a:prstGeom prst="ellipse">
             <a:avLst/>
@@ -5033,6 +4819,594 @@
       <p:sp>
         <p:nvSpPr>
           <p:cNvPr id="16" name="Text 13"/>
+          <p:cNvSpPr/>
+          <p:nvPr/>
+        </p:nvSpPr>
+        <p:spPr>
+          <a:xfrm>
+            <a:off x="6446520" y="2182368"/>
+            <a:ext cx="237744" cy="237744"/>
+          </a:xfrm>
+          <a:prstGeom prst="rect">
+            <a:avLst/>
+          </a:prstGeom>
+          <a:noFill/>
+          <a:ln/>
+        </p:spPr>
+        <p:txBody>
+          <a:bodyPr wrap="square" lIns="0" tIns="0" rIns="0" bIns="0" rtlCol="0" anchor="ctr"/>
+          <a:lstStyle/>
+          <a:p>
+            <a:pPr algn="ctr" indent="0" marL="0">
+              <a:buNone/>
+            </a:pPr>
+            <a:r>
+              <a:rPr lang="en-US" sz="1100" b="1" dirty="0">
+                <a:solidFill>
+                  <a:srgbClr val="FFFFFF"/>
+                </a:solidFill>
+                <a:latin typeface="Arial" pitchFamily="34" charset="0"/>
+                <a:ea typeface="Arial" pitchFamily="34" charset="-122"/>
+                <a:cs typeface="Arial" pitchFamily="34" charset="-120"/>
+              </a:rPr>
+              <a:t>4</a:t>
+            </a:r>
+            <a:endParaRPr lang="en-US" sz="1100" dirty="0"/>
+          </a:p>
+        </p:txBody>
+      </p:sp>
+      <p:sp>
+        <p:nvSpPr>
+          <p:cNvPr id="17" name="Text 14"/>
+          <p:cNvSpPr/>
+          <p:nvPr/>
+        </p:nvSpPr>
+        <p:spPr>
+          <a:xfrm>
+            <a:off x="6766560" y="2164080"/>
+            <a:ext cx="1920240" cy="340360"/>
+          </a:xfrm>
+          <a:prstGeom prst="rect">
+            <a:avLst/>
+          </a:prstGeom>
+          <a:noFill/>
+          <a:ln/>
+        </p:spPr>
+        <p:txBody>
+          <a:bodyPr wrap="square" lIns="0" tIns="0" rIns="0" bIns="0" rtlCol="0" anchor="ctr"/>
+          <a:lstStyle/>
+          <a:p>
+            <a:pPr indent="0" marL="0">
+              <a:buNone/>
+            </a:pPr>
+            <a:r>
+              <a:rPr lang="en-US" sz="1100" dirty="0">
+                <a:solidFill>
+                  <a:srgbClr val="4A5560"/>
+                </a:solidFill>
+                <a:latin typeface="Arial" pitchFamily="34" charset="0"/>
+                <a:ea typeface="Arial" pitchFamily="34" charset="-122"/>
+                <a:cs typeface="Arial" pitchFamily="34" charset="-120"/>
+              </a:rPr>
+              <a:t>패스 — 특정 패스 또는 작업 공용</a:t>
+            </a:r>
+            <a:endParaRPr lang="en-US" sz="1100" dirty="0"/>
+          </a:p>
+        </p:txBody>
+      </p:sp>
+      <p:sp>
+        <p:nvSpPr>
+          <p:cNvPr id="18" name="Shape 15"/>
+          <p:cNvSpPr/>
+          <p:nvPr/>
+        </p:nvSpPr>
+        <p:spPr>
+          <a:xfrm>
+            <a:off x="6446520" y="2568448"/>
+            <a:ext cx="237744" cy="237744"/>
+          </a:xfrm>
+          <a:prstGeom prst="ellipse">
+            <a:avLst/>
+          </a:prstGeom>
+          <a:solidFill>
+            <a:srgbClr val="E76F51"/>
+          </a:solidFill>
+          <a:ln/>
+        </p:spPr>
+      </p:sp>
+      <p:sp>
+        <p:nvSpPr>
+          <p:cNvPr id="19" name="Text 16"/>
+          <p:cNvSpPr/>
+          <p:nvPr/>
+        </p:nvSpPr>
+        <p:spPr>
+          <a:xfrm>
+            <a:off x="6446520" y="2568448"/>
+            <a:ext cx="237744" cy="237744"/>
+          </a:xfrm>
+          <a:prstGeom prst="rect">
+            <a:avLst/>
+          </a:prstGeom>
+          <a:noFill/>
+          <a:ln/>
+        </p:spPr>
+        <p:txBody>
+          <a:bodyPr wrap="square" lIns="0" tIns="0" rIns="0" bIns="0" rtlCol="0" anchor="ctr"/>
+          <a:lstStyle/>
+          <a:p>
+            <a:pPr algn="ctr" indent="0" marL="0">
+              <a:buNone/>
+            </a:pPr>
+            <a:r>
+              <a:rPr lang="en-US" sz="1100" b="1" dirty="0">
+                <a:solidFill>
+                  <a:srgbClr val="FFFFFF"/>
+                </a:solidFill>
+                <a:latin typeface="Arial" pitchFamily="34" charset="0"/>
+                <a:ea typeface="Arial" pitchFamily="34" charset="-122"/>
+                <a:cs typeface="Arial" pitchFamily="34" charset="-120"/>
+              </a:rPr>
+              <a:t>5</a:t>
+            </a:r>
+            <a:endParaRPr lang="en-US" sz="1100" dirty="0"/>
+          </a:p>
+        </p:txBody>
+      </p:sp>
+      <p:sp>
+        <p:nvSpPr>
+          <p:cNvPr id="20" name="Text 17"/>
+          <p:cNvSpPr/>
+          <p:nvPr/>
+        </p:nvSpPr>
+        <p:spPr>
+          <a:xfrm>
+            <a:off x="6766560" y="2550160"/>
+            <a:ext cx="1920240" cy="340360"/>
+          </a:xfrm>
+          <a:prstGeom prst="rect">
+            <a:avLst/>
+          </a:prstGeom>
+          <a:noFill/>
+          <a:ln/>
+        </p:spPr>
+        <p:txBody>
+          <a:bodyPr wrap="square" lIns="0" tIns="0" rIns="0" bIns="0" rtlCol="0" anchor="ctr"/>
+          <a:lstStyle/>
+          <a:p>
+            <a:pPr indent="0" marL="0">
+              <a:buNone/>
+            </a:pPr>
+            <a:r>
+              <a:rPr lang="en-US" sz="1100" dirty="0">
+                <a:solidFill>
+                  <a:srgbClr val="4A5560"/>
+                </a:solidFill>
+                <a:latin typeface="Arial" pitchFamily="34" charset="0"/>
+                <a:ea typeface="Arial" pitchFamily="34" charset="-122"/>
+                <a:cs typeface="Arial" pitchFamily="34" charset="-120"/>
+              </a:rPr>
+              <a:t>장비 (선택)</a:t>
+            </a:r>
+            <a:endParaRPr lang="en-US" sz="1100" dirty="0"/>
+          </a:p>
+        </p:txBody>
+      </p:sp>
+      <p:sp>
+        <p:nvSpPr>
+          <p:cNvPr id="21" name="Shape 18"/>
+          <p:cNvSpPr/>
+          <p:nvPr/>
+        </p:nvSpPr>
+        <p:spPr>
+          <a:xfrm>
+            <a:off x="6446520" y="2954528"/>
+            <a:ext cx="237744" cy="237744"/>
+          </a:xfrm>
+          <a:prstGeom prst="ellipse">
+            <a:avLst/>
+          </a:prstGeom>
+          <a:solidFill>
+            <a:srgbClr val="E76F51"/>
+          </a:solidFill>
+          <a:ln/>
+        </p:spPr>
+      </p:sp>
+      <p:sp>
+        <p:nvSpPr>
+          <p:cNvPr id="22" name="Text 19"/>
+          <p:cNvSpPr/>
+          <p:nvPr/>
+        </p:nvSpPr>
+        <p:spPr>
+          <a:xfrm>
+            <a:off x="6446520" y="2954528"/>
+            <a:ext cx="237744" cy="237744"/>
+          </a:xfrm>
+          <a:prstGeom prst="rect">
+            <a:avLst/>
+          </a:prstGeom>
+          <a:noFill/>
+          <a:ln/>
+        </p:spPr>
+        <p:txBody>
+          <a:bodyPr wrap="square" lIns="0" tIns="0" rIns="0" bIns="0" rtlCol="0" anchor="ctr"/>
+          <a:lstStyle/>
+          <a:p>
+            <a:pPr algn="ctr" indent="0" marL="0">
+              <a:buNone/>
+            </a:pPr>
+            <a:r>
+              <a:rPr lang="en-US" sz="1100" b="1" dirty="0">
+                <a:solidFill>
+                  <a:srgbClr val="FFFFFF"/>
+                </a:solidFill>
+                <a:latin typeface="Arial" pitchFamily="34" charset="0"/>
+                <a:ea typeface="Arial" pitchFamily="34" charset="-122"/>
+                <a:cs typeface="Arial" pitchFamily="34" charset="-120"/>
+              </a:rPr>
+              <a:t>6</a:t>
+            </a:r>
+            <a:endParaRPr lang="en-US" sz="1100" dirty="0"/>
+          </a:p>
+        </p:txBody>
+      </p:sp>
+      <p:sp>
+        <p:nvSpPr>
+          <p:cNvPr id="23" name="Text 20"/>
+          <p:cNvSpPr/>
+          <p:nvPr/>
+        </p:nvSpPr>
+        <p:spPr>
+          <a:xfrm>
+            <a:off x="6766560" y="2936240"/>
+            <a:ext cx="1920240" cy="340360"/>
+          </a:xfrm>
+          <a:prstGeom prst="rect">
+            <a:avLst/>
+          </a:prstGeom>
+          <a:noFill/>
+          <a:ln/>
+        </p:spPr>
+        <p:txBody>
+          <a:bodyPr wrap="square" lIns="0" tIns="0" rIns="0" bIns="0" rtlCol="0" anchor="ctr"/>
+          <a:lstStyle/>
+          <a:p>
+            <a:pPr indent="0" marL="0">
+              <a:buNone/>
+            </a:pPr>
+            <a:r>
+              <a:rPr lang="en-US" sz="1100" dirty="0">
+                <a:solidFill>
+                  <a:srgbClr val="4A5560"/>
+                </a:solidFill>
+                <a:latin typeface="Arial" pitchFamily="34" charset="0"/>
+                <a:ea typeface="Arial" pitchFamily="34" charset="-122"/>
+                <a:cs typeface="Arial" pitchFamily="34" charset="-120"/>
+              </a:rPr>
+              <a:t>시간 0의 시각(공통) — 아래 버튼으로 채운 뒤 모든 파일에 적용 가능</a:t>
+            </a:r>
+            <a:endParaRPr lang="en-US" sz="1100" dirty="0"/>
+          </a:p>
+        </p:txBody>
+      </p:sp>
+      <p:sp>
+        <p:nvSpPr>
+          <p:cNvPr id="24" name="Shape 21"/>
+          <p:cNvSpPr/>
+          <p:nvPr/>
+        </p:nvSpPr>
+        <p:spPr>
+          <a:xfrm>
+            <a:off x="6446520" y="3340608"/>
+            <a:ext cx="237744" cy="237744"/>
+          </a:xfrm>
+          <a:prstGeom prst="ellipse">
+            <a:avLst/>
+          </a:prstGeom>
+          <a:solidFill>
+            <a:srgbClr val="E76F51"/>
+          </a:solidFill>
+          <a:ln/>
+        </p:spPr>
+      </p:sp>
+      <p:sp>
+        <p:nvSpPr>
+          <p:cNvPr id="25" name="Text 22"/>
+          <p:cNvSpPr/>
+          <p:nvPr/>
+        </p:nvSpPr>
+        <p:spPr>
+          <a:xfrm>
+            <a:off x="6446520" y="3340608"/>
+            <a:ext cx="237744" cy="237744"/>
+          </a:xfrm>
+          <a:prstGeom prst="rect">
+            <a:avLst/>
+          </a:prstGeom>
+          <a:noFill/>
+          <a:ln/>
+        </p:spPr>
+        <p:txBody>
+          <a:bodyPr wrap="square" lIns="0" tIns="0" rIns="0" bIns="0" rtlCol="0" anchor="ctr"/>
+          <a:lstStyle/>
+          <a:p>
+            <a:pPr algn="ctr" indent="0" marL="0">
+              <a:buNone/>
+            </a:pPr>
+            <a:r>
+              <a:rPr lang="en-US" sz="1100" b="1" dirty="0">
+                <a:solidFill>
+                  <a:srgbClr val="FFFFFF"/>
+                </a:solidFill>
+                <a:latin typeface="Arial" pitchFamily="34" charset="0"/>
+                <a:ea typeface="Arial" pitchFamily="34" charset="-122"/>
+                <a:cs typeface="Arial" pitchFamily="34" charset="-120"/>
+              </a:rPr>
+              <a:t>7</a:t>
+            </a:r>
+            <a:endParaRPr lang="en-US" sz="1100" dirty="0"/>
+          </a:p>
+        </p:txBody>
+      </p:sp>
+      <p:sp>
+        <p:nvSpPr>
+          <p:cNvPr id="26" name="Text 23"/>
+          <p:cNvSpPr/>
+          <p:nvPr/>
+        </p:nvSpPr>
+        <p:spPr>
+          <a:xfrm>
+            <a:off x="6766560" y="3322320"/>
+            <a:ext cx="1920240" cy="340360"/>
+          </a:xfrm>
+          <a:prstGeom prst="rect">
+            <a:avLst/>
+          </a:prstGeom>
+          <a:noFill/>
+          <a:ln/>
+        </p:spPr>
+        <p:txBody>
+          <a:bodyPr wrap="square" lIns="0" tIns="0" rIns="0" bIns="0" rtlCol="0" anchor="ctr"/>
+          <a:lstStyle/>
+          <a:p>
+            <a:pPr indent="0" marL="0">
+              <a:buNone/>
+            </a:pPr>
+            <a:r>
+              <a:rPr lang="en-US" sz="1100" dirty="0">
+                <a:solidFill>
+                  <a:srgbClr val="4A5560"/>
+                </a:solidFill>
+                <a:latin typeface="Arial" pitchFamily="34" charset="0"/>
+                <a:ea typeface="Arial" pitchFamily="34" charset="-122"/>
+                <a:cs typeface="Arial" pitchFamily="34" charset="-120"/>
+              </a:rPr>
+              <a:t>[파일 고르기] — 여러 개 선택 → 대기열</a:t>
+            </a:r>
+            <a:endParaRPr lang="en-US" sz="1100" dirty="0"/>
+          </a:p>
+        </p:txBody>
+      </p:sp>
+      <p:sp>
+        <p:nvSpPr>
+          <p:cNvPr id="27" name="Shape 24"/>
+          <p:cNvSpPr/>
+          <p:nvPr/>
+        </p:nvSpPr>
+        <p:spPr>
+          <a:xfrm>
+            <a:off x="6446520" y="3726688"/>
+            <a:ext cx="237744" cy="237744"/>
+          </a:xfrm>
+          <a:prstGeom prst="ellipse">
+            <a:avLst/>
+          </a:prstGeom>
+          <a:solidFill>
+            <a:srgbClr val="E76F51"/>
+          </a:solidFill>
+          <a:ln/>
+        </p:spPr>
+      </p:sp>
+      <p:sp>
+        <p:nvSpPr>
+          <p:cNvPr id="28" name="Text 25"/>
+          <p:cNvSpPr/>
+          <p:nvPr/>
+        </p:nvSpPr>
+        <p:spPr>
+          <a:xfrm>
+            <a:off x="6446520" y="3726688"/>
+            <a:ext cx="237744" cy="237744"/>
+          </a:xfrm>
+          <a:prstGeom prst="rect">
+            <a:avLst/>
+          </a:prstGeom>
+          <a:noFill/>
+          <a:ln/>
+        </p:spPr>
+        <p:txBody>
+          <a:bodyPr wrap="square" lIns="0" tIns="0" rIns="0" bIns="0" rtlCol="0" anchor="ctr"/>
+          <a:lstStyle/>
+          <a:p>
+            <a:pPr algn="ctr" indent="0" marL="0">
+              <a:buNone/>
+            </a:pPr>
+            <a:r>
+              <a:rPr lang="en-US" sz="1100" b="1" dirty="0">
+                <a:solidFill>
+                  <a:srgbClr val="FFFFFF"/>
+                </a:solidFill>
+                <a:latin typeface="Arial" pitchFamily="34" charset="0"/>
+                <a:ea typeface="Arial" pitchFamily="34" charset="-122"/>
+                <a:cs typeface="Arial" pitchFamily="34" charset="-120"/>
+              </a:rPr>
+              <a:t>8</a:t>
+            </a:r>
+            <a:endParaRPr lang="en-US" sz="1100" dirty="0"/>
+          </a:p>
+        </p:txBody>
+      </p:sp>
+      <p:sp>
+        <p:nvSpPr>
+          <p:cNvPr id="29" name="Text 26"/>
+          <p:cNvSpPr/>
+          <p:nvPr/>
+        </p:nvSpPr>
+        <p:spPr>
+          <a:xfrm>
+            <a:off x="6766560" y="3708400"/>
+            <a:ext cx="1920240" cy="340360"/>
+          </a:xfrm>
+          <a:prstGeom prst="rect">
+            <a:avLst/>
+          </a:prstGeom>
+          <a:noFill/>
+          <a:ln/>
+        </p:spPr>
+        <p:txBody>
+          <a:bodyPr wrap="square" lIns="0" tIns="0" rIns="0" bIns="0" rtlCol="0" anchor="ctr"/>
+          <a:lstStyle/>
+          <a:p>
+            <a:pPr indent="0" marL="0">
+              <a:buNone/>
+            </a:pPr>
+            <a:r>
+              <a:rPr lang="en-US" sz="1100" dirty="0">
+                <a:solidFill>
+                  <a:srgbClr val="4A5560"/>
+                </a:solidFill>
+                <a:latin typeface="Arial" pitchFamily="34" charset="0"/>
+                <a:ea typeface="Arial" pitchFamily="34" charset="-122"/>
+                <a:cs typeface="Arial" pitchFamily="34" charset="-120"/>
+              </a:rPr>
+              <a:t>파일마다 — 이름 · 종류 안내 · 후처리 · 시간 0</a:t>
+            </a:r>
+            <a:endParaRPr lang="en-US" sz="1100" dirty="0"/>
+          </a:p>
+        </p:txBody>
+      </p:sp>
+      <p:sp>
+        <p:nvSpPr>
+          <p:cNvPr id="30" name="Shape 27"/>
+          <p:cNvSpPr/>
+          <p:nvPr/>
+        </p:nvSpPr>
+        <p:spPr>
+          <a:xfrm>
+            <a:off x="6446520" y="4112768"/>
+            <a:ext cx="237744" cy="237744"/>
+          </a:xfrm>
+          <a:prstGeom prst="ellipse">
+            <a:avLst/>
+          </a:prstGeom>
+          <a:solidFill>
+            <a:srgbClr val="E76F51"/>
+          </a:solidFill>
+          <a:ln/>
+        </p:spPr>
+      </p:sp>
+      <p:sp>
+        <p:nvSpPr>
+          <p:cNvPr id="31" name="Text 28"/>
+          <p:cNvSpPr/>
+          <p:nvPr/>
+        </p:nvSpPr>
+        <p:spPr>
+          <a:xfrm>
+            <a:off x="6446520" y="4112768"/>
+            <a:ext cx="237744" cy="237744"/>
+          </a:xfrm>
+          <a:prstGeom prst="rect">
+            <a:avLst/>
+          </a:prstGeom>
+          <a:noFill/>
+          <a:ln/>
+        </p:spPr>
+        <p:txBody>
+          <a:bodyPr wrap="square" lIns="0" tIns="0" rIns="0" bIns="0" rtlCol="0" anchor="ctr"/>
+          <a:lstStyle/>
+          <a:p>
+            <a:pPr algn="ctr" indent="0" marL="0">
+              <a:buNone/>
+            </a:pPr>
+            <a:r>
+              <a:rPr lang="en-US" sz="1100" b="1" dirty="0">
+                <a:solidFill>
+                  <a:srgbClr val="FFFFFF"/>
+                </a:solidFill>
+                <a:latin typeface="Arial" pitchFamily="34" charset="0"/>
+                <a:ea typeface="Arial" pitchFamily="34" charset="-122"/>
+                <a:cs typeface="Arial" pitchFamily="34" charset="-120"/>
+              </a:rPr>
+              <a:t>9</a:t>
+            </a:r>
+            <a:endParaRPr lang="en-US" sz="1100" dirty="0"/>
+          </a:p>
+        </p:txBody>
+      </p:sp>
+      <p:sp>
+        <p:nvSpPr>
+          <p:cNvPr id="32" name="Text 29"/>
+          <p:cNvSpPr/>
+          <p:nvPr/>
+        </p:nvSpPr>
+        <p:spPr>
+          <a:xfrm>
+            <a:off x="6766560" y="4094480"/>
+            <a:ext cx="1920240" cy="340360"/>
+          </a:xfrm>
+          <a:prstGeom prst="rect">
+            <a:avLst/>
+          </a:prstGeom>
+          <a:noFill/>
+          <a:ln/>
+        </p:spPr>
+        <p:txBody>
+          <a:bodyPr wrap="square" lIns="0" tIns="0" rIns="0" bIns="0" rtlCol="0" anchor="ctr"/>
+          <a:lstStyle/>
+          <a:p>
+            <a:pPr indent="0" marL="0">
+              <a:buNone/>
+            </a:pPr>
+            <a:r>
+              <a:rPr lang="en-US" sz="1100" dirty="0">
+                <a:solidFill>
+                  <a:srgbClr val="4A5560"/>
+                </a:solidFill>
+                <a:latin typeface="Arial" pitchFamily="34" charset="0"/>
+                <a:ea typeface="Arial" pitchFamily="34" charset="-122"/>
+                <a:cs typeface="Arial" pitchFamily="34" charset="-120"/>
+              </a:rPr>
+              <a:t>[올리기]</a:t>
+            </a:r>
+            <a:endParaRPr lang="en-US" sz="1100" dirty="0"/>
+          </a:p>
+        </p:txBody>
+      </p:sp>
+      <p:sp>
+        <p:nvSpPr>
+          <p:cNvPr id="33" name="Shape 30"/>
+          <p:cNvSpPr/>
+          <p:nvPr/>
+        </p:nvSpPr>
+        <p:spPr>
+          <a:xfrm>
+            <a:off x="8503920" y="4663440"/>
+            <a:ext cx="365760" cy="365760"/>
+          </a:xfrm>
+          <a:prstGeom prst="ellipse">
+            <a:avLst/>
+          </a:prstGeom>
+          <a:solidFill>
+            <a:srgbClr val="E76F51"/>
+          </a:solidFill>
+          <a:ln/>
+        </p:spPr>
+      </p:sp>
+      <p:sp>
+        <p:nvSpPr>
+          <p:cNvPr id="34" name="Text 31"/>
           <p:cNvSpPr/>
           <p:nvPr/>
         </p:nvSpPr>
@@ -5134,7 +5508,7 @@
                 <a:ea typeface="Arial" pitchFamily="34" charset="-122"/>
                 <a:cs typeface="Arial" pitchFamily="34" charset="-120"/>
               </a:rPr>
-              <a:t>12. 프로파일 화면</a:t>
+              <a:t>11. 파일 종류 — 시간 자료</a:t>
             </a:r>
             <a:endParaRPr lang="en-US" sz="1800" dirty="0"/>
           </a:p>
@@ -5142,7 +5516,7 @@
       </p:sp>
       <p:pic>
         <p:nvPicPr>
-          <p:cNvPr id="3" name="Image 0" descr="/Users/geosoft/Documents/weld-dashboard/docs/2026-10-23/slides/imgs/08-pass-profile-n.png">    </p:cNvPr>
+          <p:cNvPr id="3" name="Image 0" descr="/Users/geosoft/Documents/weld-dashboard/docs/2026-10-23/slides/imgs/11-upload-video-n.png">    </p:cNvPr>
           <p:cNvPicPr>
             <a:picLocks noChangeAspect="1"/>
           </p:cNvPicPr>
@@ -5317,7 +5691,7 @@
                 <a:ea typeface="Arial" pitchFamily="34" charset="-122"/>
                 <a:cs typeface="Arial" pitchFamily="34" charset="-120"/>
               </a:rPr>
-              <a:t>작업 요약 카드 — 공사 · 품목 · 작업자 · 장비를 한눈에 봅니다</a:t>
+              <a:t>종류 안내 — 확장자로 짐작, 최종은 서버가 내용으로 정함</a:t>
             </a:r>
             <a:endParaRPr lang="en-US" sz="1100" dirty="0"/>
           </a:p>
@@ -5415,7 +5789,7 @@
                 <a:ea typeface="Arial" pitchFamily="34" charset="-122"/>
                 <a:cs typeface="Arial" pitchFamily="34" charset="-120"/>
               </a:rPr>
-              <a:t>패스 선택 — P1, P2…를 바꿔 패스별 파형을 봅니다</a:t>
+              <a:t>올린 뒤 처리 — 예: 파일 속성 → 길이 → 타임라인 배치</a:t>
             </a:r>
             <a:endParaRPr lang="en-US" sz="1100" dirty="0"/>
           </a:p>
@@ -5513,7 +5887,7 @@
                 <a:ea typeface="Arial" pitchFamily="34" charset="-122"/>
                 <a:cs typeface="Arial" pitchFamily="34" charset="-120"/>
               </a:rPr>
-              <a:t>파형 차트 — 전류 · 전압 · 속도 등을 시간 흐름으로 봅니다</a:t>
+              <a:t>이 파일의 시간 0 — 별표(*)가 있으면 필수, 없으면 선택</a:t>
             </a:r>
             <a:endParaRPr lang="en-US" sz="1100" dirty="0"/>
           </a:p>
@@ -5527,8 +5901,8 @@
         </p:nvSpPr>
         <p:spPr>
           <a:xfrm>
-            <a:off x="8503920" y="4663440"/>
-            <a:ext cx="365760" cy="365760"/>
+            <a:off x="6446520" y="2532888"/>
+            <a:ext cx="237744" cy="237744"/>
           </a:xfrm>
           <a:prstGeom prst="ellipse">
             <a:avLst/>
@@ -5542,6 +5916,202 @@
       <p:sp>
         <p:nvSpPr>
           <p:cNvPr id="16" name="Text 13"/>
+          <p:cNvSpPr/>
+          <p:nvPr/>
+        </p:nvSpPr>
+        <p:spPr>
+          <a:xfrm>
+            <a:off x="6446520" y="2532888"/>
+            <a:ext cx="237744" cy="237744"/>
+          </a:xfrm>
+          <a:prstGeom prst="rect">
+            <a:avLst/>
+          </a:prstGeom>
+          <a:noFill/>
+          <a:ln/>
+        </p:spPr>
+        <p:txBody>
+          <a:bodyPr wrap="square" lIns="0" tIns="0" rIns="0" bIns="0" rtlCol="0" anchor="ctr"/>
+          <a:lstStyle/>
+          <a:p>
+            <a:pPr algn="ctr" indent="0" marL="0">
+              <a:buNone/>
+            </a:pPr>
+            <a:r>
+              <a:rPr lang="en-US" sz="1100" b="1" dirty="0">
+                <a:solidFill>
+                  <a:srgbClr val="FFFFFF"/>
+                </a:solidFill>
+                <a:latin typeface="Arial" pitchFamily="34" charset="0"/>
+                <a:ea typeface="Arial" pitchFamily="34" charset="-122"/>
+                <a:cs typeface="Arial" pitchFamily="34" charset="-120"/>
+              </a:rPr>
+              <a:t>4</a:t>
+            </a:r>
+            <a:endParaRPr lang="en-US" sz="1100" dirty="0"/>
+          </a:p>
+        </p:txBody>
+      </p:sp>
+      <p:sp>
+        <p:nvSpPr>
+          <p:cNvPr id="17" name="Text 14"/>
+          <p:cNvSpPr/>
+          <p:nvPr/>
+        </p:nvSpPr>
+        <p:spPr>
+          <a:xfrm>
+            <a:off x="6766560" y="2514600"/>
+            <a:ext cx="1920240" cy="457200"/>
+          </a:xfrm>
+          <a:prstGeom prst="rect">
+            <a:avLst/>
+          </a:prstGeom>
+          <a:noFill/>
+          <a:ln/>
+        </p:spPr>
+        <p:txBody>
+          <a:bodyPr wrap="square" lIns="0" tIns="0" rIns="0" bIns="0" rtlCol="0" anchor="ctr"/>
+          <a:lstStyle/>
+          <a:p>
+            <a:pPr indent="0" marL="0">
+              <a:buNone/>
+            </a:pPr>
+            <a:r>
+              <a:rPr lang="en-US" sz="1100" dirty="0">
+                <a:solidFill>
+                  <a:srgbClr val="4A5560"/>
+                </a:solidFill>
+                <a:latin typeface="Arial" pitchFamily="34" charset="0"/>
+                <a:ea typeface="Arial" pitchFamily="34" charset="-122"/>
+                <a:cs typeface="Arial" pitchFamily="34" charset="-120"/>
+              </a:rPr>
+              <a:t>빠른 채우기 — 공통 시각 · 작업/패스 시작 · 현재 시각</a:t>
+            </a:r>
+            <a:endParaRPr lang="en-US" sz="1100" dirty="0"/>
+          </a:p>
+        </p:txBody>
+      </p:sp>
+      <p:sp>
+        <p:nvSpPr>
+          <p:cNvPr id="18" name="Shape 15"/>
+          <p:cNvSpPr/>
+          <p:nvPr/>
+        </p:nvSpPr>
+        <p:spPr>
+          <a:xfrm>
+            <a:off x="6446520" y="3035808"/>
+            <a:ext cx="237744" cy="237744"/>
+          </a:xfrm>
+          <a:prstGeom prst="ellipse">
+            <a:avLst/>
+          </a:prstGeom>
+          <a:solidFill>
+            <a:srgbClr val="E76F51"/>
+          </a:solidFill>
+          <a:ln/>
+        </p:spPr>
+      </p:sp>
+      <p:sp>
+        <p:nvSpPr>
+          <p:cNvPr id="19" name="Text 16"/>
+          <p:cNvSpPr/>
+          <p:nvPr/>
+        </p:nvSpPr>
+        <p:spPr>
+          <a:xfrm>
+            <a:off x="6446520" y="3035808"/>
+            <a:ext cx="237744" cy="237744"/>
+          </a:xfrm>
+          <a:prstGeom prst="rect">
+            <a:avLst/>
+          </a:prstGeom>
+          <a:noFill/>
+          <a:ln/>
+        </p:spPr>
+        <p:txBody>
+          <a:bodyPr wrap="square" lIns="0" tIns="0" rIns="0" bIns="0" rtlCol="0" anchor="ctr"/>
+          <a:lstStyle/>
+          <a:p>
+            <a:pPr algn="ctr" indent="0" marL="0">
+              <a:buNone/>
+            </a:pPr>
+            <a:r>
+              <a:rPr lang="en-US" sz="1100" b="1" dirty="0">
+                <a:solidFill>
+                  <a:srgbClr val="FFFFFF"/>
+                </a:solidFill>
+                <a:latin typeface="Arial" pitchFamily="34" charset="0"/>
+                <a:ea typeface="Arial" pitchFamily="34" charset="-122"/>
+                <a:cs typeface="Arial" pitchFamily="34" charset="-120"/>
+              </a:rPr>
+              <a:t>5</a:t>
+            </a:r>
+            <a:endParaRPr lang="en-US" sz="1100" dirty="0"/>
+          </a:p>
+        </p:txBody>
+      </p:sp>
+      <p:sp>
+        <p:nvSpPr>
+          <p:cNvPr id="20" name="Text 17"/>
+          <p:cNvSpPr/>
+          <p:nvPr/>
+        </p:nvSpPr>
+        <p:spPr>
+          <a:xfrm>
+            <a:off x="6766560" y="3017520"/>
+            <a:ext cx="1920240" cy="457200"/>
+          </a:xfrm>
+          <a:prstGeom prst="rect">
+            <a:avLst/>
+          </a:prstGeom>
+          <a:noFill/>
+          <a:ln/>
+        </p:spPr>
+        <p:txBody>
+          <a:bodyPr wrap="square" lIns="0" tIns="0" rIns="0" bIns="0" rtlCol="0" anchor="ctr"/>
+          <a:lstStyle/>
+          <a:p>
+            <a:pPr indent="0" marL="0">
+              <a:buNone/>
+            </a:pPr>
+            <a:r>
+              <a:rPr lang="en-US" sz="1100" dirty="0">
+                <a:solidFill>
+                  <a:srgbClr val="4A5560"/>
+                </a:solidFill>
+                <a:latin typeface="Arial" pitchFamily="34" charset="0"/>
+                <a:ea typeface="Arial" pitchFamily="34" charset="-122"/>
+                <a:cs typeface="Arial" pitchFamily="34" charset="-120"/>
+              </a:rPr>
+              <a:t>진행 상태 — 올리는 중 · 처리 중 · 완료. 노란 글씨는 주의 안내</a:t>
+            </a:r>
+            <a:endParaRPr lang="en-US" sz="1100" dirty="0"/>
+          </a:p>
+        </p:txBody>
+      </p:sp>
+      <p:sp>
+        <p:nvSpPr>
+          <p:cNvPr id="21" name="Shape 18"/>
+          <p:cNvSpPr/>
+          <p:nvPr/>
+        </p:nvSpPr>
+        <p:spPr>
+          <a:xfrm>
+            <a:off x="8503920" y="4663440"/>
+            <a:ext cx="365760" cy="365760"/>
+          </a:xfrm>
+          <a:prstGeom prst="ellipse">
+            <a:avLst/>
+          </a:prstGeom>
+          <a:solidFill>
+            <a:srgbClr val="E76F51"/>
+          </a:solidFill>
+          <a:ln/>
+        </p:spPr>
+      </p:sp>
+      <p:sp>
+        <p:nvSpPr>
+          <p:cNvPr id="22" name="Text 19"/>
           <p:cNvSpPr/>
           <p:nvPr/>
         </p:nvSpPr>
@@ -5643,7 +6213,7 @@
                 <a:ea typeface="Arial" pitchFamily="34" charset="-122"/>
                 <a:cs typeface="Arial" pitchFamily="34" charset="-120"/>
               </a:rPr>
-              <a:t>13. 품질 화면</a:t>
+              <a:t>12. 파일 종류 — 문서 · 이미지</a:t>
             </a:r>
             <a:endParaRPr lang="en-US" sz="1800" dirty="0"/>
           </a:p>
@@ -5651,7 +6221,7 @@
       </p:sp>
       <p:pic>
         <p:nvPicPr>
-          <p:cNvPr id="3" name="Image 0" descr="/Users/geosoft/Documents/weld-dashboard/docs/2026-10-23/slides/imgs/09-quality-issue-n.png">    </p:cNvPr>
+          <p:cNvPr id="3" name="Image 0" descr="/Users/geosoft/Documents/weld-dashboard/docs/2026-10-23/slides/imgs/11-upload-pdf-n.png">    </p:cNvPr>
           <p:cNvPicPr>
             <a:picLocks noChangeAspect="1"/>
           </p:cNvPicPr>
@@ -5826,7 +6396,7 @@
                 <a:ea typeface="Arial" pitchFamily="34" charset="-122"/>
                 <a:cs typeface="Arial" pitchFamily="34" charset="-120"/>
               </a:rPr>
-              <a:t>패스 선택 — P1, P2…를 바꿔 패스별 결과를 봅니다</a:t>
+              <a:t>종류 — pdf는 문서·성적서, jpg·png는 이미지로 안내</a:t>
             </a:r>
             <a:endParaRPr lang="en-US" sz="1100" dirty="0"/>
           </a:p>
@@ -5924,7 +6494,7 @@
                 <a:ea typeface="Arial" pitchFamily="34" charset="-122"/>
                 <a:cs typeface="Arial" pitchFamily="34" charset="-120"/>
               </a:rPr>
-              <a:t>성적서 · 문서 — PDF · 영상 등 품질 자료를 봅니다</a:t>
+              <a:t>올린 뒤 처리 — pdf는 글자 인식·성적서, 이미지는 속성만</a:t>
             </a:r>
             <a:endParaRPr lang="en-US" sz="1100" dirty="0"/>
           </a:p>
@@ -6022,7 +6592,7 @@
                 <a:ea typeface="Arial" pitchFamily="34" charset="-122"/>
                 <a:cs typeface="Arial" pitchFamily="34" charset="-120"/>
               </a:rPr>
-              <a:t>파형 — 같은 패스의 전류 · 전압 등을 봅니다</a:t>
+              <a:t>이 파일의 시간 0 — 선택, 비워도 됨</a:t>
             </a:r>
             <a:endParaRPr lang="en-US" sz="1100" dirty="0"/>
           </a:p>
@@ -6127,6 +6697,1024 @@
         </p:nvSpPr>
         <p:spPr>
           <a:xfrm>
+            <a:off x="320040" y="137160"/>
+            <a:ext cx="8229600" cy="320040"/>
+          </a:xfrm>
+          <a:prstGeom prst="rect">
+            <a:avLst/>
+          </a:prstGeom>
+          <a:noFill/>
+          <a:ln/>
+        </p:spPr>
+        <p:txBody>
+          <a:bodyPr wrap="square" lIns="0" tIns="0" rIns="0" bIns="0" rtlCol="0" anchor="ctr"/>
+          <a:lstStyle/>
+          <a:p>
+            <a:pPr indent="0" marL="0">
+              <a:buNone/>
+            </a:pPr>
+            <a:r>
+              <a:rPr lang="en-US" sz="1800" b="1" dirty="0">
+                <a:solidFill>
+                  <a:srgbClr val="264653"/>
+                </a:solidFill>
+                <a:latin typeface="Arial" pitchFamily="34" charset="0"/>
+                <a:ea typeface="Arial" pitchFamily="34" charset="-122"/>
+                <a:cs typeface="Arial" pitchFamily="34" charset="-120"/>
+              </a:rPr>
+              <a:t>13. 프로파일 화면</a:t>
+            </a:r>
+            <a:endParaRPr lang="en-US" sz="1800" dirty="0"/>
+          </a:p>
+        </p:txBody>
+      </p:sp>
+      <p:pic>
+        <p:nvPicPr>
+          <p:cNvPr id="3" name="Image 0" descr="/Users/geosoft/Documents/weld-dashboard/docs/2026-10-23/slides/imgs/08-pass-profile-n.png">    </p:cNvPr>
+          <p:cNvPicPr>
+            <a:picLocks noChangeAspect="1"/>
+          </p:cNvPicPr>
+          <p:nvPr/>
+        </p:nvPicPr>
+        <p:blipFill>
+          <a:blip r:embed="rId1"/>
+          <a:stretch>
+            <a:fillRect/>
+          </a:stretch>
+        </p:blipFill>
+        <p:spPr>
+          <a:xfrm>
+            <a:off x="274320" y="502920"/>
+            <a:ext cx="5852160" cy="4023360"/>
+          </a:xfrm>
+          <a:prstGeom prst="rect">
+            <a:avLst/>
+          </a:prstGeom>
+        </p:spPr>
+      </p:pic>
+      <p:sp>
+        <p:nvSpPr>
+          <p:cNvPr id="4" name="Shape 1"/>
+          <p:cNvSpPr/>
+          <p:nvPr/>
+        </p:nvSpPr>
+        <p:spPr>
+          <a:xfrm>
+            <a:off x="6309360" y="502920"/>
+            <a:ext cx="2514600" cy="4023360"/>
+          </a:xfrm>
+          <a:prstGeom prst="roundRect">
+            <a:avLst>
+              <a:gd name="adj" fmla="val 2909"/>
+            </a:avLst>
+          </a:prstGeom>
+          <a:solidFill>
+            <a:srgbClr val="FFFFFF"/>
+          </a:solidFill>
+          <a:ln/>
+        </p:spPr>
+      </p:sp>
+      <p:sp>
+        <p:nvSpPr>
+          <p:cNvPr id="5" name="Text 2"/>
+          <p:cNvSpPr/>
+          <p:nvPr/>
+        </p:nvSpPr>
+        <p:spPr>
+          <a:xfrm>
+            <a:off x="6446520" y="640080"/>
+            <a:ext cx="2240280" cy="256032"/>
+          </a:xfrm>
+          <a:prstGeom prst="rect">
+            <a:avLst/>
+          </a:prstGeom>
+          <a:noFill/>
+          <a:ln/>
+        </p:spPr>
+        <p:txBody>
+          <a:bodyPr wrap="square" lIns="0" tIns="0" rIns="0" bIns="0" rtlCol="0" anchor="ctr"/>
+          <a:lstStyle/>
+          <a:p>
+            <a:pPr indent="0" marL="0">
+              <a:buNone/>
+            </a:pPr>
+            <a:r>
+              <a:rPr lang="en-US" sz="1300" b="1" dirty="0">
+                <a:solidFill>
+                  <a:srgbClr val="E76F51"/>
+                </a:solidFill>
+                <a:latin typeface="Arial" pitchFamily="34" charset="0"/>
+                <a:ea typeface="Arial" pitchFamily="34" charset="-122"/>
+                <a:cs typeface="Arial" pitchFamily="34" charset="-120"/>
+              </a:rPr>
+              <a:t>번호 안내</a:t>
+            </a:r>
+            <a:endParaRPr lang="en-US" sz="1300" dirty="0"/>
+          </a:p>
+        </p:txBody>
+      </p:sp>
+      <p:sp>
+        <p:nvSpPr>
+          <p:cNvPr id="6" name="Shape 3"/>
+          <p:cNvSpPr/>
+          <p:nvPr/>
+        </p:nvSpPr>
+        <p:spPr>
+          <a:xfrm>
+            <a:off x="6446520" y="1024128"/>
+            <a:ext cx="237744" cy="237744"/>
+          </a:xfrm>
+          <a:prstGeom prst="ellipse">
+            <a:avLst/>
+          </a:prstGeom>
+          <a:solidFill>
+            <a:srgbClr val="E76F51"/>
+          </a:solidFill>
+          <a:ln/>
+        </p:spPr>
+      </p:sp>
+      <p:sp>
+        <p:nvSpPr>
+          <p:cNvPr id="7" name="Text 4"/>
+          <p:cNvSpPr/>
+          <p:nvPr/>
+        </p:nvSpPr>
+        <p:spPr>
+          <a:xfrm>
+            <a:off x="6446520" y="1024128"/>
+            <a:ext cx="237744" cy="237744"/>
+          </a:xfrm>
+          <a:prstGeom prst="rect">
+            <a:avLst/>
+          </a:prstGeom>
+          <a:noFill/>
+          <a:ln/>
+        </p:spPr>
+        <p:txBody>
+          <a:bodyPr wrap="square" lIns="0" tIns="0" rIns="0" bIns="0" rtlCol="0" anchor="ctr"/>
+          <a:lstStyle/>
+          <a:p>
+            <a:pPr algn="ctr" indent="0" marL="0">
+              <a:buNone/>
+            </a:pPr>
+            <a:r>
+              <a:rPr lang="en-US" sz="1100" b="1" dirty="0">
+                <a:solidFill>
+                  <a:srgbClr val="FFFFFF"/>
+                </a:solidFill>
+                <a:latin typeface="Arial" pitchFamily="34" charset="0"/>
+                <a:ea typeface="Arial" pitchFamily="34" charset="-122"/>
+                <a:cs typeface="Arial" pitchFamily="34" charset="-120"/>
+              </a:rPr>
+              <a:t>1</a:t>
+            </a:r>
+            <a:endParaRPr lang="en-US" sz="1100" dirty="0"/>
+          </a:p>
+        </p:txBody>
+      </p:sp>
+      <p:sp>
+        <p:nvSpPr>
+          <p:cNvPr id="8" name="Text 5"/>
+          <p:cNvSpPr/>
+          <p:nvPr/>
+        </p:nvSpPr>
+        <p:spPr>
+          <a:xfrm>
+            <a:off x="6766560" y="1005840"/>
+            <a:ext cx="1920240" cy="457200"/>
+          </a:xfrm>
+          <a:prstGeom prst="rect">
+            <a:avLst/>
+          </a:prstGeom>
+          <a:noFill/>
+          <a:ln/>
+        </p:spPr>
+        <p:txBody>
+          <a:bodyPr wrap="square" lIns="0" tIns="0" rIns="0" bIns="0" rtlCol="0" anchor="ctr"/>
+          <a:lstStyle/>
+          <a:p>
+            <a:pPr indent="0" marL="0">
+              <a:buNone/>
+            </a:pPr>
+            <a:r>
+              <a:rPr lang="en-US" sz="1100" dirty="0">
+                <a:solidFill>
+                  <a:srgbClr val="4A5560"/>
+                </a:solidFill>
+                <a:latin typeface="Arial" pitchFamily="34" charset="0"/>
+                <a:ea typeface="Arial" pitchFamily="34" charset="-122"/>
+                <a:cs typeface="Arial" pitchFamily="34" charset="-120"/>
+              </a:rPr>
+              <a:t>작업 요약 카드 — 공사 · 품목 · 작업자 · 장비를 한눈에 봅니다</a:t>
+            </a:r>
+            <a:endParaRPr lang="en-US" sz="1100" dirty="0"/>
+          </a:p>
+        </p:txBody>
+      </p:sp>
+      <p:sp>
+        <p:nvSpPr>
+          <p:cNvPr id="9" name="Shape 6"/>
+          <p:cNvSpPr/>
+          <p:nvPr/>
+        </p:nvSpPr>
+        <p:spPr>
+          <a:xfrm>
+            <a:off x="6446520" y="1527048"/>
+            <a:ext cx="237744" cy="237744"/>
+          </a:xfrm>
+          <a:prstGeom prst="ellipse">
+            <a:avLst/>
+          </a:prstGeom>
+          <a:solidFill>
+            <a:srgbClr val="E76F51"/>
+          </a:solidFill>
+          <a:ln/>
+        </p:spPr>
+      </p:sp>
+      <p:sp>
+        <p:nvSpPr>
+          <p:cNvPr id="10" name="Text 7"/>
+          <p:cNvSpPr/>
+          <p:nvPr/>
+        </p:nvSpPr>
+        <p:spPr>
+          <a:xfrm>
+            <a:off x="6446520" y="1527048"/>
+            <a:ext cx="237744" cy="237744"/>
+          </a:xfrm>
+          <a:prstGeom prst="rect">
+            <a:avLst/>
+          </a:prstGeom>
+          <a:noFill/>
+          <a:ln/>
+        </p:spPr>
+        <p:txBody>
+          <a:bodyPr wrap="square" lIns="0" tIns="0" rIns="0" bIns="0" rtlCol="0" anchor="ctr"/>
+          <a:lstStyle/>
+          <a:p>
+            <a:pPr algn="ctr" indent="0" marL="0">
+              <a:buNone/>
+            </a:pPr>
+            <a:r>
+              <a:rPr lang="en-US" sz="1100" b="1" dirty="0">
+                <a:solidFill>
+                  <a:srgbClr val="FFFFFF"/>
+                </a:solidFill>
+                <a:latin typeface="Arial" pitchFamily="34" charset="0"/>
+                <a:ea typeface="Arial" pitchFamily="34" charset="-122"/>
+                <a:cs typeface="Arial" pitchFamily="34" charset="-120"/>
+              </a:rPr>
+              <a:t>2</a:t>
+            </a:r>
+            <a:endParaRPr lang="en-US" sz="1100" dirty="0"/>
+          </a:p>
+        </p:txBody>
+      </p:sp>
+      <p:sp>
+        <p:nvSpPr>
+          <p:cNvPr id="11" name="Text 8"/>
+          <p:cNvSpPr/>
+          <p:nvPr/>
+        </p:nvSpPr>
+        <p:spPr>
+          <a:xfrm>
+            <a:off x="6766560" y="1508760"/>
+            <a:ext cx="1920240" cy="457200"/>
+          </a:xfrm>
+          <a:prstGeom prst="rect">
+            <a:avLst/>
+          </a:prstGeom>
+          <a:noFill/>
+          <a:ln/>
+        </p:spPr>
+        <p:txBody>
+          <a:bodyPr wrap="square" lIns="0" tIns="0" rIns="0" bIns="0" rtlCol="0" anchor="ctr"/>
+          <a:lstStyle/>
+          <a:p>
+            <a:pPr indent="0" marL="0">
+              <a:buNone/>
+            </a:pPr>
+            <a:r>
+              <a:rPr lang="en-US" sz="1100" dirty="0">
+                <a:solidFill>
+                  <a:srgbClr val="4A5560"/>
+                </a:solidFill>
+                <a:latin typeface="Arial" pitchFamily="34" charset="0"/>
+                <a:ea typeface="Arial" pitchFamily="34" charset="-122"/>
+                <a:cs typeface="Arial" pitchFamily="34" charset="-120"/>
+              </a:rPr>
+              <a:t>패스 선택 — P1, P2…를 바꿔 패스별 파형을 봅니다</a:t>
+            </a:r>
+            <a:endParaRPr lang="en-US" sz="1100" dirty="0"/>
+          </a:p>
+        </p:txBody>
+      </p:sp>
+      <p:sp>
+        <p:nvSpPr>
+          <p:cNvPr id="12" name="Shape 9"/>
+          <p:cNvSpPr/>
+          <p:nvPr/>
+        </p:nvSpPr>
+        <p:spPr>
+          <a:xfrm>
+            <a:off x="6446520" y="2029968"/>
+            <a:ext cx="237744" cy="237744"/>
+          </a:xfrm>
+          <a:prstGeom prst="ellipse">
+            <a:avLst/>
+          </a:prstGeom>
+          <a:solidFill>
+            <a:srgbClr val="E76F51"/>
+          </a:solidFill>
+          <a:ln/>
+        </p:spPr>
+      </p:sp>
+      <p:sp>
+        <p:nvSpPr>
+          <p:cNvPr id="13" name="Text 10"/>
+          <p:cNvSpPr/>
+          <p:nvPr/>
+        </p:nvSpPr>
+        <p:spPr>
+          <a:xfrm>
+            <a:off x="6446520" y="2029968"/>
+            <a:ext cx="237744" cy="237744"/>
+          </a:xfrm>
+          <a:prstGeom prst="rect">
+            <a:avLst/>
+          </a:prstGeom>
+          <a:noFill/>
+          <a:ln/>
+        </p:spPr>
+        <p:txBody>
+          <a:bodyPr wrap="square" lIns="0" tIns="0" rIns="0" bIns="0" rtlCol="0" anchor="ctr"/>
+          <a:lstStyle/>
+          <a:p>
+            <a:pPr algn="ctr" indent="0" marL="0">
+              <a:buNone/>
+            </a:pPr>
+            <a:r>
+              <a:rPr lang="en-US" sz="1100" b="1" dirty="0">
+                <a:solidFill>
+                  <a:srgbClr val="FFFFFF"/>
+                </a:solidFill>
+                <a:latin typeface="Arial" pitchFamily="34" charset="0"/>
+                <a:ea typeface="Arial" pitchFamily="34" charset="-122"/>
+                <a:cs typeface="Arial" pitchFamily="34" charset="-120"/>
+              </a:rPr>
+              <a:t>3</a:t>
+            </a:r>
+            <a:endParaRPr lang="en-US" sz="1100" dirty="0"/>
+          </a:p>
+        </p:txBody>
+      </p:sp>
+      <p:sp>
+        <p:nvSpPr>
+          <p:cNvPr id="14" name="Text 11"/>
+          <p:cNvSpPr/>
+          <p:nvPr/>
+        </p:nvSpPr>
+        <p:spPr>
+          <a:xfrm>
+            <a:off x="6766560" y="2011680"/>
+            <a:ext cx="1920240" cy="457200"/>
+          </a:xfrm>
+          <a:prstGeom prst="rect">
+            <a:avLst/>
+          </a:prstGeom>
+          <a:noFill/>
+          <a:ln/>
+        </p:spPr>
+        <p:txBody>
+          <a:bodyPr wrap="square" lIns="0" tIns="0" rIns="0" bIns="0" rtlCol="0" anchor="ctr"/>
+          <a:lstStyle/>
+          <a:p>
+            <a:pPr indent="0" marL="0">
+              <a:buNone/>
+            </a:pPr>
+            <a:r>
+              <a:rPr lang="en-US" sz="1100" dirty="0">
+                <a:solidFill>
+                  <a:srgbClr val="4A5560"/>
+                </a:solidFill>
+                <a:latin typeface="Arial" pitchFamily="34" charset="0"/>
+                <a:ea typeface="Arial" pitchFamily="34" charset="-122"/>
+                <a:cs typeface="Arial" pitchFamily="34" charset="-120"/>
+              </a:rPr>
+              <a:t>파형 차트 — 전류 · 전압 · 속도 등을 시간 흐름으로 봅니다</a:t>
+            </a:r>
+            <a:endParaRPr lang="en-US" sz="1100" dirty="0"/>
+          </a:p>
+        </p:txBody>
+      </p:sp>
+      <p:sp>
+        <p:nvSpPr>
+          <p:cNvPr id="15" name="Shape 12"/>
+          <p:cNvSpPr/>
+          <p:nvPr/>
+        </p:nvSpPr>
+        <p:spPr>
+          <a:xfrm>
+            <a:off x="8503920" y="4663440"/>
+            <a:ext cx="365760" cy="365760"/>
+          </a:xfrm>
+          <a:prstGeom prst="ellipse">
+            <a:avLst/>
+          </a:prstGeom>
+          <a:solidFill>
+            <a:srgbClr val="E76F51"/>
+          </a:solidFill>
+          <a:ln/>
+        </p:spPr>
+      </p:sp>
+      <p:sp>
+        <p:nvSpPr>
+          <p:cNvPr id="16" name="Text 13"/>
+          <p:cNvSpPr/>
+          <p:nvPr/>
+        </p:nvSpPr>
+        <p:spPr>
+          <a:xfrm>
+            <a:off x="8503920" y="4663440"/>
+            <a:ext cx="365760" cy="365760"/>
+          </a:xfrm>
+          <a:prstGeom prst="rect">
+            <a:avLst/>
+          </a:prstGeom>
+          <a:noFill/>
+          <a:ln/>
+        </p:spPr>
+        <p:txBody>
+          <a:bodyPr wrap="square" lIns="0" tIns="0" rIns="0" bIns="0" rtlCol="0" anchor="ctr"/>
+          <a:lstStyle/>
+          <a:p>
+            <a:pPr algn="ctr" indent="0" marL="0">
+              <a:buNone/>
+            </a:pPr>
+            <a:r>
+              <a:rPr lang="en-US" sz="1200" b="1" dirty="0">
+                <a:solidFill>
+                  <a:srgbClr val="FFFFFF"/>
+                </a:solidFill>
+                <a:latin typeface="Arial" pitchFamily="34" charset="0"/>
+                <a:ea typeface="Arial" pitchFamily="34" charset="-122"/>
+                <a:cs typeface="Arial" pitchFamily="34" charset="-120"/>
+              </a:rPr>
+              <a:t>16</a:t>
+            </a:r>
+            <a:endParaRPr lang="en-US" sz="1200" dirty="0"/>
+          </a:p>
+        </p:txBody>
+      </p:sp>
+    </p:spTree>
+  </p:cSld>
+  <p:clrMapOvr>
+    <a:masterClrMapping/>
+  </p:clrMapOvr>
+</p:sld>
+</file>
+
+<file path=ppt/slides/slide17.xml><?xml version="1.0" encoding="utf-8"?>
+<p:sld xmlns:a="http://schemas.openxmlformats.org/drawingml/2006/main" xmlns:r="http://schemas.openxmlformats.org/officeDocument/2006/relationships" xmlns:p="http://schemas.openxmlformats.org/presentationml/2006/main">
+  <p:cSld name="Slide 17">
+    <p:bg>
+      <p:bgPr>
+        <a:solidFill>
+          <a:srgbClr val="F7F5F0"/>
+        </a:solidFill>
+      </p:bgPr>
+    </p:bg>
+    <p:spTree>
+      <p:nvGrpSpPr>
+        <p:cNvPr id="1" name=""/>
+        <p:cNvGrpSpPr/>
+        <p:nvPr/>
+      </p:nvGrpSpPr>
+      <p:grpSpPr>
+        <a:xfrm>
+          <a:off x="0" y="0"/>
+          <a:ext cx="0" cy="0"/>
+          <a:chOff x="0" y="0"/>
+          <a:chExt cx="0" cy="0"/>
+        </a:xfrm>
+      </p:grpSpPr>
+      <p:sp>
+        <p:nvSpPr>
+          <p:cNvPr id="2" name="Text 0"/>
+          <p:cNvSpPr/>
+          <p:nvPr/>
+        </p:nvSpPr>
+        <p:spPr>
+          <a:xfrm>
+            <a:off x="320040" y="137160"/>
+            <a:ext cx="8229600" cy="320040"/>
+          </a:xfrm>
+          <a:prstGeom prst="rect">
+            <a:avLst/>
+          </a:prstGeom>
+          <a:noFill/>
+          <a:ln/>
+        </p:spPr>
+        <p:txBody>
+          <a:bodyPr wrap="square" lIns="0" tIns="0" rIns="0" bIns="0" rtlCol="0" anchor="ctr"/>
+          <a:lstStyle/>
+          <a:p>
+            <a:pPr indent="0" marL="0">
+              <a:buNone/>
+            </a:pPr>
+            <a:r>
+              <a:rPr lang="en-US" sz="1800" b="1" dirty="0">
+                <a:solidFill>
+                  <a:srgbClr val="264653"/>
+                </a:solidFill>
+                <a:latin typeface="Arial" pitchFamily="34" charset="0"/>
+                <a:ea typeface="Arial" pitchFamily="34" charset="-122"/>
+                <a:cs typeface="Arial" pitchFamily="34" charset="-120"/>
+              </a:rPr>
+              <a:t>14. 품질 화면</a:t>
+            </a:r>
+            <a:endParaRPr lang="en-US" sz="1800" dirty="0"/>
+          </a:p>
+        </p:txBody>
+      </p:sp>
+      <p:pic>
+        <p:nvPicPr>
+          <p:cNvPr id="3" name="Image 0" descr="/Users/geosoft/Documents/weld-dashboard/docs/2026-10-23/slides/imgs/09-quality-issue-n.png">    </p:cNvPr>
+          <p:cNvPicPr>
+            <a:picLocks noChangeAspect="1"/>
+          </p:cNvPicPr>
+          <p:nvPr/>
+        </p:nvPicPr>
+        <p:blipFill>
+          <a:blip r:embed="rId1"/>
+          <a:stretch>
+            <a:fillRect/>
+          </a:stretch>
+        </p:blipFill>
+        <p:spPr>
+          <a:xfrm>
+            <a:off x="274320" y="502920"/>
+            <a:ext cx="5852160" cy="4023360"/>
+          </a:xfrm>
+          <a:prstGeom prst="rect">
+            <a:avLst/>
+          </a:prstGeom>
+        </p:spPr>
+      </p:pic>
+      <p:sp>
+        <p:nvSpPr>
+          <p:cNvPr id="4" name="Shape 1"/>
+          <p:cNvSpPr/>
+          <p:nvPr/>
+        </p:nvSpPr>
+        <p:spPr>
+          <a:xfrm>
+            <a:off x="6309360" y="502920"/>
+            <a:ext cx="2514600" cy="4023360"/>
+          </a:xfrm>
+          <a:prstGeom prst="roundRect">
+            <a:avLst>
+              <a:gd name="adj" fmla="val 2909"/>
+            </a:avLst>
+          </a:prstGeom>
+          <a:solidFill>
+            <a:srgbClr val="FFFFFF"/>
+          </a:solidFill>
+          <a:ln/>
+        </p:spPr>
+      </p:sp>
+      <p:sp>
+        <p:nvSpPr>
+          <p:cNvPr id="5" name="Text 2"/>
+          <p:cNvSpPr/>
+          <p:nvPr/>
+        </p:nvSpPr>
+        <p:spPr>
+          <a:xfrm>
+            <a:off x="6446520" y="640080"/>
+            <a:ext cx="2240280" cy="256032"/>
+          </a:xfrm>
+          <a:prstGeom prst="rect">
+            <a:avLst/>
+          </a:prstGeom>
+          <a:noFill/>
+          <a:ln/>
+        </p:spPr>
+        <p:txBody>
+          <a:bodyPr wrap="square" lIns="0" tIns="0" rIns="0" bIns="0" rtlCol="0" anchor="ctr"/>
+          <a:lstStyle/>
+          <a:p>
+            <a:pPr indent="0" marL="0">
+              <a:buNone/>
+            </a:pPr>
+            <a:r>
+              <a:rPr lang="en-US" sz="1300" b="1" dirty="0">
+                <a:solidFill>
+                  <a:srgbClr val="E76F51"/>
+                </a:solidFill>
+                <a:latin typeface="Arial" pitchFamily="34" charset="0"/>
+                <a:ea typeface="Arial" pitchFamily="34" charset="-122"/>
+                <a:cs typeface="Arial" pitchFamily="34" charset="-120"/>
+              </a:rPr>
+              <a:t>번호 안내</a:t>
+            </a:r>
+            <a:endParaRPr lang="en-US" sz="1300" dirty="0"/>
+          </a:p>
+        </p:txBody>
+      </p:sp>
+      <p:sp>
+        <p:nvSpPr>
+          <p:cNvPr id="6" name="Shape 3"/>
+          <p:cNvSpPr/>
+          <p:nvPr/>
+        </p:nvSpPr>
+        <p:spPr>
+          <a:xfrm>
+            <a:off x="6446520" y="1024128"/>
+            <a:ext cx="237744" cy="237744"/>
+          </a:xfrm>
+          <a:prstGeom prst="ellipse">
+            <a:avLst/>
+          </a:prstGeom>
+          <a:solidFill>
+            <a:srgbClr val="E76F51"/>
+          </a:solidFill>
+          <a:ln/>
+        </p:spPr>
+      </p:sp>
+      <p:sp>
+        <p:nvSpPr>
+          <p:cNvPr id="7" name="Text 4"/>
+          <p:cNvSpPr/>
+          <p:nvPr/>
+        </p:nvSpPr>
+        <p:spPr>
+          <a:xfrm>
+            <a:off x="6446520" y="1024128"/>
+            <a:ext cx="237744" cy="237744"/>
+          </a:xfrm>
+          <a:prstGeom prst="rect">
+            <a:avLst/>
+          </a:prstGeom>
+          <a:noFill/>
+          <a:ln/>
+        </p:spPr>
+        <p:txBody>
+          <a:bodyPr wrap="square" lIns="0" tIns="0" rIns="0" bIns="0" rtlCol="0" anchor="ctr"/>
+          <a:lstStyle/>
+          <a:p>
+            <a:pPr algn="ctr" indent="0" marL="0">
+              <a:buNone/>
+            </a:pPr>
+            <a:r>
+              <a:rPr lang="en-US" sz="1100" b="1" dirty="0">
+                <a:solidFill>
+                  <a:srgbClr val="FFFFFF"/>
+                </a:solidFill>
+                <a:latin typeface="Arial" pitchFamily="34" charset="0"/>
+                <a:ea typeface="Arial" pitchFamily="34" charset="-122"/>
+                <a:cs typeface="Arial" pitchFamily="34" charset="-120"/>
+              </a:rPr>
+              <a:t>1</a:t>
+            </a:r>
+            <a:endParaRPr lang="en-US" sz="1100" dirty="0"/>
+          </a:p>
+        </p:txBody>
+      </p:sp>
+      <p:sp>
+        <p:nvSpPr>
+          <p:cNvPr id="8" name="Text 5"/>
+          <p:cNvSpPr/>
+          <p:nvPr/>
+        </p:nvSpPr>
+        <p:spPr>
+          <a:xfrm>
+            <a:off x="6766560" y="1005840"/>
+            <a:ext cx="1920240" cy="457200"/>
+          </a:xfrm>
+          <a:prstGeom prst="rect">
+            <a:avLst/>
+          </a:prstGeom>
+          <a:noFill/>
+          <a:ln/>
+        </p:spPr>
+        <p:txBody>
+          <a:bodyPr wrap="square" lIns="0" tIns="0" rIns="0" bIns="0" rtlCol="0" anchor="ctr"/>
+          <a:lstStyle/>
+          <a:p>
+            <a:pPr indent="0" marL="0">
+              <a:buNone/>
+            </a:pPr>
+            <a:r>
+              <a:rPr lang="en-US" sz="1100" dirty="0">
+                <a:solidFill>
+                  <a:srgbClr val="4A5560"/>
+                </a:solidFill>
+                <a:latin typeface="Arial" pitchFamily="34" charset="0"/>
+                <a:ea typeface="Arial" pitchFamily="34" charset="-122"/>
+                <a:cs typeface="Arial" pitchFamily="34" charset="-120"/>
+              </a:rPr>
+              <a:t>패스 선택 — P1, P2…를 바꿔 패스별 결과를 봅니다</a:t>
+            </a:r>
+            <a:endParaRPr lang="en-US" sz="1100" dirty="0"/>
+          </a:p>
+        </p:txBody>
+      </p:sp>
+      <p:sp>
+        <p:nvSpPr>
+          <p:cNvPr id="9" name="Shape 6"/>
+          <p:cNvSpPr/>
+          <p:nvPr/>
+        </p:nvSpPr>
+        <p:spPr>
+          <a:xfrm>
+            <a:off x="6446520" y="1527048"/>
+            <a:ext cx="237744" cy="237744"/>
+          </a:xfrm>
+          <a:prstGeom prst="ellipse">
+            <a:avLst/>
+          </a:prstGeom>
+          <a:solidFill>
+            <a:srgbClr val="E76F51"/>
+          </a:solidFill>
+          <a:ln/>
+        </p:spPr>
+      </p:sp>
+      <p:sp>
+        <p:nvSpPr>
+          <p:cNvPr id="10" name="Text 7"/>
+          <p:cNvSpPr/>
+          <p:nvPr/>
+        </p:nvSpPr>
+        <p:spPr>
+          <a:xfrm>
+            <a:off x="6446520" y="1527048"/>
+            <a:ext cx="237744" cy="237744"/>
+          </a:xfrm>
+          <a:prstGeom prst="rect">
+            <a:avLst/>
+          </a:prstGeom>
+          <a:noFill/>
+          <a:ln/>
+        </p:spPr>
+        <p:txBody>
+          <a:bodyPr wrap="square" lIns="0" tIns="0" rIns="0" bIns="0" rtlCol="0" anchor="ctr"/>
+          <a:lstStyle/>
+          <a:p>
+            <a:pPr algn="ctr" indent="0" marL="0">
+              <a:buNone/>
+            </a:pPr>
+            <a:r>
+              <a:rPr lang="en-US" sz="1100" b="1" dirty="0">
+                <a:solidFill>
+                  <a:srgbClr val="FFFFFF"/>
+                </a:solidFill>
+                <a:latin typeface="Arial" pitchFamily="34" charset="0"/>
+                <a:ea typeface="Arial" pitchFamily="34" charset="-122"/>
+                <a:cs typeface="Arial" pitchFamily="34" charset="-120"/>
+              </a:rPr>
+              <a:t>2</a:t>
+            </a:r>
+            <a:endParaRPr lang="en-US" sz="1100" dirty="0"/>
+          </a:p>
+        </p:txBody>
+      </p:sp>
+      <p:sp>
+        <p:nvSpPr>
+          <p:cNvPr id="11" name="Text 8"/>
+          <p:cNvSpPr/>
+          <p:nvPr/>
+        </p:nvSpPr>
+        <p:spPr>
+          <a:xfrm>
+            <a:off x="6766560" y="1508760"/>
+            <a:ext cx="1920240" cy="457200"/>
+          </a:xfrm>
+          <a:prstGeom prst="rect">
+            <a:avLst/>
+          </a:prstGeom>
+          <a:noFill/>
+          <a:ln/>
+        </p:spPr>
+        <p:txBody>
+          <a:bodyPr wrap="square" lIns="0" tIns="0" rIns="0" bIns="0" rtlCol="0" anchor="ctr"/>
+          <a:lstStyle/>
+          <a:p>
+            <a:pPr indent="0" marL="0">
+              <a:buNone/>
+            </a:pPr>
+            <a:r>
+              <a:rPr lang="en-US" sz="1100" dirty="0">
+                <a:solidFill>
+                  <a:srgbClr val="4A5560"/>
+                </a:solidFill>
+                <a:latin typeface="Arial" pitchFamily="34" charset="0"/>
+                <a:ea typeface="Arial" pitchFamily="34" charset="-122"/>
+                <a:cs typeface="Arial" pitchFamily="34" charset="-120"/>
+              </a:rPr>
+              <a:t>성적서 · 문서 — PDF · 영상 등 품질 자료를 봅니다</a:t>
+            </a:r>
+            <a:endParaRPr lang="en-US" sz="1100" dirty="0"/>
+          </a:p>
+        </p:txBody>
+      </p:sp>
+      <p:sp>
+        <p:nvSpPr>
+          <p:cNvPr id="12" name="Shape 9"/>
+          <p:cNvSpPr/>
+          <p:nvPr/>
+        </p:nvSpPr>
+        <p:spPr>
+          <a:xfrm>
+            <a:off x="6446520" y="2029968"/>
+            <a:ext cx="237744" cy="237744"/>
+          </a:xfrm>
+          <a:prstGeom prst="ellipse">
+            <a:avLst/>
+          </a:prstGeom>
+          <a:solidFill>
+            <a:srgbClr val="E76F51"/>
+          </a:solidFill>
+          <a:ln/>
+        </p:spPr>
+      </p:sp>
+      <p:sp>
+        <p:nvSpPr>
+          <p:cNvPr id="13" name="Text 10"/>
+          <p:cNvSpPr/>
+          <p:nvPr/>
+        </p:nvSpPr>
+        <p:spPr>
+          <a:xfrm>
+            <a:off x="6446520" y="2029968"/>
+            <a:ext cx="237744" cy="237744"/>
+          </a:xfrm>
+          <a:prstGeom prst="rect">
+            <a:avLst/>
+          </a:prstGeom>
+          <a:noFill/>
+          <a:ln/>
+        </p:spPr>
+        <p:txBody>
+          <a:bodyPr wrap="square" lIns="0" tIns="0" rIns="0" bIns="0" rtlCol="0" anchor="ctr"/>
+          <a:lstStyle/>
+          <a:p>
+            <a:pPr algn="ctr" indent="0" marL="0">
+              <a:buNone/>
+            </a:pPr>
+            <a:r>
+              <a:rPr lang="en-US" sz="1100" b="1" dirty="0">
+                <a:solidFill>
+                  <a:srgbClr val="FFFFFF"/>
+                </a:solidFill>
+                <a:latin typeface="Arial" pitchFamily="34" charset="0"/>
+                <a:ea typeface="Arial" pitchFamily="34" charset="-122"/>
+                <a:cs typeface="Arial" pitchFamily="34" charset="-120"/>
+              </a:rPr>
+              <a:t>3</a:t>
+            </a:r>
+            <a:endParaRPr lang="en-US" sz="1100" dirty="0"/>
+          </a:p>
+        </p:txBody>
+      </p:sp>
+      <p:sp>
+        <p:nvSpPr>
+          <p:cNvPr id="14" name="Text 11"/>
+          <p:cNvSpPr/>
+          <p:nvPr/>
+        </p:nvSpPr>
+        <p:spPr>
+          <a:xfrm>
+            <a:off x="6766560" y="2011680"/>
+            <a:ext cx="1920240" cy="457200"/>
+          </a:xfrm>
+          <a:prstGeom prst="rect">
+            <a:avLst/>
+          </a:prstGeom>
+          <a:noFill/>
+          <a:ln/>
+        </p:spPr>
+        <p:txBody>
+          <a:bodyPr wrap="square" lIns="0" tIns="0" rIns="0" bIns="0" rtlCol="0" anchor="ctr"/>
+          <a:lstStyle/>
+          <a:p>
+            <a:pPr indent="0" marL="0">
+              <a:buNone/>
+            </a:pPr>
+            <a:r>
+              <a:rPr lang="en-US" sz="1100" dirty="0">
+                <a:solidFill>
+                  <a:srgbClr val="4A5560"/>
+                </a:solidFill>
+                <a:latin typeface="Arial" pitchFamily="34" charset="0"/>
+                <a:ea typeface="Arial" pitchFamily="34" charset="-122"/>
+                <a:cs typeface="Arial" pitchFamily="34" charset="-120"/>
+              </a:rPr>
+              <a:t>파형 — 같은 패스의 전류 · 전압 등을 봅니다</a:t>
+            </a:r>
+            <a:endParaRPr lang="en-US" sz="1100" dirty="0"/>
+          </a:p>
+        </p:txBody>
+      </p:sp>
+      <p:sp>
+        <p:nvSpPr>
+          <p:cNvPr id="15" name="Shape 12"/>
+          <p:cNvSpPr/>
+          <p:nvPr/>
+        </p:nvSpPr>
+        <p:spPr>
+          <a:xfrm>
+            <a:off x="8503920" y="4663440"/>
+            <a:ext cx="365760" cy="365760"/>
+          </a:xfrm>
+          <a:prstGeom prst="ellipse">
+            <a:avLst/>
+          </a:prstGeom>
+          <a:solidFill>
+            <a:srgbClr val="E76F51"/>
+          </a:solidFill>
+          <a:ln/>
+        </p:spPr>
+      </p:sp>
+      <p:sp>
+        <p:nvSpPr>
+          <p:cNvPr id="16" name="Text 13"/>
+          <p:cNvSpPr/>
+          <p:nvPr/>
+        </p:nvSpPr>
+        <p:spPr>
+          <a:xfrm>
+            <a:off x="8503920" y="4663440"/>
+            <a:ext cx="365760" cy="365760"/>
+          </a:xfrm>
+          <a:prstGeom prst="rect">
+            <a:avLst/>
+          </a:prstGeom>
+          <a:noFill/>
+          <a:ln/>
+        </p:spPr>
+        <p:txBody>
+          <a:bodyPr wrap="square" lIns="0" tIns="0" rIns="0" bIns="0" rtlCol="0" anchor="ctr"/>
+          <a:lstStyle/>
+          <a:p>
+            <a:pPr algn="ctr" indent="0" marL="0">
+              <a:buNone/>
+            </a:pPr>
+            <a:r>
+              <a:rPr lang="en-US" sz="1200" b="1" dirty="0">
+                <a:solidFill>
+                  <a:srgbClr val="FFFFFF"/>
+                </a:solidFill>
+                <a:latin typeface="Arial" pitchFamily="34" charset="0"/>
+                <a:ea typeface="Arial" pitchFamily="34" charset="-122"/>
+                <a:cs typeface="Arial" pitchFamily="34" charset="-120"/>
+              </a:rPr>
+              <a:t>17</a:t>
+            </a:r>
+            <a:endParaRPr lang="en-US" sz="1200" dirty="0"/>
+          </a:p>
+        </p:txBody>
+      </p:sp>
+    </p:spTree>
+  </p:cSld>
+  <p:clrMapOvr>
+    <a:masterClrMapping/>
+  </p:clrMapOvr>
+</p:sld>
+</file>
+
+<file path=ppt/slides/slide18.xml><?xml version="1.0" encoding="utf-8"?>
+<p:sld xmlns:a="http://schemas.openxmlformats.org/drawingml/2006/main" xmlns:r="http://schemas.openxmlformats.org/officeDocument/2006/relationships" xmlns:p="http://schemas.openxmlformats.org/presentationml/2006/main">
+  <p:cSld name="Slide 18">
+    <p:bg>
+      <p:bgPr>
+        <a:solidFill>
+          <a:srgbClr val="F7F5F0"/>
+        </a:solidFill>
+      </p:bgPr>
+    </p:bg>
+    <p:spTree>
+      <p:nvGrpSpPr>
+        <p:cNvPr id="1" name=""/>
+        <p:cNvGrpSpPr/>
+        <p:nvPr/>
+      </p:nvGrpSpPr>
+      <p:grpSpPr>
+        <a:xfrm>
+          <a:off x="0" y="0"/>
+          <a:ext cx="0" cy="0"/>
+          <a:chOff x="0" y="0"/>
+          <a:chExt cx="0" cy="0"/>
+        </a:xfrm>
+      </p:grpSpPr>
+      <p:sp>
+        <p:nvSpPr>
+          <p:cNvPr id="2" name="Text 0"/>
+          <p:cNvSpPr/>
+          <p:nvPr/>
+        </p:nvSpPr>
+        <p:spPr>
+          <a:xfrm>
             <a:off x="365760" y="201168"/>
             <a:ext cx="8229600" cy="365760"/>
           </a:xfrm>
@@ -6333,7 +7921,7 @@
                 <a:ea typeface="Arial" pitchFamily="34" charset="-122"/>
                 <a:cs typeface="Arial" pitchFamily="34" charset="-120"/>
               </a:rPr>
-              <a:t>1.  작업 관리에서 작업과 패스를 만들었는가</a:t>
+              <a:t>1.  로그인 후 수집 모니터링에서 조회·타임라인을 확인했는가</a:t>
             </a:r>
             <a:endParaRPr lang="en-US" sz="1400" dirty="0"/>
           </a:p>
@@ -6455,7 +8043,7 @@
                 <a:ea typeface="Arial" pitchFamily="34" charset="-122"/>
                 <a:cs typeface="Arial" pitchFamily="34" charset="-120"/>
               </a:rPr>
-              <a:t>2.  상세에서 기본 정보가 맞는가</a:t>
+              <a:t>2.  작업 관리에서 작업과 패스를 만들었는가</a:t>
             </a:r>
             <a:endParaRPr lang="en-US" sz="1400" dirty="0"/>
           </a:p>
@@ -6577,7 +8165,7 @@
                 <a:ea typeface="Arial" pitchFamily="34" charset="-122"/>
                 <a:cs typeface="Arial" pitchFamily="34" charset="-120"/>
               </a:rPr>
-              <a:t>3.  패스 구간 · 종류가 조회에 쓸 수 있는가</a:t>
+              <a:t>3.  상세에서 기본 정보가 맞는가</a:t>
             </a:r>
             <a:endParaRPr lang="en-US" sz="1400" dirty="0"/>
           </a:p>
@@ -6699,7 +8287,7 @@
                 <a:ea typeface="Arial" pitchFamily="34" charset="-122"/>
                 <a:cs typeface="Arial" pitchFamily="34" charset="-120"/>
               </a:rPr>
-              <a:t>4.  첨부에서 자료 올리기 · 붙이기 · 패스 지정이 끝났는가</a:t>
+              <a:t>4.  패스 구간 · 종류가 조회에 쓸 수 있는가</a:t>
             </a:r>
             <a:endParaRPr lang="en-US" sz="1400" dirty="0"/>
           </a:p>
@@ -6821,7 +8409,7 @@
                 <a:ea typeface="Arial" pitchFamily="34" charset="-122"/>
                 <a:cs typeface="Arial" pitchFamily="34" charset="-120"/>
               </a:rPr>
-              <a:t>5.  프로파일 · 품질에서 같은 작업을 열 수 있는가</a:t>
+              <a:t>5.  첨부에서 자료 올리기(다건·상태·경고 확인) · 붙이기 · 패스 지정이 끝났는가</a:t>
             </a:r>
             <a:endParaRPr lang="en-US" sz="1400" dirty="0"/>
           </a:p>
@@ -6829,7 +8417,129 @@
       </p:sp>
       <p:sp>
         <p:nvSpPr>
-          <p:cNvPr id="25" name="Text 23"/>
+          <p:cNvPr id="25" name="Shape 23"/>
+          <p:cNvSpPr/>
+          <p:nvPr/>
+        </p:nvSpPr>
+        <p:spPr>
+          <a:xfrm>
+            <a:off x="365760" y="3520440"/>
+            <a:ext cx="8412480" cy="402336"/>
+          </a:xfrm>
+          <a:prstGeom prst="roundRect">
+            <a:avLst>
+              <a:gd name="adj" fmla="val 13636"/>
+            </a:avLst>
+          </a:prstGeom>
+          <a:solidFill>
+            <a:srgbClr val="EEF6F4"/>
+          </a:solidFill>
+          <a:ln/>
+        </p:spPr>
+      </p:sp>
+      <p:sp>
+        <p:nvSpPr>
+          <p:cNvPr id="26" name="Shape 24"/>
+          <p:cNvSpPr/>
+          <p:nvPr/>
+        </p:nvSpPr>
+        <p:spPr>
+          <a:xfrm>
+            <a:off x="502920" y="3593592"/>
+            <a:ext cx="256032" cy="256032"/>
+          </a:xfrm>
+          <a:prstGeom prst="roundRect">
+            <a:avLst>
+              <a:gd name="adj" fmla="val 14286"/>
+            </a:avLst>
+          </a:prstGeom>
+          <a:solidFill>
+            <a:srgbClr val="2A9D8F"/>
+          </a:solidFill>
+          <a:ln/>
+        </p:spPr>
+      </p:sp>
+      <p:sp>
+        <p:nvSpPr>
+          <p:cNvPr id="27" name="Text 25"/>
+          <p:cNvSpPr/>
+          <p:nvPr/>
+        </p:nvSpPr>
+        <p:spPr>
+          <a:xfrm>
+            <a:off x="502920" y="3593592"/>
+            <a:ext cx="256032" cy="256032"/>
+          </a:xfrm>
+          <a:prstGeom prst="rect">
+            <a:avLst/>
+          </a:prstGeom>
+          <a:noFill/>
+          <a:ln/>
+        </p:spPr>
+        <p:txBody>
+          <a:bodyPr wrap="square" lIns="0" tIns="0" rIns="0" bIns="0" rtlCol="0" anchor="ctr"/>
+          <a:lstStyle/>
+          <a:p>
+            <a:pPr algn="ctr" indent="0" marL="0">
+              <a:buNone/>
+            </a:pPr>
+            <a:r>
+              <a:rPr lang="en-US" sz="1200" b="1" dirty="0">
+                <a:solidFill>
+                  <a:srgbClr val="FFFFFF"/>
+                </a:solidFill>
+                <a:latin typeface="Arial" pitchFamily="34" charset="0"/>
+                <a:ea typeface="Arial" pitchFamily="34" charset="-122"/>
+                <a:cs typeface="Arial" pitchFamily="34" charset="-120"/>
+              </a:rPr>
+              <a:t>✓</a:t>
+            </a:r>
+            <a:endParaRPr lang="en-US" sz="1200" dirty="0"/>
+          </a:p>
+        </p:txBody>
+      </p:sp>
+      <p:sp>
+        <p:nvSpPr>
+          <p:cNvPr id="28" name="Text 26"/>
+          <p:cNvSpPr/>
+          <p:nvPr/>
+        </p:nvSpPr>
+        <p:spPr>
+          <a:xfrm>
+            <a:off x="914400" y="3520440"/>
+            <a:ext cx="7680960" cy="402336"/>
+          </a:xfrm>
+          <a:prstGeom prst="rect">
+            <a:avLst/>
+          </a:prstGeom>
+          <a:noFill/>
+          <a:ln/>
+        </p:spPr>
+        <p:txBody>
+          <a:bodyPr wrap="square" lIns="0" tIns="0" rIns="0" bIns="0" rtlCol="0" anchor="ctr"/>
+          <a:lstStyle/>
+          <a:p>
+            <a:pPr indent="0" marL="0">
+              <a:buNone/>
+            </a:pPr>
+            <a:r>
+              <a:rPr lang="en-US" sz="1400" dirty="0">
+                <a:solidFill>
+                  <a:srgbClr val="264653"/>
+                </a:solidFill>
+                <a:latin typeface="Arial" pitchFamily="34" charset="0"/>
+                <a:ea typeface="Arial" pitchFamily="34" charset="-122"/>
+                <a:cs typeface="Arial" pitchFamily="34" charset="-120"/>
+              </a:rPr>
+              <a:t>6.  프로파일 · 품질에서 같은 작업을 열 수 있는가</a:t>
+            </a:r>
+            <a:endParaRPr lang="en-US" sz="1400" dirty="0"/>
+          </a:p>
+        </p:txBody>
+      </p:sp>
+      <p:sp>
+        <p:nvSpPr>
+          <p:cNvPr id="29" name="Text 27"/>
           <p:cNvSpPr/>
           <p:nvPr/>
         </p:nvSpPr>
@@ -6868,7 +8578,7 @@
       </p:sp>
       <p:sp>
         <p:nvSpPr>
-          <p:cNvPr id="26" name="Shape 24"/>
+          <p:cNvPr id="30" name="Shape 28"/>
           <p:cNvSpPr/>
           <p:nvPr/>
         </p:nvSpPr>
@@ -6888,7 +8598,7 @@
       </p:sp>
       <p:sp>
         <p:nvSpPr>
-          <p:cNvPr id="27" name="Text 25"/>
+          <p:cNvPr id="31" name="Text 29"/>
           <p:cNvSpPr/>
           <p:nvPr/>
         </p:nvSpPr>
@@ -6919,7 +8629,7 @@
                 <a:ea typeface="Arial" pitchFamily="34" charset="-122"/>
                 <a:cs typeface="Arial" pitchFamily="34" charset="-120"/>
               </a:rPr>
-              <a:t>16</a:t>
+              <a:t>18</a:t>
             </a:r>
             <a:endParaRPr lang="en-US" sz="1200" dirty="0"/>
           </a:p>
@@ -6990,7 +8700,7 @@
                 <a:ea typeface="Arial" pitchFamily="34" charset="-122"/>
                 <a:cs typeface="Arial" pitchFamily="34" charset="-120"/>
               </a:rPr>
-              <a:t>목차</a:t>
+              <a:t>개요</a:t>
             </a:r>
             <a:endParaRPr lang="en-US" sz="2200" dirty="0"/>
           </a:p>
@@ -7018,1028 +8728,36 @@
       </p:sp>
       <p:sp>
         <p:nvSpPr>
-          <p:cNvPr id="4" name="Text 2"/>
-          <p:cNvSpPr/>
-          <p:nvPr/>
-        </p:nvSpPr>
-        <p:spPr>
-          <a:xfrm>
-            <a:off x="365760" y="713232"/>
-            <a:ext cx="320040" cy="274320"/>
-          </a:xfrm>
-          <a:prstGeom prst="rect">
-            <a:avLst/>
-          </a:prstGeom>
-          <a:noFill/>
-          <a:ln/>
-        </p:spPr>
-        <p:txBody>
-          <a:bodyPr wrap="square" lIns="0" tIns="0" rIns="0" bIns="0" rtlCol="0" anchor="ctr"/>
-          <a:lstStyle/>
-          <a:p>
-            <a:pPr indent="0" marL="0">
-              <a:buNone/>
-            </a:pPr>
-            <a:r>
-              <a:rPr lang="en-US" sz="1100" b="1" dirty="0">
-                <a:solidFill>
-                  <a:srgbClr val="2A9D8F"/>
-                </a:solidFill>
-                <a:latin typeface="Arial" pitchFamily="34" charset="0"/>
-                <a:ea typeface="Arial" pitchFamily="34" charset="-122"/>
-                <a:cs typeface="Arial" pitchFamily="34" charset="-120"/>
-              </a:rPr>
-              <a:t>1</a:t>
-            </a:r>
-            <a:endParaRPr lang="en-US" sz="1100" dirty="0"/>
-          </a:p>
-        </p:txBody>
-      </p:sp>
-      <p:sp>
-        <p:nvSpPr>
-          <p:cNvPr id="5" name="Text 3"/>
-          <p:cNvSpPr/>
-          <p:nvPr/>
-        </p:nvSpPr>
-        <p:spPr>
-          <a:xfrm>
-            <a:off x="731520" y="713232"/>
-            <a:ext cx="7863840" cy="274320"/>
-          </a:xfrm>
-          <a:prstGeom prst="rect">
-            <a:avLst/>
-          </a:prstGeom>
-          <a:noFill/>
-          <a:ln/>
-        </p:spPr>
-        <p:txBody>
-          <a:bodyPr wrap="square" lIns="0" tIns="0" rIns="0" bIns="0" rtlCol="0" anchor="ctr"/>
-          <a:lstStyle/>
-          <a:p>
-            <a:pPr indent="0" marL="0">
-              <a:buNone/>
-            </a:pPr>
-            <a:r>
-              <a:rPr lang="en-US" sz="1100" dirty="0">
-                <a:solidFill>
-                  <a:srgbClr val="264653"/>
-                </a:solidFill>
-                <a:latin typeface="Arial" pitchFamily="34" charset="0"/>
-                <a:ea typeface="Arial" pitchFamily="34" charset="-122"/>
-                <a:cs typeface="Arial" pitchFamily="34" charset="-120"/>
-              </a:rPr>
-              <a:t>전체 순서 — 작업 관리 → 작업 상세 → 프로파일 · 품질 조회</a:t>
-            </a:r>
-            <a:endParaRPr lang="en-US" sz="1100" dirty="0"/>
-          </a:p>
-        </p:txBody>
-      </p:sp>
-      <p:sp>
-        <p:nvSpPr>
-          <p:cNvPr id="6" name="Text 4"/>
-          <p:cNvSpPr/>
-          <p:nvPr/>
-        </p:nvSpPr>
-        <p:spPr>
-          <a:xfrm>
-            <a:off x="365760" y="1005840"/>
-            <a:ext cx="320040" cy="274320"/>
-          </a:xfrm>
-          <a:prstGeom prst="rect">
-            <a:avLst/>
-          </a:prstGeom>
-          <a:noFill/>
-          <a:ln/>
-        </p:spPr>
-        <p:txBody>
-          <a:bodyPr wrap="square" lIns="0" tIns="0" rIns="0" bIns="0" rtlCol="0" anchor="ctr"/>
-          <a:lstStyle/>
-          <a:p>
-            <a:pPr indent="0" marL="0">
-              <a:buNone/>
-            </a:pPr>
-            <a:r>
-              <a:rPr lang="en-US" sz="1100" b="1" dirty="0">
-                <a:solidFill>
-                  <a:srgbClr val="2A9D8F"/>
-                </a:solidFill>
-                <a:latin typeface="Arial" pitchFamily="34" charset="0"/>
-                <a:ea typeface="Arial" pitchFamily="34" charset="-122"/>
-                <a:cs typeface="Arial" pitchFamily="34" charset="-120"/>
-              </a:rPr>
-              <a:t>2</a:t>
-            </a:r>
-            <a:endParaRPr lang="en-US" sz="1100" dirty="0"/>
-          </a:p>
-        </p:txBody>
-      </p:sp>
-      <p:sp>
-        <p:nvSpPr>
-          <p:cNvPr id="7" name="Text 5"/>
-          <p:cNvSpPr/>
-          <p:nvPr/>
-        </p:nvSpPr>
-        <p:spPr>
-          <a:xfrm>
-            <a:off x="731520" y="1005840"/>
-            <a:ext cx="7863840" cy="274320"/>
-          </a:xfrm>
-          <a:prstGeom prst="rect">
-            <a:avLst/>
-          </a:prstGeom>
-          <a:noFill/>
-          <a:ln/>
-        </p:spPr>
-        <p:txBody>
-          <a:bodyPr wrap="square" lIns="0" tIns="0" rIns="0" bIns="0" rtlCol="0" anchor="ctr"/>
-          <a:lstStyle/>
-          <a:p>
-            <a:pPr indent="0" marL="0">
-              <a:buNone/>
-            </a:pPr>
-            <a:r>
-              <a:rPr lang="en-US" sz="1100" dirty="0">
-                <a:solidFill>
-                  <a:srgbClr val="264653"/>
-                </a:solidFill>
-                <a:latin typeface="Arial" pitchFamily="34" charset="0"/>
-                <a:ea typeface="Arial" pitchFamily="34" charset="-122"/>
-                <a:cs typeface="Arial" pitchFamily="34" charset="-120"/>
-              </a:rPr>
-              <a:t>작업 관리 화면 — 조회 · 새 작업 · 상세 · 프로파일 · 품질 버튼</a:t>
-            </a:r>
-            <a:endParaRPr lang="en-US" sz="1100" dirty="0"/>
-          </a:p>
-        </p:txBody>
-      </p:sp>
-      <p:sp>
-        <p:nvSpPr>
-          <p:cNvPr id="8" name="Text 6"/>
-          <p:cNvSpPr/>
-          <p:nvPr/>
-        </p:nvSpPr>
-        <p:spPr>
-          <a:xfrm>
-            <a:off x="365760" y="1298448"/>
-            <a:ext cx="320040" cy="274320"/>
-          </a:xfrm>
-          <a:prstGeom prst="rect">
-            <a:avLst/>
-          </a:prstGeom>
-          <a:noFill/>
-          <a:ln/>
-        </p:spPr>
-        <p:txBody>
-          <a:bodyPr wrap="square" lIns="0" tIns="0" rIns="0" bIns="0" rtlCol="0" anchor="ctr"/>
-          <a:lstStyle/>
-          <a:p>
-            <a:pPr indent="0" marL="0">
-              <a:buNone/>
-            </a:pPr>
-            <a:r>
-              <a:rPr lang="en-US" sz="1100" b="1" dirty="0">
-                <a:solidFill>
-                  <a:srgbClr val="2A9D8F"/>
-                </a:solidFill>
-                <a:latin typeface="Arial" pitchFamily="34" charset="0"/>
-                <a:ea typeface="Arial" pitchFamily="34" charset="-122"/>
-                <a:cs typeface="Arial" pitchFamily="34" charset="-120"/>
-              </a:rPr>
-              <a:t>3</a:t>
-            </a:r>
-            <a:endParaRPr lang="en-US" sz="1100" dirty="0"/>
-          </a:p>
-        </p:txBody>
-      </p:sp>
-      <p:sp>
-        <p:nvSpPr>
-          <p:cNvPr id="9" name="Text 7"/>
-          <p:cNvSpPr/>
-          <p:nvPr/>
-        </p:nvSpPr>
-        <p:spPr>
-          <a:xfrm>
-            <a:off x="731520" y="1298448"/>
-            <a:ext cx="7863840" cy="274320"/>
-          </a:xfrm>
-          <a:prstGeom prst="rect">
-            <a:avLst/>
-          </a:prstGeom>
-          <a:noFill/>
-          <a:ln/>
-        </p:spPr>
-        <p:txBody>
-          <a:bodyPr wrap="square" lIns="0" tIns="0" rIns="0" bIns="0" rtlCol="0" anchor="ctr"/>
-          <a:lstStyle/>
-          <a:p>
-            <a:pPr indent="0" marL="0">
-              <a:buNone/>
-            </a:pPr>
-            <a:r>
-              <a:rPr lang="en-US" sz="1100" dirty="0">
-                <a:solidFill>
-                  <a:srgbClr val="264653"/>
-                </a:solidFill>
-                <a:latin typeface="Arial" pitchFamily="34" charset="0"/>
-                <a:ea typeface="Arial" pitchFamily="34" charset="-122"/>
-                <a:cs typeface="Arial" pitchFamily="34" charset="-120"/>
-              </a:rPr>
-              <a:t>새 작업 만들기 — 공사 · 호기 · 품목 · 이음부 · 첫 패스 · 만들기</a:t>
-            </a:r>
-            <a:endParaRPr lang="en-US" sz="1100" dirty="0"/>
-          </a:p>
-        </p:txBody>
-      </p:sp>
-      <p:sp>
-        <p:nvSpPr>
-          <p:cNvPr id="10" name="Text 8"/>
-          <p:cNvSpPr/>
-          <p:nvPr/>
-        </p:nvSpPr>
-        <p:spPr>
-          <a:xfrm>
-            <a:off x="365760" y="1591056"/>
-            <a:ext cx="320040" cy="274320"/>
-          </a:xfrm>
-          <a:prstGeom prst="rect">
-            <a:avLst/>
-          </a:prstGeom>
-          <a:noFill/>
-          <a:ln/>
-        </p:spPr>
-        <p:txBody>
-          <a:bodyPr wrap="square" lIns="0" tIns="0" rIns="0" bIns="0" rtlCol="0" anchor="ctr"/>
-          <a:lstStyle/>
-          <a:p>
-            <a:pPr indent="0" marL="0">
-              <a:buNone/>
-            </a:pPr>
-            <a:r>
-              <a:rPr lang="en-US" sz="1100" b="1" dirty="0">
-                <a:solidFill>
-                  <a:srgbClr val="2A9D8F"/>
-                </a:solidFill>
-                <a:latin typeface="Arial" pitchFamily="34" charset="0"/>
-                <a:ea typeface="Arial" pitchFamily="34" charset="-122"/>
-                <a:cs typeface="Arial" pitchFamily="34" charset="-120"/>
-              </a:rPr>
-              <a:t>4</a:t>
-            </a:r>
-            <a:endParaRPr lang="en-US" sz="1100" dirty="0"/>
-          </a:p>
-        </p:txBody>
-      </p:sp>
-      <p:sp>
-        <p:nvSpPr>
-          <p:cNvPr id="11" name="Text 9"/>
-          <p:cNvSpPr/>
-          <p:nvPr/>
-        </p:nvSpPr>
-        <p:spPr>
-          <a:xfrm>
-            <a:off x="731520" y="1591056"/>
-            <a:ext cx="7863840" cy="274320"/>
-          </a:xfrm>
-          <a:prstGeom prst="rect">
-            <a:avLst/>
-          </a:prstGeom>
-          <a:noFill/>
-          <a:ln/>
-        </p:spPr>
-        <p:txBody>
-          <a:bodyPr wrap="square" lIns="0" tIns="0" rIns="0" bIns="0" rtlCol="0" anchor="ctr"/>
-          <a:lstStyle/>
-          <a:p>
-            <a:pPr indent="0" marL="0">
-              <a:buNone/>
-            </a:pPr>
-            <a:r>
-              <a:rPr lang="en-US" sz="1100" dirty="0">
-                <a:solidFill>
-                  <a:srgbClr val="264653"/>
-                </a:solidFill>
-                <a:latin typeface="Arial" pitchFamily="34" charset="0"/>
-                <a:ea typeface="Arial" pitchFamily="34" charset="-122"/>
-                <a:cs typeface="Arial" pitchFamily="34" charset="-120"/>
-              </a:rPr>
-              <a:t>목록에서 상세 · 프로파일 · 품질 열기 — 행마다 바로가기</a:t>
-            </a:r>
-            <a:endParaRPr lang="en-US" sz="1100" dirty="0"/>
-          </a:p>
-        </p:txBody>
-      </p:sp>
-      <p:sp>
-        <p:nvSpPr>
-          <p:cNvPr id="12" name="Text 10"/>
-          <p:cNvSpPr/>
-          <p:nvPr/>
-        </p:nvSpPr>
-        <p:spPr>
-          <a:xfrm>
-            <a:off x="365760" y="1883664"/>
-            <a:ext cx="320040" cy="274320"/>
-          </a:xfrm>
-          <a:prstGeom prst="rect">
-            <a:avLst/>
-          </a:prstGeom>
-          <a:noFill/>
-          <a:ln/>
-        </p:spPr>
-        <p:txBody>
-          <a:bodyPr wrap="square" lIns="0" tIns="0" rIns="0" bIns="0" rtlCol="0" anchor="ctr"/>
-          <a:lstStyle/>
-          <a:p>
-            <a:pPr indent="0" marL="0">
-              <a:buNone/>
-            </a:pPr>
-            <a:r>
-              <a:rPr lang="en-US" sz="1100" b="1" dirty="0">
-                <a:solidFill>
-                  <a:srgbClr val="2A9D8F"/>
-                </a:solidFill>
-                <a:latin typeface="Arial" pitchFamily="34" charset="0"/>
-                <a:ea typeface="Arial" pitchFamily="34" charset="-122"/>
-                <a:cs typeface="Arial" pitchFamily="34" charset="-120"/>
-              </a:rPr>
-              <a:t>5</a:t>
-            </a:r>
-            <a:endParaRPr lang="en-US" sz="1100" dirty="0"/>
-          </a:p>
-        </p:txBody>
-      </p:sp>
-      <p:sp>
-        <p:nvSpPr>
-          <p:cNvPr id="13" name="Text 11"/>
-          <p:cNvSpPr/>
-          <p:nvPr/>
-        </p:nvSpPr>
-        <p:spPr>
-          <a:xfrm>
-            <a:off x="731520" y="1883664"/>
-            <a:ext cx="7863840" cy="274320"/>
-          </a:xfrm>
-          <a:prstGeom prst="rect">
-            <a:avLst/>
-          </a:prstGeom>
-          <a:noFill/>
-          <a:ln/>
-        </p:spPr>
-        <p:txBody>
-          <a:bodyPr wrap="square" lIns="0" tIns="0" rIns="0" bIns="0" rtlCol="0" anchor="ctr"/>
-          <a:lstStyle/>
-          <a:p>
-            <a:pPr indent="0" marL="0">
-              <a:buNone/>
-            </a:pPr>
-            <a:r>
-              <a:rPr lang="en-US" sz="1100" dirty="0">
-                <a:solidFill>
-                  <a:srgbClr val="264653"/>
-                </a:solidFill>
-                <a:latin typeface="Arial" pitchFamily="34" charset="0"/>
-                <a:ea typeface="Arial" pitchFamily="34" charset="-122"/>
-                <a:cs typeface="Arial" pitchFamily="34" charset="-120"/>
-              </a:rPr>
-              <a:t>작업 상세 — 기본 정보 — 공사 · 품목 · 이음부 · 작업자 · 시간 · 규격 · 저장 · 지우기</a:t>
-            </a:r>
-            <a:endParaRPr lang="en-US" sz="1100" dirty="0"/>
-          </a:p>
-        </p:txBody>
-      </p:sp>
-      <p:sp>
-        <p:nvSpPr>
-          <p:cNvPr id="14" name="Text 12"/>
-          <p:cNvSpPr/>
-          <p:nvPr/>
-        </p:nvSpPr>
-        <p:spPr>
-          <a:xfrm>
-            <a:off x="365760" y="2176272"/>
-            <a:ext cx="320040" cy="274320"/>
-          </a:xfrm>
-          <a:prstGeom prst="rect">
-            <a:avLst/>
-          </a:prstGeom>
-          <a:noFill/>
-          <a:ln/>
-        </p:spPr>
-        <p:txBody>
-          <a:bodyPr wrap="square" lIns="0" tIns="0" rIns="0" bIns="0" rtlCol="0" anchor="ctr"/>
-          <a:lstStyle/>
-          <a:p>
-            <a:pPr indent="0" marL="0">
-              <a:buNone/>
-            </a:pPr>
-            <a:r>
-              <a:rPr lang="en-US" sz="1100" b="1" dirty="0">
-                <a:solidFill>
-                  <a:srgbClr val="2A9D8F"/>
-                </a:solidFill>
-                <a:latin typeface="Arial" pitchFamily="34" charset="0"/>
-                <a:ea typeface="Arial" pitchFamily="34" charset="-122"/>
-                <a:cs typeface="Arial" pitchFamily="34" charset="-120"/>
-              </a:rPr>
-              <a:t>6</a:t>
-            </a:r>
-            <a:endParaRPr lang="en-US" sz="1100" dirty="0"/>
-          </a:p>
-        </p:txBody>
-      </p:sp>
-      <p:sp>
-        <p:nvSpPr>
-          <p:cNvPr id="15" name="Text 13"/>
-          <p:cNvSpPr/>
-          <p:nvPr/>
-        </p:nvSpPr>
-        <p:spPr>
-          <a:xfrm>
-            <a:off x="731520" y="2176272"/>
-            <a:ext cx="7863840" cy="274320"/>
-          </a:xfrm>
-          <a:prstGeom prst="rect">
-            <a:avLst/>
-          </a:prstGeom>
-          <a:noFill/>
-          <a:ln/>
-        </p:spPr>
-        <p:txBody>
-          <a:bodyPr wrap="square" lIns="0" tIns="0" rIns="0" bIns="0" rtlCol="0" anchor="ctr"/>
-          <a:lstStyle/>
-          <a:p>
-            <a:pPr indent="0" marL="0">
-              <a:buNone/>
-            </a:pPr>
-            <a:r>
-              <a:rPr lang="en-US" sz="1100" dirty="0">
-                <a:solidFill>
-                  <a:srgbClr val="264653"/>
-                </a:solidFill>
-                <a:latin typeface="Arial" pitchFamily="34" charset="0"/>
-                <a:ea typeface="Arial" pitchFamily="34" charset="-122"/>
-                <a:cs typeface="Arial" pitchFamily="34" charset="-120"/>
-              </a:rPr>
-              <a:t>작업 상세 — 패스 — 패스 목록 확인 · 패스 추가 진입</a:t>
-            </a:r>
-            <a:endParaRPr lang="en-US" sz="1100" dirty="0"/>
-          </a:p>
-        </p:txBody>
-      </p:sp>
-      <p:sp>
-        <p:nvSpPr>
-          <p:cNvPr id="16" name="Text 14"/>
-          <p:cNvSpPr/>
-          <p:nvPr/>
-        </p:nvSpPr>
-        <p:spPr>
-          <a:xfrm>
-            <a:off x="365760" y="2468880"/>
-            <a:ext cx="320040" cy="274320"/>
-          </a:xfrm>
-          <a:prstGeom prst="rect">
-            <a:avLst/>
-          </a:prstGeom>
-          <a:noFill/>
-          <a:ln/>
-        </p:spPr>
-        <p:txBody>
-          <a:bodyPr wrap="square" lIns="0" tIns="0" rIns="0" bIns="0" rtlCol="0" anchor="ctr"/>
-          <a:lstStyle/>
-          <a:p>
-            <a:pPr indent="0" marL="0">
-              <a:buNone/>
-            </a:pPr>
-            <a:r>
-              <a:rPr lang="en-US" sz="1100" b="1" dirty="0">
-                <a:solidFill>
-                  <a:srgbClr val="2A9D8F"/>
-                </a:solidFill>
-                <a:latin typeface="Arial" pitchFamily="34" charset="0"/>
-                <a:ea typeface="Arial" pitchFamily="34" charset="-122"/>
-                <a:cs typeface="Arial" pitchFamily="34" charset="-120"/>
-              </a:rPr>
-              <a:t>7</a:t>
-            </a:r>
-            <a:endParaRPr lang="en-US" sz="1100" dirty="0"/>
-          </a:p>
-        </p:txBody>
-      </p:sp>
-      <p:sp>
-        <p:nvSpPr>
-          <p:cNvPr id="17" name="Text 15"/>
-          <p:cNvSpPr/>
-          <p:nvPr/>
-        </p:nvSpPr>
-        <p:spPr>
-          <a:xfrm>
-            <a:off x="731520" y="2468880"/>
-            <a:ext cx="7863840" cy="274320"/>
-          </a:xfrm>
-          <a:prstGeom prst="rect">
-            <a:avLst/>
-          </a:prstGeom>
-          <a:noFill/>
-          <a:ln/>
-        </p:spPr>
-        <p:txBody>
-          <a:bodyPr wrap="square" lIns="0" tIns="0" rIns="0" bIns="0" rtlCol="0" anchor="ctr"/>
-          <a:lstStyle/>
-          <a:p>
-            <a:pPr indent="0" marL="0">
-              <a:buNone/>
-            </a:pPr>
-            <a:r>
-              <a:rPr lang="en-US" sz="1100" dirty="0">
-                <a:solidFill>
-                  <a:srgbClr val="264653"/>
-                </a:solidFill>
-                <a:latin typeface="Arial" pitchFamily="34" charset="0"/>
-                <a:ea typeface="Arial" pitchFamily="34" charset="-122"/>
-                <a:cs typeface="Arial" pitchFamily="34" charset="-120"/>
-              </a:rPr>
-              <a:t>작업 상세 — 패스 추가 창 — 패스 번호 · 시작 · 끝 · 종류 · 추가</a:t>
-            </a:r>
-            <a:endParaRPr lang="en-US" sz="1100" dirty="0"/>
-          </a:p>
-        </p:txBody>
-      </p:sp>
-      <p:sp>
-        <p:nvSpPr>
-          <p:cNvPr id="18" name="Text 16"/>
-          <p:cNvSpPr/>
-          <p:nvPr/>
-        </p:nvSpPr>
-        <p:spPr>
-          <a:xfrm>
-            <a:off x="365760" y="2761488"/>
-            <a:ext cx="320040" cy="274320"/>
-          </a:xfrm>
-          <a:prstGeom prst="rect">
-            <a:avLst/>
-          </a:prstGeom>
-          <a:noFill/>
-          <a:ln/>
-        </p:spPr>
-        <p:txBody>
-          <a:bodyPr wrap="square" lIns="0" tIns="0" rIns="0" bIns="0" rtlCol="0" anchor="ctr"/>
-          <a:lstStyle/>
-          <a:p>
-            <a:pPr indent="0" marL="0">
-              <a:buNone/>
-            </a:pPr>
-            <a:r>
-              <a:rPr lang="en-US" sz="1100" b="1" dirty="0">
-                <a:solidFill>
-                  <a:srgbClr val="2A9D8F"/>
-                </a:solidFill>
-                <a:latin typeface="Arial" pitchFamily="34" charset="0"/>
-                <a:ea typeface="Arial" pitchFamily="34" charset="-122"/>
-                <a:cs typeface="Arial" pitchFamily="34" charset="-120"/>
-              </a:rPr>
-              <a:t>8</a:t>
-            </a:r>
-            <a:endParaRPr lang="en-US" sz="1100" dirty="0"/>
-          </a:p>
-        </p:txBody>
-      </p:sp>
-      <p:sp>
-        <p:nvSpPr>
-          <p:cNvPr id="19" name="Text 17"/>
-          <p:cNvSpPr/>
-          <p:nvPr/>
-        </p:nvSpPr>
-        <p:spPr>
-          <a:xfrm>
-            <a:off x="731520" y="2761488"/>
-            <a:ext cx="7863840" cy="274320"/>
-          </a:xfrm>
-          <a:prstGeom prst="rect">
-            <a:avLst/>
-          </a:prstGeom>
-          <a:noFill/>
-          <a:ln/>
-        </p:spPr>
-        <p:txBody>
-          <a:bodyPr wrap="square" lIns="0" tIns="0" rIns="0" bIns="0" rtlCol="0" anchor="ctr"/>
-          <a:lstStyle/>
-          <a:p>
-            <a:pPr indent="0" marL="0">
-              <a:buNone/>
-            </a:pPr>
-            <a:r>
-              <a:rPr lang="en-US" sz="1100" dirty="0">
-                <a:solidFill>
-                  <a:srgbClr val="264653"/>
-                </a:solidFill>
-                <a:latin typeface="Arial" pitchFamily="34" charset="0"/>
-                <a:ea typeface="Arial" pitchFamily="34" charset="-122"/>
-                <a:cs typeface="Arial" pitchFamily="34" charset="-120"/>
-              </a:rPr>
-              <a:t>작업 상세 — 첨부 — 에셋 올리기 · 에셋 붙이기 · 패스 지정</a:t>
-            </a:r>
-            <a:endParaRPr lang="en-US" sz="1100" dirty="0"/>
-          </a:p>
-        </p:txBody>
-      </p:sp>
-      <p:sp>
-        <p:nvSpPr>
-          <p:cNvPr id="20" name="Text 18"/>
-          <p:cNvSpPr/>
-          <p:nvPr/>
-        </p:nvSpPr>
-        <p:spPr>
-          <a:xfrm>
-            <a:off x="365760" y="3054096"/>
-            <a:ext cx="320040" cy="274320"/>
-          </a:xfrm>
-          <a:prstGeom prst="rect">
-            <a:avLst/>
-          </a:prstGeom>
-          <a:noFill/>
-          <a:ln/>
-        </p:spPr>
-        <p:txBody>
-          <a:bodyPr wrap="square" lIns="0" tIns="0" rIns="0" bIns="0" rtlCol="0" anchor="ctr"/>
-          <a:lstStyle/>
-          <a:p>
-            <a:pPr indent="0" marL="0">
-              <a:buNone/>
-            </a:pPr>
-            <a:r>
-              <a:rPr lang="en-US" sz="1100" b="1" dirty="0">
-                <a:solidFill>
-                  <a:srgbClr val="2A9D8F"/>
-                </a:solidFill>
-                <a:latin typeface="Arial" pitchFamily="34" charset="0"/>
-                <a:ea typeface="Arial" pitchFamily="34" charset="-122"/>
-                <a:cs typeface="Arial" pitchFamily="34" charset="-120"/>
-              </a:rPr>
-              <a:t>9</a:t>
-            </a:r>
-            <a:endParaRPr lang="en-US" sz="1100" dirty="0"/>
-          </a:p>
-        </p:txBody>
-      </p:sp>
-      <p:sp>
-        <p:nvSpPr>
-          <p:cNvPr id="21" name="Text 19"/>
-          <p:cNvSpPr/>
-          <p:nvPr/>
-        </p:nvSpPr>
-        <p:spPr>
-          <a:xfrm>
-            <a:off x="731520" y="3054096"/>
-            <a:ext cx="7863840" cy="274320"/>
-          </a:xfrm>
-          <a:prstGeom prst="rect">
-            <a:avLst/>
-          </a:prstGeom>
-          <a:noFill/>
-          <a:ln/>
-        </p:spPr>
-        <p:txBody>
-          <a:bodyPr wrap="square" lIns="0" tIns="0" rIns="0" bIns="0" rtlCol="0" anchor="ctr"/>
-          <a:lstStyle/>
-          <a:p>
-            <a:pPr indent="0" marL="0">
-              <a:buNone/>
-            </a:pPr>
-            <a:r>
-              <a:rPr lang="en-US" sz="1100" dirty="0">
-                <a:solidFill>
-                  <a:srgbClr val="264653"/>
-                </a:solidFill>
-                <a:latin typeface="Arial" pitchFamily="34" charset="0"/>
-                <a:ea typeface="Arial" pitchFamily="34" charset="-122"/>
-                <a:cs typeface="Arial" pitchFamily="34" charset="-120"/>
-              </a:rPr>
-              <a:t>첨부 — 에셋 올리기 창 — 파일 · 주제 · 상황 · 작업 · 패스 · 장비 · 시간 0 · 올리기</a:t>
-            </a:r>
-            <a:endParaRPr lang="en-US" sz="1100" dirty="0"/>
-          </a:p>
-        </p:txBody>
-      </p:sp>
-      <p:sp>
-        <p:nvSpPr>
-          <p:cNvPr id="22" name="Text 20"/>
-          <p:cNvSpPr/>
-          <p:nvPr/>
-        </p:nvSpPr>
-        <p:spPr>
-          <a:xfrm>
-            <a:off x="365760" y="3346704"/>
-            <a:ext cx="320040" cy="274320"/>
-          </a:xfrm>
-          <a:prstGeom prst="rect">
-            <a:avLst/>
-          </a:prstGeom>
-          <a:noFill/>
-          <a:ln/>
-        </p:spPr>
-        <p:txBody>
-          <a:bodyPr wrap="square" lIns="0" tIns="0" rIns="0" bIns="0" rtlCol="0" anchor="ctr"/>
-          <a:lstStyle/>
-          <a:p>
-            <a:pPr indent="0" marL="0">
-              <a:buNone/>
-            </a:pPr>
-            <a:r>
-              <a:rPr lang="en-US" sz="1100" b="1" dirty="0">
-                <a:solidFill>
-                  <a:srgbClr val="2A9D8F"/>
-                </a:solidFill>
-                <a:latin typeface="Arial" pitchFamily="34" charset="0"/>
-                <a:ea typeface="Arial" pitchFamily="34" charset="-122"/>
-                <a:cs typeface="Arial" pitchFamily="34" charset="-120"/>
-              </a:rPr>
-              <a:t>10</a:t>
-            </a:r>
-            <a:endParaRPr lang="en-US" sz="1100" dirty="0"/>
-          </a:p>
-        </p:txBody>
-      </p:sp>
-      <p:sp>
-        <p:nvSpPr>
-          <p:cNvPr id="23" name="Text 21"/>
-          <p:cNvSpPr/>
-          <p:nvPr/>
-        </p:nvSpPr>
-        <p:spPr>
-          <a:xfrm>
-            <a:off x="731520" y="3346704"/>
-            <a:ext cx="7863840" cy="274320"/>
-          </a:xfrm>
-          <a:prstGeom prst="rect">
-            <a:avLst/>
-          </a:prstGeom>
-          <a:noFill/>
-          <a:ln/>
-        </p:spPr>
-        <p:txBody>
-          <a:bodyPr wrap="square" lIns="0" tIns="0" rIns="0" bIns="0" rtlCol="0" anchor="ctr"/>
-          <a:lstStyle/>
-          <a:p>
-            <a:pPr indent="0" marL="0">
-              <a:buNone/>
-            </a:pPr>
-            <a:r>
-              <a:rPr lang="en-US" sz="1100" dirty="0">
-                <a:solidFill>
-                  <a:srgbClr val="264653"/>
-                </a:solidFill>
-                <a:latin typeface="Arial" pitchFamily="34" charset="0"/>
-                <a:ea typeface="Arial" pitchFamily="34" charset="-122"/>
-                <a:cs typeface="Arial" pitchFamily="34" charset="-120"/>
-              </a:rPr>
-              <a:t>파일 종류 — 시간 자료 — 영상 · 음성 · 센서 · 시간 0 필수 · 빠른 채우기</a:t>
-            </a:r>
-            <a:endParaRPr lang="en-US" sz="1100" dirty="0"/>
-          </a:p>
-        </p:txBody>
-      </p:sp>
-      <p:sp>
-        <p:nvSpPr>
-          <p:cNvPr id="24" name="Text 22"/>
-          <p:cNvSpPr/>
-          <p:nvPr/>
-        </p:nvSpPr>
-        <p:spPr>
-          <a:xfrm>
-            <a:off x="365760" y="3639312"/>
-            <a:ext cx="320040" cy="274320"/>
-          </a:xfrm>
-          <a:prstGeom prst="rect">
-            <a:avLst/>
-          </a:prstGeom>
-          <a:noFill/>
-          <a:ln/>
-        </p:spPr>
-        <p:txBody>
-          <a:bodyPr wrap="square" lIns="0" tIns="0" rIns="0" bIns="0" rtlCol="0" anchor="ctr"/>
-          <a:lstStyle/>
-          <a:p>
-            <a:pPr indent="0" marL="0">
-              <a:buNone/>
-            </a:pPr>
-            <a:r>
-              <a:rPr lang="en-US" sz="1100" b="1" dirty="0">
-                <a:solidFill>
-                  <a:srgbClr val="2A9D8F"/>
-                </a:solidFill>
-                <a:latin typeface="Arial" pitchFamily="34" charset="0"/>
-                <a:ea typeface="Arial" pitchFamily="34" charset="-122"/>
-                <a:cs typeface="Arial" pitchFamily="34" charset="-120"/>
-              </a:rPr>
-              <a:t>11</a:t>
-            </a:r>
-            <a:endParaRPr lang="en-US" sz="1100" dirty="0"/>
-          </a:p>
-        </p:txBody>
-      </p:sp>
-      <p:sp>
-        <p:nvSpPr>
-          <p:cNvPr id="25" name="Text 23"/>
-          <p:cNvSpPr/>
-          <p:nvPr/>
-        </p:nvSpPr>
-        <p:spPr>
-          <a:xfrm>
-            <a:off x="731520" y="3639312"/>
-            <a:ext cx="7863840" cy="274320"/>
-          </a:xfrm>
-          <a:prstGeom prst="rect">
-            <a:avLst/>
-          </a:prstGeom>
-          <a:noFill/>
-          <a:ln/>
-        </p:spPr>
-        <p:txBody>
-          <a:bodyPr wrap="square" lIns="0" tIns="0" rIns="0" bIns="0" rtlCol="0" anchor="ctr"/>
-          <a:lstStyle/>
-          <a:p>
-            <a:pPr indent="0" marL="0">
-              <a:buNone/>
-            </a:pPr>
-            <a:r>
-              <a:rPr lang="en-US" sz="1100" dirty="0">
-                <a:solidFill>
-                  <a:srgbClr val="264653"/>
-                </a:solidFill>
-                <a:latin typeface="Arial" pitchFamily="34" charset="0"/>
-                <a:ea typeface="Arial" pitchFamily="34" charset="-122"/>
-                <a:cs typeface="Arial" pitchFamily="34" charset="-120"/>
-              </a:rPr>
-              <a:t>파일 종류 — 문서 · 이미지 — pdf · jpg · png · 시간 0 선택</a:t>
-            </a:r>
-            <a:endParaRPr lang="en-US" sz="1100" dirty="0"/>
-          </a:p>
-        </p:txBody>
-      </p:sp>
-      <p:sp>
-        <p:nvSpPr>
-          <p:cNvPr id="26" name="Text 24"/>
-          <p:cNvSpPr/>
-          <p:nvPr/>
-        </p:nvSpPr>
-        <p:spPr>
-          <a:xfrm>
-            <a:off x="365760" y="3931920"/>
-            <a:ext cx="320040" cy="274320"/>
-          </a:xfrm>
-          <a:prstGeom prst="rect">
-            <a:avLst/>
-          </a:prstGeom>
-          <a:noFill/>
-          <a:ln/>
-        </p:spPr>
-        <p:txBody>
-          <a:bodyPr wrap="square" lIns="0" tIns="0" rIns="0" bIns="0" rtlCol="0" anchor="ctr"/>
-          <a:lstStyle/>
-          <a:p>
-            <a:pPr indent="0" marL="0">
-              <a:buNone/>
-            </a:pPr>
-            <a:r>
-              <a:rPr lang="en-US" sz="1100" b="1" dirty="0">
-                <a:solidFill>
-                  <a:srgbClr val="2A9D8F"/>
-                </a:solidFill>
-                <a:latin typeface="Arial" pitchFamily="34" charset="0"/>
-                <a:ea typeface="Arial" pitchFamily="34" charset="-122"/>
-                <a:cs typeface="Arial" pitchFamily="34" charset="-120"/>
-              </a:rPr>
-              <a:t>12</a:t>
-            </a:r>
-            <a:endParaRPr lang="en-US" sz="1100" dirty="0"/>
-          </a:p>
-        </p:txBody>
-      </p:sp>
-      <p:sp>
-        <p:nvSpPr>
-          <p:cNvPr id="27" name="Text 25"/>
-          <p:cNvSpPr/>
-          <p:nvPr/>
-        </p:nvSpPr>
-        <p:spPr>
-          <a:xfrm>
-            <a:off x="731520" y="3931920"/>
-            <a:ext cx="7863840" cy="274320"/>
-          </a:xfrm>
-          <a:prstGeom prst="rect">
-            <a:avLst/>
-          </a:prstGeom>
-          <a:noFill/>
-          <a:ln/>
-        </p:spPr>
-        <p:txBody>
-          <a:bodyPr wrap="square" lIns="0" tIns="0" rIns="0" bIns="0" rtlCol="0" anchor="ctr"/>
-          <a:lstStyle/>
-          <a:p>
-            <a:pPr indent="0" marL="0">
-              <a:buNone/>
-            </a:pPr>
-            <a:r>
-              <a:rPr lang="en-US" sz="1100" dirty="0">
-                <a:solidFill>
-                  <a:srgbClr val="264653"/>
-                </a:solidFill>
-                <a:latin typeface="Arial" pitchFamily="34" charset="0"/>
-                <a:ea typeface="Arial" pitchFamily="34" charset="-122"/>
-                <a:cs typeface="Arial" pitchFamily="34" charset="-120"/>
-              </a:rPr>
-              <a:t>프로파일 화면 — 작업 요약 · 패스 선택 · 전류 · 전압 파형</a:t>
-            </a:r>
-            <a:endParaRPr lang="en-US" sz="1100" dirty="0"/>
-          </a:p>
-        </p:txBody>
-      </p:sp>
-      <p:sp>
-        <p:nvSpPr>
-          <p:cNvPr id="28" name="Text 26"/>
-          <p:cNvSpPr/>
-          <p:nvPr/>
-        </p:nvSpPr>
-        <p:spPr>
-          <a:xfrm>
-            <a:off x="365760" y="4224528"/>
-            <a:ext cx="320040" cy="274320"/>
-          </a:xfrm>
-          <a:prstGeom prst="rect">
-            <a:avLst/>
-          </a:prstGeom>
-          <a:noFill/>
-          <a:ln/>
-        </p:spPr>
-        <p:txBody>
-          <a:bodyPr wrap="square" lIns="0" tIns="0" rIns="0" bIns="0" rtlCol="0" anchor="ctr"/>
-          <a:lstStyle/>
-          <a:p>
-            <a:pPr indent="0" marL="0">
-              <a:buNone/>
-            </a:pPr>
-            <a:r>
-              <a:rPr lang="en-US" sz="1100" b="1" dirty="0">
-                <a:solidFill>
-                  <a:srgbClr val="2A9D8F"/>
-                </a:solidFill>
-                <a:latin typeface="Arial" pitchFamily="34" charset="0"/>
-                <a:ea typeface="Arial" pitchFamily="34" charset="-122"/>
-                <a:cs typeface="Arial" pitchFamily="34" charset="-120"/>
-              </a:rPr>
-              <a:t>13</a:t>
-            </a:r>
-            <a:endParaRPr lang="en-US" sz="1100" dirty="0"/>
-          </a:p>
-        </p:txBody>
-      </p:sp>
-      <p:sp>
-        <p:nvSpPr>
-          <p:cNvPr id="29" name="Text 27"/>
-          <p:cNvSpPr/>
-          <p:nvPr/>
-        </p:nvSpPr>
-        <p:spPr>
-          <a:xfrm>
-            <a:off x="731520" y="4224528"/>
-            <a:ext cx="7863840" cy="274320"/>
-          </a:xfrm>
-          <a:prstGeom prst="rect">
-            <a:avLst/>
-          </a:prstGeom>
-          <a:noFill/>
-          <a:ln/>
-        </p:spPr>
-        <p:txBody>
-          <a:bodyPr wrap="square" lIns="0" tIns="0" rIns="0" bIns="0" rtlCol="0" anchor="ctr"/>
-          <a:lstStyle/>
-          <a:p>
-            <a:pPr indent="0" marL="0">
-              <a:buNone/>
-            </a:pPr>
-            <a:r>
-              <a:rPr lang="en-US" sz="1100" dirty="0">
-                <a:solidFill>
-                  <a:srgbClr val="264653"/>
-                </a:solidFill>
-                <a:latin typeface="Arial" pitchFamily="34" charset="0"/>
-                <a:ea typeface="Arial" pitchFamily="34" charset="-122"/>
-                <a:cs typeface="Arial" pitchFamily="34" charset="-120"/>
-              </a:rPr>
-              <a:t>품질 화면 — 패스 선택 · 성적서 · 문서 · 파형</a:t>
-            </a:r>
-            <a:endParaRPr lang="en-US" sz="1100" dirty="0"/>
-          </a:p>
-        </p:txBody>
-      </p:sp>
-      <p:sp>
-        <p:nvSpPr>
-          <p:cNvPr id="30" name="Shape 28"/>
-          <p:cNvSpPr/>
-          <p:nvPr/>
-        </p:nvSpPr>
-        <p:spPr>
-          <a:xfrm>
-            <a:off x="8503920" y="4663440"/>
-            <a:ext cx="365760" cy="365760"/>
+          <p:cNvPr id="4" name="Shape 2"/>
+          <p:cNvSpPr/>
+          <p:nvPr/>
+        </p:nvSpPr>
+        <p:spPr>
+          <a:xfrm>
+            <a:off x="365760" y="777240"/>
+            <a:ext cx="8412480" cy="548640"/>
+          </a:xfrm>
+          <a:prstGeom prst="roundRect">
+            <a:avLst>
+              <a:gd name="adj" fmla="val 10000"/>
+            </a:avLst>
+          </a:prstGeom>
+          <a:solidFill>
+            <a:srgbClr val="FFFFFF"/>
+          </a:solidFill>
+          <a:ln/>
+        </p:spPr>
+      </p:sp>
+      <p:sp>
+        <p:nvSpPr>
+          <p:cNvPr id="5" name="Shape 3"/>
+          <p:cNvSpPr/>
+          <p:nvPr/>
+        </p:nvSpPr>
+        <p:spPr>
+          <a:xfrm>
+            <a:off x="530352" y="960120"/>
+            <a:ext cx="182880" cy="182880"/>
           </a:xfrm>
           <a:prstGeom prst="ellipse">
             <a:avLst/>
@@ -8052,7 +8770,390 @@
       </p:sp>
       <p:sp>
         <p:nvSpPr>
-          <p:cNvPr id="31" name="Text 29"/>
+          <p:cNvPr id="6" name="Text 4"/>
+          <p:cNvSpPr/>
+          <p:nvPr/>
+        </p:nvSpPr>
+        <p:spPr>
+          <a:xfrm>
+            <a:off x="914400" y="777240"/>
+            <a:ext cx="7680960" cy="548640"/>
+          </a:xfrm>
+          <a:prstGeom prst="rect">
+            <a:avLst/>
+          </a:prstGeom>
+          <a:noFill/>
+          <a:ln/>
+        </p:spPr>
+        <p:txBody>
+          <a:bodyPr wrap="square" lIns="0" tIns="0" rIns="0" bIns="0" rtlCol="0" anchor="ctr"/>
+          <a:lstStyle/>
+          <a:p>
+            <a:pPr indent="0" marL="0">
+              <a:buNone/>
+            </a:pPr>
+            <a:r>
+              <a:rPr lang="en-US" sz="1400" dirty="0">
+                <a:solidFill>
+                  <a:srgbClr val="264653"/>
+                </a:solidFill>
+                <a:latin typeface="Arial" pitchFamily="34" charset="0"/>
+                <a:ea typeface="Arial" pitchFamily="34" charset="-122"/>
+                <a:cs typeface="Arial" pitchFamily="34" charset="-120"/>
+              </a:rPr>
+              <a:t>용접 수집 대시보드 — 수집 모니터링에서 조회·타임라인으로 현황을 보고, 작업 등록·첨부로 자료를 정리한 뒤 프로파일·품질로 같은 작업을 확인하는 현장 안내</a:t>
+            </a:r>
+            <a:endParaRPr lang="en-US" sz="1400" dirty="0"/>
+          </a:p>
+        </p:txBody>
+      </p:sp>
+      <p:sp>
+        <p:nvSpPr>
+          <p:cNvPr id="7" name="Shape 5"/>
+          <p:cNvSpPr/>
+          <p:nvPr/>
+        </p:nvSpPr>
+        <p:spPr>
+          <a:xfrm>
+            <a:off x="365760" y="1417320"/>
+            <a:ext cx="8412480" cy="548640"/>
+          </a:xfrm>
+          <a:prstGeom prst="roundRect">
+            <a:avLst>
+              <a:gd name="adj" fmla="val 10000"/>
+            </a:avLst>
+          </a:prstGeom>
+          <a:solidFill>
+            <a:srgbClr val="EEF6F4"/>
+          </a:solidFill>
+          <a:ln/>
+        </p:spPr>
+      </p:sp>
+      <p:sp>
+        <p:nvSpPr>
+          <p:cNvPr id="8" name="Shape 6"/>
+          <p:cNvSpPr/>
+          <p:nvPr/>
+        </p:nvSpPr>
+        <p:spPr>
+          <a:xfrm>
+            <a:off x="530352" y="1600200"/>
+            <a:ext cx="182880" cy="182880"/>
+          </a:xfrm>
+          <a:prstGeom prst="ellipse">
+            <a:avLst/>
+          </a:prstGeom>
+          <a:solidFill>
+            <a:srgbClr val="E76F51"/>
+          </a:solidFill>
+          <a:ln/>
+        </p:spPr>
+      </p:sp>
+      <p:sp>
+        <p:nvSpPr>
+          <p:cNvPr id="9" name="Text 7"/>
+          <p:cNvSpPr/>
+          <p:nvPr/>
+        </p:nvSpPr>
+        <p:spPr>
+          <a:xfrm>
+            <a:off x="914400" y="1417320"/>
+            <a:ext cx="7680960" cy="548640"/>
+          </a:xfrm>
+          <a:prstGeom prst="rect">
+            <a:avLst/>
+          </a:prstGeom>
+          <a:noFill/>
+          <a:ln/>
+        </p:spPr>
+        <p:txBody>
+          <a:bodyPr wrap="square" lIns="0" tIns="0" rIns="0" bIns="0" rtlCol="0" anchor="ctr"/>
+          <a:lstStyle/>
+          <a:p>
+            <a:pPr indent="0" marL="0">
+              <a:buNone/>
+            </a:pPr>
+            <a:r>
+              <a:rPr lang="en-US" sz="1400" dirty="0">
+                <a:solidFill>
+                  <a:srgbClr val="264653"/>
+                </a:solidFill>
+                <a:latin typeface="Arial" pitchFamily="34" charset="0"/>
+                <a:ea typeface="Arial" pitchFamily="34" charset="-122"/>
+                <a:cs typeface="Arial" pitchFamily="34" charset="-120"/>
+              </a:rPr>
+              <a:t>읽는 분 — 용접 현장 관리자</a:t>
+            </a:r>
+            <a:endParaRPr lang="en-US" sz="1400" dirty="0"/>
+          </a:p>
+        </p:txBody>
+      </p:sp>
+      <p:sp>
+        <p:nvSpPr>
+          <p:cNvPr id="10" name="Shape 8"/>
+          <p:cNvSpPr/>
+          <p:nvPr/>
+        </p:nvSpPr>
+        <p:spPr>
+          <a:xfrm>
+            <a:off x="365760" y="2057400"/>
+            <a:ext cx="8412480" cy="548640"/>
+          </a:xfrm>
+          <a:prstGeom prst="roundRect">
+            <a:avLst>
+              <a:gd name="adj" fmla="val 10000"/>
+            </a:avLst>
+          </a:prstGeom>
+          <a:solidFill>
+            <a:srgbClr val="FFFFFF"/>
+          </a:solidFill>
+          <a:ln/>
+        </p:spPr>
+      </p:sp>
+      <p:sp>
+        <p:nvSpPr>
+          <p:cNvPr id="11" name="Shape 9"/>
+          <p:cNvSpPr/>
+          <p:nvPr/>
+        </p:nvSpPr>
+        <p:spPr>
+          <a:xfrm>
+            <a:off x="530352" y="2240280"/>
+            <a:ext cx="182880" cy="182880"/>
+          </a:xfrm>
+          <a:prstGeom prst="ellipse">
+            <a:avLst/>
+          </a:prstGeom>
+          <a:solidFill>
+            <a:srgbClr val="E76F51"/>
+          </a:solidFill>
+          <a:ln/>
+        </p:spPr>
+      </p:sp>
+      <p:sp>
+        <p:nvSpPr>
+          <p:cNvPr id="12" name="Text 10"/>
+          <p:cNvSpPr/>
+          <p:nvPr/>
+        </p:nvSpPr>
+        <p:spPr>
+          <a:xfrm>
+            <a:off x="914400" y="2057400"/>
+            <a:ext cx="7680960" cy="548640"/>
+          </a:xfrm>
+          <a:prstGeom prst="rect">
+            <a:avLst/>
+          </a:prstGeom>
+          <a:noFill/>
+          <a:ln/>
+        </p:spPr>
+        <p:txBody>
+          <a:bodyPr wrap="square" lIns="0" tIns="0" rIns="0" bIns="0" rtlCol="0" anchor="ctr"/>
+          <a:lstStyle/>
+          <a:p>
+            <a:pPr indent="0" marL="0">
+              <a:buNone/>
+            </a:pPr>
+            <a:r>
+              <a:rPr lang="en-US" sz="1400" dirty="0">
+                <a:solidFill>
+                  <a:srgbClr val="264653"/>
+                </a:solidFill>
+                <a:latin typeface="Arial" pitchFamily="34" charset="0"/>
+                <a:ea typeface="Arial" pitchFamily="34" charset="-122"/>
+                <a:cs typeface="Arial" pitchFamily="34" charset="-120"/>
+              </a:rPr>
+              <a:t>하는 일 — 로그인 · 수집 모니터링 · 작업 등록 · 첨부 · 프로파일·품질</a:t>
+            </a:r>
+            <a:endParaRPr lang="en-US" sz="1400" dirty="0"/>
+          </a:p>
+        </p:txBody>
+      </p:sp>
+      <p:sp>
+        <p:nvSpPr>
+          <p:cNvPr id="13" name="Shape 11"/>
+          <p:cNvSpPr/>
+          <p:nvPr/>
+        </p:nvSpPr>
+        <p:spPr>
+          <a:xfrm>
+            <a:off x="365760" y="2697480"/>
+            <a:ext cx="8412480" cy="548640"/>
+          </a:xfrm>
+          <a:prstGeom prst="roundRect">
+            <a:avLst>
+              <a:gd name="adj" fmla="val 10000"/>
+            </a:avLst>
+          </a:prstGeom>
+          <a:solidFill>
+            <a:srgbClr val="EEF6F4"/>
+          </a:solidFill>
+          <a:ln/>
+        </p:spPr>
+      </p:sp>
+      <p:sp>
+        <p:nvSpPr>
+          <p:cNvPr id="14" name="Shape 12"/>
+          <p:cNvSpPr/>
+          <p:nvPr/>
+        </p:nvSpPr>
+        <p:spPr>
+          <a:xfrm>
+            <a:off x="530352" y="2880360"/>
+            <a:ext cx="182880" cy="182880"/>
+          </a:xfrm>
+          <a:prstGeom prst="ellipse">
+            <a:avLst/>
+          </a:prstGeom>
+          <a:solidFill>
+            <a:srgbClr val="E76F51"/>
+          </a:solidFill>
+          <a:ln/>
+        </p:spPr>
+      </p:sp>
+      <p:sp>
+        <p:nvSpPr>
+          <p:cNvPr id="15" name="Text 13"/>
+          <p:cNvSpPr/>
+          <p:nvPr/>
+        </p:nvSpPr>
+        <p:spPr>
+          <a:xfrm>
+            <a:off x="914400" y="2697480"/>
+            <a:ext cx="7680960" cy="548640"/>
+          </a:xfrm>
+          <a:prstGeom prst="rect">
+            <a:avLst/>
+          </a:prstGeom>
+          <a:noFill/>
+          <a:ln/>
+        </p:spPr>
+        <p:txBody>
+          <a:bodyPr wrap="square" lIns="0" tIns="0" rIns="0" bIns="0" rtlCol="0" anchor="ctr"/>
+          <a:lstStyle/>
+          <a:p>
+            <a:pPr indent="0" marL="0">
+              <a:buNone/>
+            </a:pPr>
+            <a:r>
+              <a:rPr lang="en-US" sz="1400" dirty="0">
+                <a:solidFill>
+                  <a:srgbClr val="264653"/>
+                </a:solidFill>
+                <a:latin typeface="Arial" pitchFamily="34" charset="0"/>
+                <a:ea typeface="Arial" pitchFamily="34" charset="-122"/>
+                <a:cs typeface="Arial" pitchFamily="34" charset="-120"/>
+              </a:rPr>
+              <a:t>순서 — 로그인 → 수집 모니터링 → 작업 관리 → 프로파일·품질</a:t>
+            </a:r>
+            <a:endParaRPr lang="en-US" sz="1400" dirty="0"/>
+          </a:p>
+        </p:txBody>
+      </p:sp>
+      <p:sp>
+        <p:nvSpPr>
+          <p:cNvPr id="16" name="Shape 14"/>
+          <p:cNvSpPr/>
+          <p:nvPr/>
+        </p:nvSpPr>
+        <p:spPr>
+          <a:xfrm>
+            <a:off x="365760" y="3337560"/>
+            <a:ext cx="8412480" cy="548640"/>
+          </a:xfrm>
+          <a:prstGeom prst="roundRect">
+            <a:avLst>
+              <a:gd name="adj" fmla="val 10000"/>
+            </a:avLst>
+          </a:prstGeom>
+          <a:solidFill>
+            <a:srgbClr val="FFFFFF"/>
+          </a:solidFill>
+          <a:ln/>
+        </p:spPr>
+      </p:sp>
+      <p:sp>
+        <p:nvSpPr>
+          <p:cNvPr id="17" name="Shape 15"/>
+          <p:cNvSpPr/>
+          <p:nvPr/>
+        </p:nvSpPr>
+        <p:spPr>
+          <a:xfrm>
+            <a:off x="530352" y="3520440"/>
+            <a:ext cx="182880" cy="182880"/>
+          </a:xfrm>
+          <a:prstGeom prst="ellipse">
+            <a:avLst/>
+          </a:prstGeom>
+          <a:solidFill>
+            <a:srgbClr val="E76F51"/>
+          </a:solidFill>
+          <a:ln/>
+        </p:spPr>
+      </p:sp>
+      <p:sp>
+        <p:nvSpPr>
+          <p:cNvPr id="18" name="Text 16"/>
+          <p:cNvSpPr/>
+          <p:nvPr/>
+        </p:nvSpPr>
+        <p:spPr>
+          <a:xfrm>
+            <a:off x="914400" y="3337560"/>
+            <a:ext cx="7680960" cy="548640"/>
+          </a:xfrm>
+          <a:prstGeom prst="rect">
+            <a:avLst/>
+          </a:prstGeom>
+          <a:noFill/>
+          <a:ln/>
+        </p:spPr>
+        <p:txBody>
+          <a:bodyPr wrap="square" lIns="0" tIns="0" rIns="0" bIns="0" rtlCol="0" anchor="ctr"/>
+          <a:lstStyle/>
+          <a:p>
+            <a:pPr indent="0" marL="0">
+              <a:buNone/>
+            </a:pPr>
+            <a:r>
+              <a:rPr lang="en-US" sz="1400" dirty="0">
+                <a:solidFill>
+                  <a:srgbClr val="264653"/>
+                </a:solidFill>
+                <a:latin typeface="Arial" pitchFamily="34" charset="0"/>
+                <a:ea typeface="Arial" pitchFamily="34" charset="-122"/>
+                <a:cs typeface="Arial" pitchFamily="34" charset="-120"/>
+              </a:rPr>
+              <a:t>계정 — ID user · 비밀번호 1234. 게스트(user)는 조회 일부 불가</a:t>
+            </a:r>
+            <a:endParaRPr lang="en-US" sz="1400" dirty="0"/>
+          </a:p>
+        </p:txBody>
+      </p:sp>
+      <p:sp>
+        <p:nvSpPr>
+          <p:cNvPr id="19" name="Shape 17"/>
+          <p:cNvSpPr/>
+          <p:nvPr/>
+        </p:nvSpPr>
+        <p:spPr>
+          <a:xfrm>
+            <a:off x="8503920" y="4663440"/>
+            <a:ext cx="365760" cy="365760"/>
+          </a:xfrm>
+          <a:prstGeom prst="ellipse">
+            <a:avLst/>
+          </a:prstGeom>
+          <a:solidFill>
+            <a:srgbClr val="E76F51"/>
+          </a:solidFill>
+          <a:ln/>
+        </p:spPr>
+      </p:sp>
+      <p:sp>
+        <p:nvSpPr>
+          <p:cNvPr id="20" name="Text 18"/>
           <p:cNvSpPr/>
           <p:nvPr/>
         </p:nvSpPr>
@@ -8154,7 +9255,7 @@
                 <a:ea typeface="Arial" pitchFamily="34" charset="-122"/>
                 <a:cs typeface="Arial" pitchFamily="34" charset="-120"/>
               </a:rPr>
-              <a:t>1. 전체 순서</a:t>
+              <a:t>목차</a:t>
             </a:r>
             <a:endParaRPr lang="en-US" sz="2200" dirty="0"/>
           </a:p>
@@ -8188,8 +9289,8 @@
         </p:nvSpPr>
         <p:spPr>
           <a:xfrm>
-            <a:off x="365760" y="731520"/>
-            <a:ext cx="8412480" cy="320040"/>
+            <a:off x="365760" y="713232"/>
+            <a:ext cx="320040" cy="257338"/>
           </a:xfrm>
           <a:prstGeom prst="rect">
             <a:avLst/>
@@ -8205,54 +9306,1085 @@
               <a:buNone/>
             </a:pPr>
             <a:r>
-              <a:rPr lang="en-US" sz="1300" dirty="0">
-                <a:solidFill>
-                  <a:srgbClr val="4A5560"/>
-                </a:solidFill>
-                <a:latin typeface="Arial" pitchFamily="34" charset="0"/>
-                <a:ea typeface="Arial" pitchFamily="34" charset="-122"/>
-                <a:cs typeface="Arial" pitchFamily="34" charset="-120"/>
-              </a:rPr>
-              <a:t>왼쪽 메뉴 [작업 관리]에서 시작해, 아래 순서로 진행합니다.</a:t>
-            </a:r>
-            <a:endParaRPr lang="en-US" sz="1300" dirty="0"/>
-          </a:p>
-        </p:txBody>
-      </p:sp>
-      <p:sp>
-        <p:nvSpPr>
-          <p:cNvPr id="5" name="Shape 3"/>
-          <p:cNvSpPr/>
-          <p:nvPr/>
-        </p:nvSpPr>
-        <p:spPr>
-          <a:xfrm>
-            <a:off x="365760" y="1234440"/>
-            <a:ext cx="2651760" cy="2331720"/>
-          </a:xfrm>
-          <a:prstGeom prst="roundRect">
-            <a:avLst>
-              <a:gd name="adj" fmla="val 3922"/>
-            </a:avLst>
-          </a:prstGeom>
-          <a:solidFill>
-            <a:srgbClr val="FFFFFF"/>
-          </a:solidFill>
-          <a:ln/>
-        </p:spPr>
-      </p:sp>
-      <p:sp>
-        <p:nvSpPr>
-          <p:cNvPr id="6" name="Shape 4"/>
-          <p:cNvSpPr/>
-          <p:nvPr/>
-        </p:nvSpPr>
-        <p:spPr>
-          <a:xfrm>
-            <a:off x="365760" y="1234440"/>
-            <a:ext cx="2651760" cy="91440"/>
-          </a:xfrm>
-          <a:prstGeom prst="rect">
+              <a:rPr lang="en-US" sz="1100" b="1" dirty="0">
+                <a:solidFill>
+                  <a:srgbClr val="2A9D8F"/>
+                </a:solidFill>
+                <a:latin typeface="Arial" pitchFamily="34" charset="0"/>
+                <a:ea typeface="Arial" pitchFamily="34" charset="-122"/>
+                <a:cs typeface="Arial" pitchFamily="34" charset="-120"/>
+              </a:rPr>
+              <a:t>1</a:t>
+            </a:r>
+            <a:endParaRPr lang="en-US" sz="1100" dirty="0"/>
+          </a:p>
+        </p:txBody>
+      </p:sp>
+      <p:sp>
+        <p:nvSpPr>
+          <p:cNvPr id="5" name="Text 3"/>
+          <p:cNvSpPr/>
+          <p:nvPr/>
+        </p:nvSpPr>
+        <p:spPr>
+          <a:xfrm>
+            <a:off x="731520" y="713232"/>
+            <a:ext cx="7863840" cy="257338"/>
+          </a:xfrm>
+          <a:prstGeom prst="rect">
+            <a:avLst/>
+          </a:prstGeom>
+          <a:noFill/>
+          <a:ln/>
+        </p:spPr>
+        <p:txBody>
+          <a:bodyPr wrap="square" lIns="0" tIns="0" rIns="0" bIns="0" rtlCol="0" anchor="ctr"/>
+          <a:lstStyle/>
+          <a:p>
+            <a:pPr indent="0" marL="0">
+              <a:buNone/>
+            </a:pPr>
+            <a:r>
+              <a:rPr lang="en-US" sz="1100" dirty="0">
+                <a:solidFill>
+                  <a:srgbClr val="264653"/>
+                </a:solidFill>
+                <a:latin typeface="Arial" pitchFamily="34" charset="0"/>
+                <a:ea typeface="Arial" pitchFamily="34" charset="-122"/>
+                <a:cs typeface="Arial" pitchFamily="34" charset="-120"/>
+              </a:rPr>
+              <a:t>로그인 — ID · 비밀번호 · 게스트(제한) 계정</a:t>
+            </a:r>
+            <a:endParaRPr lang="en-US" sz="1100" dirty="0"/>
+          </a:p>
+        </p:txBody>
+      </p:sp>
+      <p:sp>
+        <p:nvSpPr>
+          <p:cNvPr id="6" name="Text 4"/>
+          <p:cNvSpPr/>
+          <p:nvPr/>
+        </p:nvSpPr>
+        <p:spPr>
+          <a:xfrm>
+            <a:off x="365760" y="988858"/>
+            <a:ext cx="320040" cy="257338"/>
+          </a:xfrm>
+          <a:prstGeom prst="rect">
+            <a:avLst/>
+          </a:prstGeom>
+          <a:noFill/>
+          <a:ln/>
+        </p:spPr>
+        <p:txBody>
+          <a:bodyPr wrap="square" lIns="0" tIns="0" rIns="0" bIns="0" rtlCol="0" anchor="ctr"/>
+          <a:lstStyle/>
+          <a:p>
+            <a:pPr indent="0" marL="0">
+              <a:buNone/>
+            </a:pPr>
+            <a:r>
+              <a:rPr lang="en-US" sz="1100" b="1" dirty="0">
+                <a:solidFill>
+                  <a:srgbClr val="2A9D8F"/>
+                </a:solidFill>
+                <a:latin typeface="Arial" pitchFamily="34" charset="0"/>
+                <a:ea typeface="Arial" pitchFamily="34" charset="-122"/>
+                <a:cs typeface="Arial" pitchFamily="34" charset="-120"/>
+              </a:rPr>
+              <a:t>2</a:t>
+            </a:r>
+            <a:endParaRPr lang="en-US" sz="1100" dirty="0"/>
+          </a:p>
+        </p:txBody>
+      </p:sp>
+      <p:sp>
+        <p:nvSpPr>
+          <p:cNvPr id="7" name="Text 5"/>
+          <p:cNvSpPr/>
+          <p:nvPr/>
+        </p:nvSpPr>
+        <p:spPr>
+          <a:xfrm>
+            <a:off x="731520" y="988858"/>
+            <a:ext cx="7863840" cy="257338"/>
+          </a:xfrm>
+          <a:prstGeom prst="rect">
+            <a:avLst/>
+          </a:prstGeom>
+          <a:noFill/>
+          <a:ln/>
+        </p:spPr>
+        <p:txBody>
+          <a:bodyPr wrap="square" lIns="0" tIns="0" rIns="0" bIns="0" rtlCol="0" anchor="ctr"/>
+          <a:lstStyle/>
+          <a:p>
+            <a:pPr indent="0" marL="0">
+              <a:buNone/>
+            </a:pPr>
+            <a:r>
+              <a:rPr lang="en-US" sz="1100" dirty="0">
+                <a:solidFill>
+                  <a:srgbClr val="264653"/>
+                </a:solidFill>
+                <a:latin typeface="Arial" pitchFamily="34" charset="0"/>
+                <a:ea typeface="Arial" pitchFamily="34" charset="-122"/>
+                <a:cs typeface="Arial" pitchFamily="34" charset="-120"/>
+              </a:rPr>
+              <a:t>수집 모니터링 — 조회·검색 · 일자별 수집 타임라인</a:t>
+            </a:r>
+            <a:endParaRPr lang="en-US" sz="1100" dirty="0"/>
+          </a:p>
+        </p:txBody>
+      </p:sp>
+      <p:sp>
+        <p:nvSpPr>
+          <p:cNvPr id="8" name="Text 6"/>
+          <p:cNvSpPr/>
+          <p:nvPr/>
+        </p:nvSpPr>
+        <p:spPr>
+          <a:xfrm>
+            <a:off x="365760" y="1264485"/>
+            <a:ext cx="320040" cy="257338"/>
+          </a:xfrm>
+          <a:prstGeom prst="rect">
+            <a:avLst/>
+          </a:prstGeom>
+          <a:noFill/>
+          <a:ln/>
+        </p:spPr>
+        <p:txBody>
+          <a:bodyPr wrap="square" lIns="0" tIns="0" rIns="0" bIns="0" rtlCol="0" anchor="ctr"/>
+          <a:lstStyle/>
+          <a:p>
+            <a:pPr indent="0" marL="0">
+              <a:buNone/>
+            </a:pPr>
+            <a:r>
+              <a:rPr lang="en-US" sz="1100" b="1" dirty="0">
+                <a:solidFill>
+                  <a:srgbClr val="2A9D8F"/>
+                </a:solidFill>
+                <a:latin typeface="Arial" pitchFamily="34" charset="0"/>
+                <a:ea typeface="Arial" pitchFamily="34" charset="-122"/>
+                <a:cs typeface="Arial" pitchFamily="34" charset="-120"/>
+              </a:rPr>
+              <a:t>3</a:t>
+            </a:r>
+            <a:endParaRPr lang="en-US" sz="1100" dirty="0"/>
+          </a:p>
+        </p:txBody>
+      </p:sp>
+      <p:sp>
+        <p:nvSpPr>
+          <p:cNvPr id="9" name="Text 7"/>
+          <p:cNvSpPr/>
+          <p:nvPr/>
+        </p:nvSpPr>
+        <p:spPr>
+          <a:xfrm>
+            <a:off x="731520" y="1264485"/>
+            <a:ext cx="7863840" cy="257338"/>
+          </a:xfrm>
+          <a:prstGeom prst="rect">
+            <a:avLst/>
+          </a:prstGeom>
+          <a:noFill/>
+          <a:ln/>
+        </p:spPr>
+        <p:txBody>
+          <a:bodyPr wrap="square" lIns="0" tIns="0" rIns="0" bIns="0" rtlCol="0" anchor="ctr"/>
+          <a:lstStyle/>
+          <a:p>
+            <a:pPr indent="0" marL="0">
+              <a:buNone/>
+            </a:pPr>
+            <a:r>
+              <a:rPr lang="en-US" sz="1100" dirty="0">
+                <a:solidFill>
+                  <a:srgbClr val="264653"/>
+                </a:solidFill>
+                <a:latin typeface="Arial" pitchFamily="34" charset="0"/>
+                <a:ea typeface="Arial" pitchFamily="34" charset="-122"/>
+                <a:cs typeface="Arial" pitchFamily="34" charset="-120"/>
+              </a:rPr>
+              <a:t>작업 관리 화면 — 조회 · 새 작업 · 상세 · 프로파일 · 품질 버튼</a:t>
+            </a:r>
+            <a:endParaRPr lang="en-US" sz="1100" dirty="0"/>
+          </a:p>
+        </p:txBody>
+      </p:sp>
+      <p:sp>
+        <p:nvSpPr>
+          <p:cNvPr id="10" name="Text 8"/>
+          <p:cNvSpPr/>
+          <p:nvPr/>
+        </p:nvSpPr>
+        <p:spPr>
+          <a:xfrm>
+            <a:off x="365760" y="1540111"/>
+            <a:ext cx="320040" cy="257338"/>
+          </a:xfrm>
+          <a:prstGeom prst="rect">
+            <a:avLst/>
+          </a:prstGeom>
+          <a:noFill/>
+          <a:ln/>
+        </p:spPr>
+        <p:txBody>
+          <a:bodyPr wrap="square" lIns="0" tIns="0" rIns="0" bIns="0" rtlCol="0" anchor="ctr"/>
+          <a:lstStyle/>
+          <a:p>
+            <a:pPr indent="0" marL="0">
+              <a:buNone/>
+            </a:pPr>
+            <a:r>
+              <a:rPr lang="en-US" sz="1100" b="1" dirty="0">
+                <a:solidFill>
+                  <a:srgbClr val="2A9D8F"/>
+                </a:solidFill>
+                <a:latin typeface="Arial" pitchFamily="34" charset="0"/>
+                <a:ea typeface="Arial" pitchFamily="34" charset="-122"/>
+                <a:cs typeface="Arial" pitchFamily="34" charset="-120"/>
+              </a:rPr>
+              <a:t>4</a:t>
+            </a:r>
+            <a:endParaRPr lang="en-US" sz="1100" dirty="0"/>
+          </a:p>
+        </p:txBody>
+      </p:sp>
+      <p:sp>
+        <p:nvSpPr>
+          <p:cNvPr id="11" name="Text 9"/>
+          <p:cNvSpPr/>
+          <p:nvPr/>
+        </p:nvSpPr>
+        <p:spPr>
+          <a:xfrm>
+            <a:off x="731520" y="1540111"/>
+            <a:ext cx="7863840" cy="257338"/>
+          </a:xfrm>
+          <a:prstGeom prst="rect">
+            <a:avLst/>
+          </a:prstGeom>
+          <a:noFill/>
+          <a:ln/>
+        </p:spPr>
+        <p:txBody>
+          <a:bodyPr wrap="square" lIns="0" tIns="0" rIns="0" bIns="0" rtlCol="0" anchor="ctr"/>
+          <a:lstStyle/>
+          <a:p>
+            <a:pPr indent="0" marL="0">
+              <a:buNone/>
+            </a:pPr>
+            <a:r>
+              <a:rPr lang="en-US" sz="1100" dirty="0">
+                <a:solidFill>
+                  <a:srgbClr val="264653"/>
+                </a:solidFill>
+                <a:latin typeface="Arial" pitchFamily="34" charset="0"/>
+                <a:ea typeface="Arial" pitchFamily="34" charset="-122"/>
+                <a:cs typeface="Arial" pitchFamily="34" charset="-120"/>
+              </a:rPr>
+              <a:t>새 작업 만들기 — 공사 · 호기 · 품목 · 이음부 · 첫 패스 · 만들기</a:t>
+            </a:r>
+            <a:endParaRPr lang="en-US" sz="1100" dirty="0"/>
+          </a:p>
+        </p:txBody>
+      </p:sp>
+      <p:sp>
+        <p:nvSpPr>
+          <p:cNvPr id="12" name="Text 10"/>
+          <p:cNvSpPr/>
+          <p:nvPr/>
+        </p:nvSpPr>
+        <p:spPr>
+          <a:xfrm>
+            <a:off x="365760" y="1815737"/>
+            <a:ext cx="320040" cy="257338"/>
+          </a:xfrm>
+          <a:prstGeom prst="rect">
+            <a:avLst/>
+          </a:prstGeom>
+          <a:noFill/>
+          <a:ln/>
+        </p:spPr>
+        <p:txBody>
+          <a:bodyPr wrap="square" lIns="0" tIns="0" rIns="0" bIns="0" rtlCol="0" anchor="ctr"/>
+          <a:lstStyle/>
+          <a:p>
+            <a:pPr indent="0" marL="0">
+              <a:buNone/>
+            </a:pPr>
+            <a:r>
+              <a:rPr lang="en-US" sz="1100" b="1" dirty="0">
+                <a:solidFill>
+                  <a:srgbClr val="2A9D8F"/>
+                </a:solidFill>
+                <a:latin typeface="Arial" pitchFamily="34" charset="0"/>
+                <a:ea typeface="Arial" pitchFamily="34" charset="-122"/>
+                <a:cs typeface="Arial" pitchFamily="34" charset="-120"/>
+              </a:rPr>
+              <a:t>5</a:t>
+            </a:r>
+            <a:endParaRPr lang="en-US" sz="1100" dirty="0"/>
+          </a:p>
+        </p:txBody>
+      </p:sp>
+      <p:sp>
+        <p:nvSpPr>
+          <p:cNvPr id="13" name="Text 11"/>
+          <p:cNvSpPr/>
+          <p:nvPr/>
+        </p:nvSpPr>
+        <p:spPr>
+          <a:xfrm>
+            <a:off x="731520" y="1815737"/>
+            <a:ext cx="7863840" cy="257338"/>
+          </a:xfrm>
+          <a:prstGeom prst="rect">
+            <a:avLst/>
+          </a:prstGeom>
+          <a:noFill/>
+          <a:ln/>
+        </p:spPr>
+        <p:txBody>
+          <a:bodyPr wrap="square" lIns="0" tIns="0" rIns="0" bIns="0" rtlCol="0" anchor="ctr"/>
+          <a:lstStyle/>
+          <a:p>
+            <a:pPr indent="0" marL="0">
+              <a:buNone/>
+            </a:pPr>
+            <a:r>
+              <a:rPr lang="en-US" sz="1100" dirty="0">
+                <a:solidFill>
+                  <a:srgbClr val="264653"/>
+                </a:solidFill>
+                <a:latin typeface="Arial" pitchFamily="34" charset="0"/>
+                <a:ea typeface="Arial" pitchFamily="34" charset="-122"/>
+                <a:cs typeface="Arial" pitchFamily="34" charset="-120"/>
+              </a:rPr>
+              <a:t>목록에서 상세 · 프로파일 · 품질 열기 — 행마다 바로가기</a:t>
+            </a:r>
+            <a:endParaRPr lang="en-US" sz="1100" dirty="0"/>
+          </a:p>
+        </p:txBody>
+      </p:sp>
+      <p:sp>
+        <p:nvSpPr>
+          <p:cNvPr id="14" name="Text 12"/>
+          <p:cNvSpPr/>
+          <p:nvPr/>
+        </p:nvSpPr>
+        <p:spPr>
+          <a:xfrm>
+            <a:off x="365760" y="2091363"/>
+            <a:ext cx="320040" cy="257338"/>
+          </a:xfrm>
+          <a:prstGeom prst="rect">
+            <a:avLst/>
+          </a:prstGeom>
+          <a:noFill/>
+          <a:ln/>
+        </p:spPr>
+        <p:txBody>
+          <a:bodyPr wrap="square" lIns="0" tIns="0" rIns="0" bIns="0" rtlCol="0" anchor="ctr"/>
+          <a:lstStyle/>
+          <a:p>
+            <a:pPr indent="0" marL="0">
+              <a:buNone/>
+            </a:pPr>
+            <a:r>
+              <a:rPr lang="en-US" sz="1100" b="1" dirty="0">
+                <a:solidFill>
+                  <a:srgbClr val="2A9D8F"/>
+                </a:solidFill>
+                <a:latin typeface="Arial" pitchFamily="34" charset="0"/>
+                <a:ea typeface="Arial" pitchFamily="34" charset="-122"/>
+                <a:cs typeface="Arial" pitchFamily="34" charset="-120"/>
+              </a:rPr>
+              <a:t>6</a:t>
+            </a:r>
+            <a:endParaRPr lang="en-US" sz="1100" dirty="0"/>
+          </a:p>
+        </p:txBody>
+      </p:sp>
+      <p:sp>
+        <p:nvSpPr>
+          <p:cNvPr id="15" name="Text 13"/>
+          <p:cNvSpPr/>
+          <p:nvPr/>
+        </p:nvSpPr>
+        <p:spPr>
+          <a:xfrm>
+            <a:off x="731520" y="2091363"/>
+            <a:ext cx="7863840" cy="257338"/>
+          </a:xfrm>
+          <a:prstGeom prst="rect">
+            <a:avLst/>
+          </a:prstGeom>
+          <a:noFill/>
+          <a:ln/>
+        </p:spPr>
+        <p:txBody>
+          <a:bodyPr wrap="square" lIns="0" tIns="0" rIns="0" bIns="0" rtlCol="0" anchor="ctr"/>
+          <a:lstStyle/>
+          <a:p>
+            <a:pPr indent="0" marL="0">
+              <a:buNone/>
+            </a:pPr>
+            <a:r>
+              <a:rPr lang="en-US" sz="1100" dirty="0">
+                <a:solidFill>
+                  <a:srgbClr val="264653"/>
+                </a:solidFill>
+                <a:latin typeface="Arial" pitchFamily="34" charset="0"/>
+                <a:ea typeface="Arial" pitchFamily="34" charset="-122"/>
+                <a:cs typeface="Arial" pitchFamily="34" charset="-120"/>
+              </a:rPr>
+              <a:t>작업 상세 — 기본 정보 — 공사 · 품목 · 이음부 · 작업자 · 시간 · 규격 · 저장 · 지우기</a:t>
+            </a:r>
+            <a:endParaRPr lang="en-US" sz="1100" dirty="0"/>
+          </a:p>
+        </p:txBody>
+      </p:sp>
+      <p:sp>
+        <p:nvSpPr>
+          <p:cNvPr id="16" name="Text 14"/>
+          <p:cNvSpPr/>
+          <p:nvPr/>
+        </p:nvSpPr>
+        <p:spPr>
+          <a:xfrm>
+            <a:off x="365760" y="2366990"/>
+            <a:ext cx="320040" cy="257338"/>
+          </a:xfrm>
+          <a:prstGeom prst="rect">
+            <a:avLst/>
+          </a:prstGeom>
+          <a:noFill/>
+          <a:ln/>
+        </p:spPr>
+        <p:txBody>
+          <a:bodyPr wrap="square" lIns="0" tIns="0" rIns="0" bIns="0" rtlCol="0" anchor="ctr"/>
+          <a:lstStyle/>
+          <a:p>
+            <a:pPr indent="0" marL="0">
+              <a:buNone/>
+            </a:pPr>
+            <a:r>
+              <a:rPr lang="en-US" sz="1100" b="1" dirty="0">
+                <a:solidFill>
+                  <a:srgbClr val="2A9D8F"/>
+                </a:solidFill>
+                <a:latin typeface="Arial" pitchFamily="34" charset="0"/>
+                <a:ea typeface="Arial" pitchFamily="34" charset="-122"/>
+                <a:cs typeface="Arial" pitchFamily="34" charset="-120"/>
+              </a:rPr>
+              <a:t>7</a:t>
+            </a:r>
+            <a:endParaRPr lang="en-US" sz="1100" dirty="0"/>
+          </a:p>
+        </p:txBody>
+      </p:sp>
+      <p:sp>
+        <p:nvSpPr>
+          <p:cNvPr id="17" name="Text 15"/>
+          <p:cNvSpPr/>
+          <p:nvPr/>
+        </p:nvSpPr>
+        <p:spPr>
+          <a:xfrm>
+            <a:off x="731520" y="2366990"/>
+            <a:ext cx="7863840" cy="257338"/>
+          </a:xfrm>
+          <a:prstGeom prst="rect">
+            <a:avLst/>
+          </a:prstGeom>
+          <a:noFill/>
+          <a:ln/>
+        </p:spPr>
+        <p:txBody>
+          <a:bodyPr wrap="square" lIns="0" tIns="0" rIns="0" bIns="0" rtlCol="0" anchor="ctr"/>
+          <a:lstStyle/>
+          <a:p>
+            <a:pPr indent="0" marL="0">
+              <a:buNone/>
+            </a:pPr>
+            <a:r>
+              <a:rPr lang="en-US" sz="1100" dirty="0">
+                <a:solidFill>
+                  <a:srgbClr val="264653"/>
+                </a:solidFill>
+                <a:latin typeface="Arial" pitchFamily="34" charset="0"/>
+                <a:ea typeface="Arial" pitchFamily="34" charset="-122"/>
+                <a:cs typeface="Arial" pitchFamily="34" charset="-120"/>
+              </a:rPr>
+              <a:t>작업 상세 — 패스 — 패스 목록 확인 · 패스 추가 진입</a:t>
+            </a:r>
+            <a:endParaRPr lang="en-US" sz="1100" dirty="0"/>
+          </a:p>
+        </p:txBody>
+      </p:sp>
+      <p:sp>
+        <p:nvSpPr>
+          <p:cNvPr id="18" name="Text 16"/>
+          <p:cNvSpPr/>
+          <p:nvPr/>
+        </p:nvSpPr>
+        <p:spPr>
+          <a:xfrm>
+            <a:off x="365760" y="2642616"/>
+            <a:ext cx="320040" cy="257338"/>
+          </a:xfrm>
+          <a:prstGeom prst="rect">
+            <a:avLst/>
+          </a:prstGeom>
+          <a:noFill/>
+          <a:ln/>
+        </p:spPr>
+        <p:txBody>
+          <a:bodyPr wrap="square" lIns="0" tIns="0" rIns="0" bIns="0" rtlCol="0" anchor="ctr"/>
+          <a:lstStyle/>
+          <a:p>
+            <a:pPr indent="0" marL="0">
+              <a:buNone/>
+            </a:pPr>
+            <a:r>
+              <a:rPr lang="en-US" sz="1100" b="1" dirty="0">
+                <a:solidFill>
+                  <a:srgbClr val="2A9D8F"/>
+                </a:solidFill>
+                <a:latin typeface="Arial" pitchFamily="34" charset="0"/>
+                <a:ea typeface="Arial" pitchFamily="34" charset="-122"/>
+                <a:cs typeface="Arial" pitchFamily="34" charset="-120"/>
+              </a:rPr>
+              <a:t>8</a:t>
+            </a:r>
+            <a:endParaRPr lang="en-US" sz="1100" dirty="0"/>
+          </a:p>
+        </p:txBody>
+      </p:sp>
+      <p:sp>
+        <p:nvSpPr>
+          <p:cNvPr id="19" name="Text 17"/>
+          <p:cNvSpPr/>
+          <p:nvPr/>
+        </p:nvSpPr>
+        <p:spPr>
+          <a:xfrm>
+            <a:off x="731520" y="2642616"/>
+            <a:ext cx="7863840" cy="257338"/>
+          </a:xfrm>
+          <a:prstGeom prst="rect">
+            <a:avLst/>
+          </a:prstGeom>
+          <a:noFill/>
+          <a:ln/>
+        </p:spPr>
+        <p:txBody>
+          <a:bodyPr wrap="square" lIns="0" tIns="0" rIns="0" bIns="0" rtlCol="0" anchor="ctr"/>
+          <a:lstStyle/>
+          <a:p>
+            <a:pPr indent="0" marL="0">
+              <a:buNone/>
+            </a:pPr>
+            <a:r>
+              <a:rPr lang="en-US" sz="1100" dirty="0">
+                <a:solidFill>
+                  <a:srgbClr val="264653"/>
+                </a:solidFill>
+                <a:latin typeface="Arial" pitchFamily="34" charset="0"/>
+                <a:ea typeface="Arial" pitchFamily="34" charset="-122"/>
+                <a:cs typeface="Arial" pitchFamily="34" charset="-120"/>
+              </a:rPr>
+              <a:t>작업 상세 — 패스 추가 창 — 패스 번호 · 종류 · 시작 · 끝 · 추가</a:t>
+            </a:r>
+            <a:endParaRPr lang="en-US" sz="1100" dirty="0"/>
+          </a:p>
+        </p:txBody>
+      </p:sp>
+      <p:sp>
+        <p:nvSpPr>
+          <p:cNvPr id="20" name="Text 18"/>
+          <p:cNvSpPr/>
+          <p:nvPr/>
+        </p:nvSpPr>
+        <p:spPr>
+          <a:xfrm>
+            <a:off x="365760" y="2918242"/>
+            <a:ext cx="320040" cy="257338"/>
+          </a:xfrm>
+          <a:prstGeom prst="rect">
+            <a:avLst/>
+          </a:prstGeom>
+          <a:noFill/>
+          <a:ln/>
+        </p:spPr>
+        <p:txBody>
+          <a:bodyPr wrap="square" lIns="0" tIns="0" rIns="0" bIns="0" rtlCol="0" anchor="ctr"/>
+          <a:lstStyle/>
+          <a:p>
+            <a:pPr indent="0" marL="0">
+              <a:buNone/>
+            </a:pPr>
+            <a:r>
+              <a:rPr lang="en-US" sz="1100" b="1" dirty="0">
+                <a:solidFill>
+                  <a:srgbClr val="2A9D8F"/>
+                </a:solidFill>
+                <a:latin typeface="Arial" pitchFamily="34" charset="0"/>
+                <a:ea typeface="Arial" pitchFamily="34" charset="-122"/>
+                <a:cs typeface="Arial" pitchFamily="34" charset="-120"/>
+              </a:rPr>
+              <a:t>9</a:t>
+            </a:r>
+            <a:endParaRPr lang="en-US" sz="1100" dirty="0"/>
+          </a:p>
+        </p:txBody>
+      </p:sp>
+      <p:sp>
+        <p:nvSpPr>
+          <p:cNvPr id="21" name="Text 19"/>
+          <p:cNvSpPr/>
+          <p:nvPr/>
+        </p:nvSpPr>
+        <p:spPr>
+          <a:xfrm>
+            <a:off x="731520" y="2918242"/>
+            <a:ext cx="7863840" cy="257338"/>
+          </a:xfrm>
+          <a:prstGeom prst="rect">
+            <a:avLst/>
+          </a:prstGeom>
+          <a:noFill/>
+          <a:ln/>
+        </p:spPr>
+        <p:txBody>
+          <a:bodyPr wrap="square" lIns="0" tIns="0" rIns="0" bIns="0" rtlCol="0" anchor="ctr"/>
+          <a:lstStyle/>
+          <a:p>
+            <a:pPr indent="0" marL="0">
+              <a:buNone/>
+            </a:pPr>
+            <a:r>
+              <a:rPr lang="en-US" sz="1100" dirty="0">
+                <a:solidFill>
+                  <a:srgbClr val="264653"/>
+                </a:solidFill>
+                <a:latin typeface="Arial" pitchFamily="34" charset="0"/>
+                <a:ea typeface="Arial" pitchFamily="34" charset="-122"/>
+                <a:cs typeface="Arial" pitchFamily="34" charset="-120"/>
+              </a:rPr>
+              <a:t>작업 상세 — 첨부 — 에셋 올리기 · 에셋 붙이기 · 패스 지정</a:t>
+            </a:r>
+            <a:endParaRPr lang="en-US" sz="1100" dirty="0"/>
+          </a:p>
+        </p:txBody>
+      </p:sp>
+      <p:sp>
+        <p:nvSpPr>
+          <p:cNvPr id="22" name="Text 20"/>
+          <p:cNvSpPr/>
+          <p:nvPr/>
+        </p:nvSpPr>
+        <p:spPr>
+          <a:xfrm>
+            <a:off x="365760" y="3193869"/>
+            <a:ext cx="320040" cy="257338"/>
+          </a:xfrm>
+          <a:prstGeom prst="rect">
+            <a:avLst/>
+          </a:prstGeom>
+          <a:noFill/>
+          <a:ln/>
+        </p:spPr>
+        <p:txBody>
+          <a:bodyPr wrap="square" lIns="0" tIns="0" rIns="0" bIns="0" rtlCol="0" anchor="ctr"/>
+          <a:lstStyle/>
+          <a:p>
+            <a:pPr indent="0" marL="0">
+              <a:buNone/>
+            </a:pPr>
+            <a:r>
+              <a:rPr lang="en-US" sz="1100" b="1" dirty="0">
+                <a:solidFill>
+                  <a:srgbClr val="2A9D8F"/>
+                </a:solidFill>
+                <a:latin typeface="Arial" pitchFamily="34" charset="0"/>
+                <a:ea typeface="Arial" pitchFamily="34" charset="-122"/>
+                <a:cs typeface="Arial" pitchFamily="34" charset="-120"/>
+              </a:rPr>
+              <a:t>10</a:t>
+            </a:r>
+            <a:endParaRPr lang="en-US" sz="1100" dirty="0"/>
+          </a:p>
+        </p:txBody>
+      </p:sp>
+      <p:sp>
+        <p:nvSpPr>
+          <p:cNvPr id="23" name="Text 21"/>
+          <p:cNvSpPr/>
+          <p:nvPr/>
+        </p:nvSpPr>
+        <p:spPr>
+          <a:xfrm>
+            <a:off x="731520" y="3193869"/>
+            <a:ext cx="7863840" cy="257338"/>
+          </a:xfrm>
+          <a:prstGeom prst="rect">
+            <a:avLst/>
+          </a:prstGeom>
+          <a:noFill/>
+          <a:ln/>
+        </p:spPr>
+        <p:txBody>
+          <a:bodyPr wrap="square" lIns="0" tIns="0" rIns="0" bIns="0" rtlCol="0" anchor="ctr"/>
+          <a:lstStyle/>
+          <a:p>
+            <a:pPr indent="0" marL="0">
+              <a:buNone/>
+            </a:pPr>
+            <a:r>
+              <a:rPr lang="en-US" sz="1100" dirty="0">
+                <a:solidFill>
+                  <a:srgbClr val="264653"/>
+                </a:solidFill>
+                <a:latin typeface="Arial" pitchFamily="34" charset="0"/>
+                <a:ea typeface="Arial" pitchFamily="34" charset="-122"/>
+                <a:cs typeface="Arial" pitchFamily="34" charset="-120"/>
+              </a:rPr>
+              <a:t>첨부 — 에셋 올리기 창 — 다건 대기열 · 주제 · 상황 · 작업 · 패스 · 장비 · 시간 0 · 올리기</a:t>
+            </a:r>
+            <a:endParaRPr lang="en-US" sz="1100" dirty="0"/>
+          </a:p>
+        </p:txBody>
+      </p:sp>
+      <p:sp>
+        <p:nvSpPr>
+          <p:cNvPr id="24" name="Text 22"/>
+          <p:cNvSpPr/>
+          <p:nvPr/>
+        </p:nvSpPr>
+        <p:spPr>
+          <a:xfrm>
+            <a:off x="365760" y="3469495"/>
+            <a:ext cx="320040" cy="257338"/>
+          </a:xfrm>
+          <a:prstGeom prst="rect">
+            <a:avLst/>
+          </a:prstGeom>
+          <a:noFill/>
+          <a:ln/>
+        </p:spPr>
+        <p:txBody>
+          <a:bodyPr wrap="square" lIns="0" tIns="0" rIns="0" bIns="0" rtlCol="0" anchor="ctr"/>
+          <a:lstStyle/>
+          <a:p>
+            <a:pPr indent="0" marL="0">
+              <a:buNone/>
+            </a:pPr>
+            <a:r>
+              <a:rPr lang="en-US" sz="1100" b="1" dirty="0">
+                <a:solidFill>
+                  <a:srgbClr val="2A9D8F"/>
+                </a:solidFill>
+                <a:latin typeface="Arial" pitchFamily="34" charset="0"/>
+                <a:ea typeface="Arial" pitchFamily="34" charset="-122"/>
+                <a:cs typeface="Arial" pitchFamily="34" charset="-120"/>
+              </a:rPr>
+              <a:t>11</a:t>
+            </a:r>
+            <a:endParaRPr lang="en-US" sz="1100" dirty="0"/>
+          </a:p>
+        </p:txBody>
+      </p:sp>
+      <p:sp>
+        <p:nvSpPr>
+          <p:cNvPr id="25" name="Text 23"/>
+          <p:cNvSpPr/>
+          <p:nvPr/>
+        </p:nvSpPr>
+        <p:spPr>
+          <a:xfrm>
+            <a:off x="731520" y="3469495"/>
+            <a:ext cx="7863840" cy="257338"/>
+          </a:xfrm>
+          <a:prstGeom prst="rect">
+            <a:avLst/>
+          </a:prstGeom>
+          <a:noFill/>
+          <a:ln/>
+        </p:spPr>
+        <p:txBody>
+          <a:bodyPr wrap="square" lIns="0" tIns="0" rIns="0" bIns="0" rtlCol="0" anchor="ctr"/>
+          <a:lstStyle/>
+          <a:p>
+            <a:pPr indent="0" marL="0">
+              <a:buNone/>
+            </a:pPr>
+            <a:r>
+              <a:rPr lang="en-US" sz="1100" dirty="0">
+                <a:solidFill>
+                  <a:srgbClr val="264653"/>
+                </a:solidFill>
+                <a:latin typeface="Arial" pitchFamily="34" charset="0"/>
+                <a:ea typeface="Arial" pitchFamily="34" charset="-122"/>
+                <a:cs typeface="Arial" pitchFamily="34" charset="-120"/>
+              </a:rPr>
+              <a:t>파일 종류 — 시간 자료 — 영상 · 음성 · 센서 · 파일별 시간 0 · 빠른 채우기 · 상태</a:t>
+            </a:r>
+            <a:endParaRPr lang="en-US" sz="1100" dirty="0"/>
+          </a:p>
+        </p:txBody>
+      </p:sp>
+      <p:sp>
+        <p:nvSpPr>
+          <p:cNvPr id="26" name="Text 24"/>
+          <p:cNvSpPr/>
+          <p:nvPr/>
+        </p:nvSpPr>
+        <p:spPr>
+          <a:xfrm>
+            <a:off x="365760" y="3745121"/>
+            <a:ext cx="320040" cy="257338"/>
+          </a:xfrm>
+          <a:prstGeom prst="rect">
+            <a:avLst/>
+          </a:prstGeom>
+          <a:noFill/>
+          <a:ln/>
+        </p:spPr>
+        <p:txBody>
+          <a:bodyPr wrap="square" lIns="0" tIns="0" rIns="0" bIns="0" rtlCol="0" anchor="ctr"/>
+          <a:lstStyle/>
+          <a:p>
+            <a:pPr indent="0" marL="0">
+              <a:buNone/>
+            </a:pPr>
+            <a:r>
+              <a:rPr lang="en-US" sz="1100" b="1" dirty="0">
+                <a:solidFill>
+                  <a:srgbClr val="2A9D8F"/>
+                </a:solidFill>
+                <a:latin typeface="Arial" pitchFamily="34" charset="0"/>
+                <a:ea typeface="Arial" pitchFamily="34" charset="-122"/>
+                <a:cs typeface="Arial" pitchFamily="34" charset="-120"/>
+              </a:rPr>
+              <a:t>12</a:t>
+            </a:r>
+            <a:endParaRPr lang="en-US" sz="1100" dirty="0"/>
+          </a:p>
+        </p:txBody>
+      </p:sp>
+      <p:sp>
+        <p:nvSpPr>
+          <p:cNvPr id="27" name="Text 25"/>
+          <p:cNvSpPr/>
+          <p:nvPr/>
+        </p:nvSpPr>
+        <p:spPr>
+          <a:xfrm>
+            <a:off x="731520" y="3745121"/>
+            <a:ext cx="7863840" cy="257338"/>
+          </a:xfrm>
+          <a:prstGeom prst="rect">
+            <a:avLst/>
+          </a:prstGeom>
+          <a:noFill/>
+          <a:ln/>
+        </p:spPr>
+        <p:txBody>
+          <a:bodyPr wrap="square" lIns="0" tIns="0" rIns="0" bIns="0" rtlCol="0" anchor="ctr"/>
+          <a:lstStyle/>
+          <a:p>
+            <a:pPr indent="0" marL="0">
+              <a:buNone/>
+            </a:pPr>
+            <a:r>
+              <a:rPr lang="en-US" sz="1100" dirty="0">
+                <a:solidFill>
+                  <a:srgbClr val="264653"/>
+                </a:solidFill>
+                <a:latin typeface="Arial" pitchFamily="34" charset="0"/>
+                <a:ea typeface="Arial" pitchFamily="34" charset="-122"/>
+                <a:cs typeface="Arial" pitchFamily="34" charset="-120"/>
+              </a:rPr>
+              <a:t>파일 종류 — 문서 · 이미지 — pdf · jpg · png · 시간 0 선택 · 상태</a:t>
+            </a:r>
+            <a:endParaRPr lang="en-US" sz="1100" dirty="0"/>
+          </a:p>
+        </p:txBody>
+      </p:sp>
+      <p:sp>
+        <p:nvSpPr>
+          <p:cNvPr id="28" name="Text 26"/>
+          <p:cNvSpPr/>
+          <p:nvPr/>
+        </p:nvSpPr>
+        <p:spPr>
+          <a:xfrm>
+            <a:off x="365760" y="4020747"/>
+            <a:ext cx="320040" cy="257338"/>
+          </a:xfrm>
+          <a:prstGeom prst="rect">
+            <a:avLst/>
+          </a:prstGeom>
+          <a:noFill/>
+          <a:ln/>
+        </p:spPr>
+        <p:txBody>
+          <a:bodyPr wrap="square" lIns="0" tIns="0" rIns="0" bIns="0" rtlCol="0" anchor="ctr"/>
+          <a:lstStyle/>
+          <a:p>
+            <a:pPr indent="0" marL="0">
+              <a:buNone/>
+            </a:pPr>
+            <a:r>
+              <a:rPr lang="en-US" sz="1100" b="1" dirty="0">
+                <a:solidFill>
+                  <a:srgbClr val="2A9D8F"/>
+                </a:solidFill>
+                <a:latin typeface="Arial" pitchFamily="34" charset="0"/>
+                <a:ea typeface="Arial" pitchFamily="34" charset="-122"/>
+                <a:cs typeface="Arial" pitchFamily="34" charset="-120"/>
+              </a:rPr>
+              <a:t>13</a:t>
+            </a:r>
+            <a:endParaRPr lang="en-US" sz="1100" dirty="0"/>
+          </a:p>
+        </p:txBody>
+      </p:sp>
+      <p:sp>
+        <p:nvSpPr>
+          <p:cNvPr id="29" name="Text 27"/>
+          <p:cNvSpPr/>
+          <p:nvPr/>
+        </p:nvSpPr>
+        <p:spPr>
+          <a:xfrm>
+            <a:off x="731520" y="4020747"/>
+            <a:ext cx="7863840" cy="257338"/>
+          </a:xfrm>
+          <a:prstGeom prst="rect">
+            <a:avLst/>
+          </a:prstGeom>
+          <a:noFill/>
+          <a:ln/>
+        </p:spPr>
+        <p:txBody>
+          <a:bodyPr wrap="square" lIns="0" tIns="0" rIns="0" bIns="0" rtlCol="0" anchor="ctr"/>
+          <a:lstStyle/>
+          <a:p>
+            <a:pPr indent="0" marL="0">
+              <a:buNone/>
+            </a:pPr>
+            <a:r>
+              <a:rPr lang="en-US" sz="1100" dirty="0">
+                <a:solidFill>
+                  <a:srgbClr val="264653"/>
+                </a:solidFill>
+                <a:latin typeface="Arial" pitchFamily="34" charset="0"/>
+                <a:ea typeface="Arial" pitchFamily="34" charset="-122"/>
+                <a:cs typeface="Arial" pitchFamily="34" charset="-120"/>
+              </a:rPr>
+              <a:t>프로파일 화면 — 작업 요약 · 패스 선택 · 전류 · 전압 파형</a:t>
+            </a:r>
+            <a:endParaRPr lang="en-US" sz="1100" dirty="0"/>
+          </a:p>
+        </p:txBody>
+      </p:sp>
+      <p:sp>
+        <p:nvSpPr>
+          <p:cNvPr id="30" name="Text 28"/>
+          <p:cNvSpPr/>
+          <p:nvPr/>
+        </p:nvSpPr>
+        <p:spPr>
+          <a:xfrm>
+            <a:off x="365760" y="4296374"/>
+            <a:ext cx="320040" cy="257338"/>
+          </a:xfrm>
+          <a:prstGeom prst="rect">
+            <a:avLst/>
+          </a:prstGeom>
+          <a:noFill/>
+          <a:ln/>
+        </p:spPr>
+        <p:txBody>
+          <a:bodyPr wrap="square" lIns="0" tIns="0" rIns="0" bIns="0" rtlCol="0" anchor="ctr"/>
+          <a:lstStyle/>
+          <a:p>
+            <a:pPr indent="0" marL="0">
+              <a:buNone/>
+            </a:pPr>
+            <a:r>
+              <a:rPr lang="en-US" sz="1100" b="1" dirty="0">
+                <a:solidFill>
+                  <a:srgbClr val="2A9D8F"/>
+                </a:solidFill>
+                <a:latin typeface="Arial" pitchFamily="34" charset="0"/>
+                <a:ea typeface="Arial" pitchFamily="34" charset="-122"/>
+                <a:cs typeface="Arial" pitchFamily="34" charset="-120"/>
+              </a:rPr>
+              <a:t>14</a:t>
+            </a:r>
+            <a:endParaRPr lang="en-US" sz="1100" dirty="0"/>
+          </a:p>
+        </p:txBody>
+      </p:sp>
+      <p:sp>
+        <p:nvSpPr>
+          <p:cNvPr id="31" name="Text 29"/>
+          <p:cNvSpPr/>
+          <p:nvPr/>
+        </p:nvSpPr>
+        <p:spPr>
+          <a:xfrm>
+            <a:off x="731520" y="4296374"/>
+            <a:ext cx="7863840" cy="257338"/>
+          </a:xfrm>
+          <a:prstGeom prst="rect">
+            <a:avLst/>
+          </a:prstGeom>
+          <a:noFill/>
+          <a:ln/>
+        </p:spPr>
+        <p:txBody>
+          <a:bodyPr wrap="square" lIns="0" tIns="0" rIns="0" bIns="0" rtlCol="0" anchor="ctr"/>
+          <a:lstStyle/>
+          <a:p>
+            <a:pPr indent="0" marL="0">
+              <a:buNone/>
+            </a:pPr>
+            <a:r>
+              <a:rPr lang="en-US" sz="1100" dirty="0">
+                <a:solidFill>
+                  <a:srgbClr val="264653"/>
+                </a:solidFill>
+                <a:latin typeface="Arial" pitchFamily="34" charset="0"/>
+                <a:ea typeface="Arial" pitchFamily="34" charset="-122"/>
+                <a:cs typeface="Arial" pitchFamily="34" charset="-120"/>
+              </a:rPr>
+              <a:t>품질 화면 — 패스 선택 · 성적서 · 문서 · 파형</a:t>
+            </a:r>
+            <a:endParaRPr lang="en-US" sz="1100" dirty="0"/>
+          </a:p>
+        </p:txBody>
+      </p:sp>
+      <p:sp>
+        <p:nvSpPr>
+          <p:cNvPr id="32" name="Shape 30"/>
+          <p:cNvSpPr/>
+          <p:nvPr/>
+        </p:nvSpPr>
+        <p:spPr>
+          <a:xfrm>
+            <a:off x="8503920" y="4663440"/>
+            <a:ext cx="365760" cy="365760"/>
+          </a:xfrm>
+          <a:prstGeom prst="ellipse">
             <a:avLst/>
           </a:prstGeom>
           <a:solidFill>
@@ -8263,661 +10395,7 @@
       </p:sp>
       <p:sp>
         <p:nvSpPr>
-          <p:cNvPr id="7" name="Shape 5"/>
-          <p:cNvSpPr/>
-          <p:nvPr/>
-        </p:nvSpPr>
-        <p:spPr>
-          <a:xfrm>
-            <a:off x="1435608" y="1554480"/>
-            <a:ext cx="512064" cy="512064"/>
-          </a:xfrm>
-          <a:prstGeom prst="ellipse">
-            <a:avLst/>
-          </a:prstGeom>
-          <a:solidFill>
-            <a:srgbClr val="264653"/>
-          </a:solidFill>
-          <a:ln/>
-        </p:spPr>
-      </p:sp>
-      <p:sp>
-        <p:nvSpPr>
-          <p:cNvPr id="8" name="Text 6"/>
-          <p:cNvSpPr/>
-          <p:nvPr/>
-        </p:nvSpPr>
-        <p:spPr>
-          <a:xfrm>
-            <a:off x="1435608" y="1554480"/>
-            <a:ext cx="512064" cy="512064"/>
-          </a:xfrm>
-          <a:prstGeom prst="rect">
-            <a:avLst/>
-          </a:prstGeom>
-          <a:noFill/>
-          <a:ln/>
-        </p:spPr>
-        <p:txBody>
-          <a:bodyPr wrap="square" lIns="0" tIns="0" rIns="0" bIns="0" rtlCol="0" anchor="ctr"/>
-          <a:lstStyle/>
-          <a:p>
-            <a:pPr algn="ctr" indent="0" marL="0">
-              <a:buNone/>
-            </a:pPr>
-            <a:r>
-              <a:rPr lang="en-US" sz="1800" b="1" dirty="0">
-                <a:solidFill>
-                  <a:srgbClr val="FFFFFF"/>
-                </a:solidFill>
-                <a:latin typeface="Arial" pitchFamily="34" charset="0"/>
-                <a:ea typeface="Arial" pitchFamily="34" charset="-122"/>
-                <a:cs typeface="Arial" pitchFamily="34" charset="-120"/>
-              </a:rPr>
-              <a:t>1</a:t>
-            </a:r>
-            <a:endParaRPr lang="en-US" sz="1800" dirty="0"/>
-          </a:p>
-        </p:txBody>
-      </p:sp>
-      <p:sp>
-        <p:nvSpPr>
-          <p:cNvPr id="9" name="Text 7"/>
-          <p:cNvSpPr/>
-          <p:nvPr/>
-        </p:nvSpPr>
-        <p:spPr>
-          <a:xfrm>
-            <a:off x="502920" y="2240280"/>
-            <a:ext cx="2377440" cy="365760"/>
-          </a:xfrm>
-          <a:prstGeom prst="rect">
-            <a:avLst/>
-          </a:prstGeom>
-          <a:noFill/>
-          <a:ln/>
-        </p:spPr>
-        <p:txBody>
-          <a:bodyPr wrap="square" lIns="0" tIns="0" rIns="0" bIns="0" rtlCol="0" anchor="ctr"/>
-          <a:lstStyle/>
-          <a:p>
-            <a:pPr algn="ctr" indent="0" marL="0">
-              <a:buNone/>
-            </a:pPr>
-            <a:r>
-              <a:rPr lang="en-US" sz="1500" b="1" dirty="0">
-                <a:solidFill>
-                  <a:srgbClr val="264653"/>
-                </a:solidFill>
-                <a:latin typeface="Arial" pitchFamily="34" charset="0"/>
-                <a:ea typeface="Arial" pitchFamily="34" charset="-122"/>
-                <a:cs typeface="Arial" pitchFamily="34" charset="-120"/>
-              </a:rPr>
-              <a:t>작업 관리</a:t>
-            </a:r>
-            <a:endParaRPr lang="en-US" sz="1500" dirty="0"/>
-          </a:p>
-        </p:txBody>
-      </p:sp>
-      <p:sp>
-        <p:nvSpPr>
-          <p:cNvPr id="10" name="Text 8"/>
-          <p:cNvSpPr/>
-          <p:nvPr/>
-        </p:nvSpPr>
-        <p:spPr>
-          <a:xfrm>
-            <a:off x="530352" y="2651760"/>
-            <a:ext cx="2322576" cy="777240"/>
-          </a:xfrm>
-          <a:prstGeom prst="rect">
-            <a:avLst/>
-          </a:prstGeom>
-          <a:noFill/>
-          <a:ln/>
-        </p:spPr>
-        <p:txBody>
-          <a:bodyPr wrap="square" lIns="0" tIns="0" rIns="0" bIns="0" rtlCol="0" anchor="ctr"/>
-          <a:lstStyle/>
-          <a:p>
-            <a:pPr algn="ctr" indent="0" marL="0">
-              <a:buNone/>
-            </a:pPr>
-            <a:r>
-              <a:rPr lang="en-US" sz="1200" dirty="0">
-                <a:solidFill>
-                  <a:srgbClr val="4A5560"/>
-                </a:solidFill>
-                <a:latin typeface="Arial" pitchFamily="34" charset="0"/>
-                <a:ea typeface="Arial" pitchFamily="34" charset="-122"/>
-                <a:cs typeface="Arial" pitchFamily="34" charset="-120"/>
-              </a:rPr>
-              <a:t>새 작업을 만들거나 기존 작업을 고릅니다.</a:t>
-            </a:r>
-            <a:endParaRPr lang="en-US" sz="1200" dirty="0"/>
-          </a:p>
-        </p:txBody>
-      </p:sp>
-      <p:sp>
-        <p:nvSpPr>
-          <p:cNvPr id="11" name="Text 9"/>
-          <p:cNvSpPr/>
-          <p:nvPr/>
-        </p:nvSpPr>
-        <p:spPr>
-          <a:xfrm>
-            <a:off x="2971800" y="2194560"/>
-            <a:ext cx="320040" cy="320040"/>
-          </a:xfrm>
-          <a:prstGeom prst="rect">
-            <a:avLst/>
-          </a:prstGeom>
-          <a:noFill/>
-          <a:ln/>
-        </p:spPr>
-        <p:txBody>
-          <a:bodyPr wrap="square" lIns="0" tIns="0" rIns="0" bIns="0" rtlCol="0" anchor="ctr"/>
-          <a:lstStyle/>
-          <a:p>
-            <a:pPr algn="ctr" indent="0" marL="0">
-              <a:buNone/>
-            </a:pPr>
-            <a:r>
-              <a:rPr lang="en-US" sz="1600" dirty="0">
-                <a:solidFill>
-                  <a:srgbClr val="E76F51"/>
-                </a:solidFill>
-                <a:latin typeface="Arial" pitchFamily="34" charset="0"/>
-                <a:ea typeface="Arial" pitchFamily="34" charset="-122"/>
-                <a:cs typeface="Arial" pitchFamily="34" charset="-120"/>
-              </a:rPr>
-              <a:t>→</a:t>
-            </a:r>
-            <a:endParaRPr lang="en-US" sz="1600" dirty="0"/>
-          </a:p>
-        </p:txBody>
-      </p:sp>
-      <p:sp>
-        <p:nvSpPr>
-          <p:cNvPr id="12" name="Shape 10"/>
-          <p:cNvSpPr/>
-          <p:nvPr/>
-        </p:nvSpPr>
-        <p:spPr>
-          <a:xfrm>
-            <a:off x="3246120" y="1234440"/>
-            <a:ext cx="2651760" cy="2331720"/>
-          </a:xfrm>
-          <a:prstGeom prst="roundRect">
-            <a:avLst>
-              <a:gd name="adj" fmla="val 3922"/>
-            </a:avLst>
-          </a:prstGeom>
-          <a:solidFill>
-            <a:srgbClr val="FFFFFF"/>
-          </a:solidFill>
-          <a:ln/>
-        </p:spPr>
-      </p:sp>
-      <p:sp>
-        <p:nvSpPr>
-          <p:cNvPr id="13" name="Shape 11"/>
-          <p:cNvSpPr/>
-          <p:nvPr/>
-        </p:nvSpPr>
-        <p:spPr>
-          <a:xfrm>
-            <a:off x="3246120" y="1234440"/>
-            <a:ext cx="2651760" cy="91440"/>
-          </a:xfrm>
-          <a:prstGeom prst="rect">
-            <a:avLst/>
-          </a:prstGeom>
-          <a:solidFill>
-            <a:srgbClr val="2A9D8F"/>
-          </a:solidFill>
-          <a:ln/>
-        </p:spPr>
-      </p:sp>
-      <p:sp>
-        <p:nvSpPr>
-          <p:cNvPr id="14" name="Shape 12"/>
-          <p:cNvSpPr/>
-          <p:nvPr/>
-        </p:nvSpPr>
-        <p:spPr>
-          <a:xfrm>
-            <a:off x="4315968" y="1554480"/>
-            <a:ext cx="512064" cy="512064"/>
-          </a:xfrm>
-          <a:prstGeom prst="ellipse">
-            <a:avLst/>
-          </a:prstGeom>
-          <a:solidFill>
-            <a:srgbClr val="264653"/>
-          </a:solidFill>
-          <a:ln/>
-        </p:spPr>
-      </p:sp>
-      <p:sp>
-        <p:nvSpPr>
-          <p:cNvPr id="15" name="Text 13"/>
-          <p:cNvSpPr/>
-          <p:nvPr/>
-        </p:nvSpPr>
-        <p:spPr>
-          <a:xfrm>
-            <a:off x="4315968" y="1554480"/>
-            <a:ext cx="512064" cy="512064"/>
-          </a:xfrm>
-          <a:prstGeom prst="rect">
-            <a:avLst/>
-          </a:prstGeom>
-          <a:noFill/>
-          <a:ln/>
-        </p:spPr>
-        <p:txBody>
-          <a:bodyPr wrap="square" lIns="0" tIns="0" rIns="0" bIns="0" rtlCol="0" anchor="ctr"/>
-          <a:lstStyle/>
-          <a:p>
-            <a:pPr algn="ctr" indent="0" marL="0">
-              <a:buNone/>
-            </a:pPr>
-            <a:r>
-              <a:rPr lang="en-US" sz="1800" b="1" dirty="0">
-                <a:solidFill>
-                  <a:srgbClr val="FFFFFF"/>
-                </a:solidFill>
-                <a:latin typeface="Arial" pitchFamily="34" charset="0"/>
-                <a:ea typeface="Arial" pitchFamily="34" charset="-122"/>
-                <a:cs typeface="Arial" pitchFamily="34" charset="-120"/>
-              </a:rPr>
-              <a:t>2</a:t>
-            </a:r>
-            <a:endParaRPr lang="en-US" sz="1800" dirty="0"/>
-          </a:p>
-        </p:txBody>
-      </p:sp>
-      <p:sp>
-        <p:nvSpPr>
-          <p:cNvPr id="16" name="Text 14"/>
-          <p:cNvSpPr/>
-          <p:nvPr/>
-        </p:nvSpPr>
-        <p:spPr>
-          <a:xfrm>
-            <a:off x="3383280" y="2240280"/>
-            <a:ext cx="2377440" cy="365760"/>
-          </a:xfrm>
-          <a:prstGeom prst="rect">
-            <a:avLst/>
-          </a:prstGeom>
-          <a:noFill/>
-          <a:ln/>
-        </p:spPr>
-        <p:txBody>
-          <a:bodyPr wrap="square" lIns="0" tIns="0" rIns="0" bIns="0" rtlCol="0" anchor="ctr"/>
-          <a:lstStyle/>
-          <a:p>
-            <a:pPr algn="ctr" indent="0" marL="0">
-              <a:buNone/>
-            </a:pPr>
-            <a:r>
-              <a:rPr lang="en-US" sz="1500" b="1" dirty="0">
-                <a:solidFill>
-                  <a:srgbClr val="264653"/>
-                </a:solidFill>
-                <a:latin typeface="Arial" pitchFamily="34" charset="0"/>
-                <a:ea typeface="Arial" pitchFamily="34" charset="-122"/>
-                <a:cs typeface="Arial" pitchFamily="34" charset="-120"/>
-              </a:rPr>
-              <a:t>작업 상세</a:t>
-            </a:r>
-            <a:endParaRPr lang="en-US" sz="1500" dirty="0"/>
-          </a:p>
-        </p:txBody>
-      </p:sp>
-      <p:sp>
-        <p:nvSpPr>
-          <p:cNvPr id="17" name="Text 15"/>
-          <p:cNvSpPr/>
-          <p:nvPr/>
-        </p:nvSpPr>
-        <p:spPr>
-          <a:xfrm>
-            <a:off x="3410712" y="2651760"/>
-            <a:ext cx="2322576" cy="777240"/>
-          </a:xfrm>
-          <a:prstGeom prst="rect">
-            <a:avLst/>
-          </a:prstGeom>
-          <a:noFill/>
-          <a:ln/>
-        </p:spPr>
-        <p:txBody>
-          <a:bodyPr wrap="square" lIns="0" tIns="0" rIns="0" bIns="0" rtlCol="0" anchor="ctr"/>
-          <a:lstStyle/>
-          <a:p>
-            <a:pPr algn="ctr" indent="0" marL="0">
-              <a:buNone/>
-            </a:pPr>
-            <a:r>
-              <a:rPr lang="en-US" sz="1200" dirty="0">
-                <a:solidFill>
-                  <a:srgbClr val="4A5560"/>
-                </a:solidFill>
-                <a:latin typeface="Arial" pitchFamily="34" charset="0"/>
-                <a:ea typeface="Arial" pitchFamily="34" charset="-122"/>
-                <a:cs typeface="Arial" pitchFamily="34" charset="-120"/>
-              </a:rPr>
-              <a:t>기본 정보 · 패스 · 첨부를 확인하고 정리합니다.</a:t>
-            </a:r>
-            <a:endParaRPr lang="en-US" sz="1200" dirty="0"/>
-          </a:p>
-        </p:txBody>
-      </p:sp>
-      <p:sp>
-        <p:nvSpPr>
-          <p:cNvPr id="18" name="Text 16"/>
-          <p:cNvSpPr/>
-          <p:nvPr/>
-        </p:nvSpPr>
-        <p:spPr>
-          <a:xfrm>
-            <a:off x="5852160" y="2194560"/>
-            <a:ext cx="320040" cy="320040"/>
-          </a:xfrm>
-          <a:prstGeom prst="rect">
-            <a:avLst/>
-          </a:prstGeom>
-          <a:noFill/>
-          <a:ln/>
-        </p:spPr>
-        <p:txBody>
-          <a:bodyPr wrap="square" lIns="0" tIns="0" rIns="0" bIns="0" rtlCol="0" anchor="ctr"/>
-          <a:lstStyle/>
-          <a:p>
-            <a:pPr algn="ctr" indent="0" marL="0">
-              <a:buNone/>
-            </a:pPr>
-            <a:r>
-              <a:rPr lang="en-US" sz="1600" dirty="0">
-                <a:solidFill>
-                  <a:srgbClr val="E76F51"/>
-                </a:solidFill>
-                <a:latin typeface="Arial" pitchFamily="34" charset="0"/>
-                <a:ea typeface="Arial" pitchFamily="34" charset="-122"/>
-                <a:cs typeface="Arial" pitchFamily="34" charset="-120"/>
-              </a:rPr>
-              <a:t>→</a:t>
-            </a:r>
-            <a:endParaRPr lang="en-US" sz="1600" dirty="0"/>
-          </a:p>
-        </p:txBody>
-      </p:sp>
-      <p:sp>
-        <p:nvSpPr>
-          <p:cNvPr id="19" name="Shape 17"/>
-          <p:cNvSpPr/>
-          <p:nvPr/>
-        </p:nvSpPr>
-        <p:spPr>
-          <a:xfrm>
-            <a:off x="6126480" y="1234440"/>
-            <a:ext cx="2651760" cy="2331720"/>
-          </a:xfrm>
-          <a:prstGeom prst="roundRect">
-            <a:avLst>
-              <a:gd name="adj" fmla="val 3922"/>
-            </a:avLst>
-          </a:prstGeom>
-          <a:solidFill>
-            <a:srgbClr val="FFFFFF"/>
-          </a:solidFill>
-          <a:ln/>
-        </p:spPr>
-      </p:sp>
-      <p:sp>
-        <p:nvSpPr>
-          <p:cNvPr id="20" name="Shape 18"/>
-          <p:cNvSpPr/>
-          <p:nvPr/>
-        </p:nvSpPr>
-        <p:spPr>
-          <a:xfrm>
-            <a:off x="6126480" y="1234440"/>
-            <a:ext cx="2651760" cy="91440"/>
-          </a:xfrm>
-          <a:prstGeom prst="rect">
-            <a:avLst/>
-          </a:prstGeom>
-          <a:solidFill>
-            <a:srgbClr val="2A9D8F"/>
-          </a:solidFill>
-          <a:ln/>
-        </p:spPr>
-      </p:sp>
-      <p:sp>
-        <p:nvSpPr>
-          <p:cNvPr id="21" name="Shape 19"/>
-          <p:cNvSpPr/>
-          <p:nvPr/>
-        </p:nvSpPr>
-        <p:spPr>
-          <a:xfrm>
-            <a:off x="7196328" y="1554480"/>
-            <a:ext cx="512064" cy="512064"/>
-          </a:xfrm>
-          <a:prstGeom prst="ellipse">
-            <a:avLst/>
-          </a:prstGeom>
-          <a:solidFill>
-            <a:srgbClr val="264653"/>
-          </a:solidFill>
-          <a:ln/>
-        </p:spPr>
-      </p:sp>
-      <p:sp>
-        <p:nvSpPr>
-          <p:cNvPr id="22" name="Text 20"/>
-          <p:cNvSpPr/>
-          <p:nvPr/>
-        </p:nvSpPr>
-        <p:spPr>
-          <a:xfrm>
-            <a:off x="7196328" y="1554480"/>
-            <a:ext cx="512064" cy="512064"/>
-          </a:xfrm>
-          <a:prstGeom prst="rect">
-            <a:avLst/>
-          </a:prstGeom>
-          <a:noFill/>
-          <a:ln/>
-        </p:spPr>
-        <p:txBody>
-          <a:bodyPr wrap="square" lIns="0" tIns="0" rIns="0" bIns="0" rtlCol="0" anchor="ctr"/>
-          <a:lstStyle/>
-          <a:p>
-            <a:pPr algn="ctr" indent="0" marL="0">
-              <a:buNone/>
-            </a:pPr>
-            <a:r>
-              <a:rPr lang="en-US" sz="1800" b="1" dirty="0">
-                <a:solidFill>
-                  <a:srgbClr val="FFFFFF"/>
-                </a:solidFill>
-                <a:latin typeface="Arial" pitchFamily="34" charset="0"/>
-                <a:ea typeface="Arial" pitchFamily="34" charset="-122"/>
-                <a:cs typeface="Arial" pitchFamily="34" charset="-120"/>
-              </a:rPr>
-              <a:t>3</a:t>
-            </a:r>
-            <a:endParaRPr lang="en-US" sz="1800" dirty="0"/>
-          </a:p>
-        </p:txBody>
-      </p:sp>
-      <p:sp>
-        <p:nvSpPr>
-          <p:cNvPr id="23" name="Text 21"/>
-          <p:cNvSpPr/>
-          <p:nvPr/>
-        </p:nvSpPr>
-        <p:spPr>
-          <a:xfrm>
-            <a:off x="6263640" y="2240280"/>
-            <a:ext cx="2377440" cy="365760"/>
-          </a:xfrm>
-          <a:prstGeom prst="rect">
-            <a:avLst/>
-          </a:prstGeom>
-          <a:noFill/>
-          <a:ln/>
-        </p:spPr>
-        <p:txBody>
-          <a:bodyPr wrap="square" lIns="0" tIns="0" rIns="0" bIns="0" rtlCol="0" anchor="ctr"/>
-          <a:lstStyle/>
-          <a:p>
-            <a:pPr algn="ctr" indent="0" marL="0">
-              <a:buNone/>
-            </a:pPr>
-            <a:r>
-              <a:rPr lang="en-US" sz="1500" b="1" dirty="0">
-                <a:solidFill>
-                  <a:srgbClr val="264653"/>
-                </a:solidFill>
-                <a:latin typeface="Arial" pitchFamily="34" charset="0"/>
-                <a:ea typeface="Arial" pitchFamily="34" charset="-122"/>
-                <a:cs typeface="Arial" pitchFamily="34" charset="-120"/>
-              </a:rPr>
-              <a:t>조회 화면</a:t>
-            </a:r>
-            <a:endParaRPr lang="en-US" sz="1500" dirty="0"/>
-          </a:p>
-        </p:txBody>
-      </p:sp>
-      <p:sp>
-        <p:nvSpPr>
-          <p:cNvPr id="24" name="Text 22"/>
-          <p:cNvSpPr/>
-          <p:nvPr/>
-        </p:nvSpPr>
-        <p:spPr>
-          <a:xfrm>
-            <a:off x="6291072" y="2651760"/>
-            <a:ext cx="2322576" cy="777240"/>
-          </a:xfrm>
-          <a:prstGeom prst="rect">
-            <a:avLst/>
-          </a:prstGeom>
-          <a:noFill/>
-          <a:ln/>
-        </p:spPr>
-        <p:txBody>
-          <a:bodyPr wrap="square" lIns="0" tIns="0" rIns="0" bIns="0" rtlCol="0" anchor="ctr"/>
-          <a:lstStyle/>
-          <a:p>
-            <a:pPr algn="ctr" indent="0" marL="0">
-              <a:buNone/>
-            </a:pPr>
-            <a:r>
-              <a:rPr lang="en-US" sz="1200" dirty="0">
-                <a:solidFill>
-                  <a:srgbClr val="4A5560"/>
-                </a:solidFill>
-                <a:latin typeface="Arial" pitchFamily="34" charset="0"/>
-                <a:ea typeface="Arial" pitchFamily="34" charset="-122"/>
-                <a:cs typeface="Arial" pitchFamily="34" charset="-120"/>
-              </a:rPr>
-              <a:t>프로파일 · 품질로 같은 작업을 살펴봅니다.</a:t>
-            </a:r>
-            <a:endParaRPr lang="en-US" sz="1200" dirty="0"/>
-          </a:p>
-        </p:txBody>
-      </p:sp>
-      <p:sp>
-        <p:nvSpPr>
-          <p:cNvPr id="25" name="Shape 23"/>
-          <p:cNvSpPr/>
-          <p:nvPr/>
-        </p:nvSpPr>
-        <p:spPr>
-          <a:xfrm>
-            <a:off x="365760" y="3794760"/>
-            <a:ext cx="8412480" cy="640080"/>
-          </a:xfrm>
-          <a:prstGeom prst="roundRect">
-            <a:avLst>
-              <a:gd name="adj" fmla="val 11429"/>
-            </a:avLst>
-          </a:prstGeom>
-          <a:solidFill>
-            <a:srgbClr val="264653"/>
-          </a:solidFill>
-          <a:ln/>
-        </p:spPr>
-      </p:sp>
-      <p:sp>
-        <p:nvSpPr>
-          <p:cNvPr id="26" name="Text 24"/>
-          <p:cNvSpPr/>
-          <p:nvPr/>
-        </p:nvSpPr>
-        <p:spPr>
-          <a:xfrm>
-            <a:off x="502920" y="3886200"/>
-            <a:ext cx="8138160" cy="457200"/>
-          </a:xfrm>
-          <a:prstGeom prst="rect">
-            <a:avLst/>
-          </a:prstGeom>
-          <a:noFill/>
-          <a:ln/>
-        </p:spPr>
-        <p:txBody>
-          <a:bodyPr wrap="square" lIns="0" tIns="0" rIns="0" bIns="0" rtlCol="0" anchor="ctr"/>
-          <a:lstStyle/>
-          <a:p>
-            <a:pPr algn="ctr" indent="0" marL="0">
-              <a:buNone/>
-            </a:pPr>
-            <a:r>
-              <a:rPr lang="en-US" sz="1300" dirty="0">
-                <a:solidFill>
-                  <a:srgbClr val="FFFFFF"/>
-                </a:solidFill>
-                <a:latin typeface="Arial" pitchFamily="34" charset="0"/>
-                <a:ea typeface="Arial" pitchFamily="34" charset="-122"/>
-                <a:cs typeface="Arial" pitchFamily="34" charset="-120"/>
-              </a:rPr>
-              <a:t>작업을 먼저 잡고 → 패스와 자료를 정리한 뒤 → 같은 작업으로 조회합니다.</a:t>
-            </a:r>
-            <a:endParaRPr lang="en-US" sz="1300" dirty="0"/>
-          </a:p>
-        </p:txBody>
-      </p:sp>
-      <p:sp>
-        <p:nvSpPr>
-          <p:cNvPr id="27" name="Shape 25"/>
-          <p:cNvSpPr/>
-          <p:nvPr/>
-        </p:nvSpPr>
-        <p:spPr>
-          <a:xfrm>
-            <a:off x="8503920" y="4663440"/>
-            <a:ext cx="365760" cy="365760"/>
-          </a:xfrm>
-          <a:prstGeom prst="ellipse">
-            <a:avLst/>
-          </a:prstGeom>
-          <a:solidFill>
-            <a:srgbClr val="E76F51"/>
-          </a:solidFill>
-          <a:ln/>
-        </p:spPr>
-      </p:sp>
-      <p:sp>
-        <p:nvSpPr>
-          <p:cNvPr id="28" name="Text 26"/>
+          <p:cNvPr id="33" name="Text 31"/>
           <p:cNvSpPr/>
           <p:nvPr/>
         </p:nvSpPr>
@@ -9019,7 +10497,7 @@
                 <a:ea typeface="Arial" pitchFamily="34" charset="-122"/>
                 <a:cs typeface="Arial" pitchFamily="34" charset="-120"/>
               </a:rPr>
-              <a:t>2. 작업 관리 화면</a:t>
+              <a:t>1. 로그인</a:t>
             </a:r>
             <a:endParaRPr lang="en-US" sz="1800" dirty="0"/>
           </a:p>
@@ -9027,7 +10505,7 @@
       </p:sp>
       <p:pic>
         <p:nvPicPr>
-          <p:cNvPr id="3" name="Image 0" descr="/Users/geosoft/Documents/weld-dashboard/docs/2026-10-23/slides/imgs/01-work-history-n.png">    </p:cNvPr>
+          <p:cNvPr id="3" name="Image 0" descr="/Users/geosoft/Documents/weld-dashboard/docs/2026-10-23/slides/imgs/00-login-n.png">    </p:cNvPr>
           <p:cNvPicPr>
             <a:picLocks noChangeAspect="1"/>
           </p:cNvPicPr>
@@ -9202,7 +10680,7 @@
                 <a:ea typeface="Arial" pitchFamily="34" charset="-122"/>
                 <a:cs typeface="Arial" pitchFamily="34" charset="-120"/>
               </a:rPr>
-              <a:t>왼쪽 [작업 관리] 메뉴</a:t>
+              <a:t>앱 이름</a:t>
             </a:r>
             <a:endParaRPr lang="en-US" sz="1100" dirty="0"/>
           </a:p>
@@ -9300,7 +10778,7 @@
                 <a:ea typeface="Arial" pitchFamily="34" charset="-122"/>
                 <a:cs typeface="Arial" pitchFamily="34" charset="-120"/>
               </a:rPr>
-              <a:t>[조회] — 목록 불러오기</a:t>
+              <a:t>ID — user</a:t>
             </a:r>
             <a:endParaRPr lang="en-US" sz="1100" dirty="0"/>
           </a:p>
@@ -9398,7 +10876,7 @@
                 <a:ea typeface="Arial" pitchFamily="34" charset="-122"/>
                 <a:cs typeface="Arial" pitchFamily="34" charset="-120"/>
               </a:rPr>
-              <a:t>[새 작업] — 새로 등록</a:t>
+              <a:t>Password — 1234</a:t>
             </a:r>
             <a:endParaRPr lang="en-US" sz="1100" dirty="0"/>
           </a:p>
@@ -9496,7 +10974,7 @@
                 <a:ea typeface="Arial" pitchFamily="34" charset="-122"/>
                 <a:cs typeface="Arial" pitchFamily="34" charset="-120"/>
               </a:rPr>
-              <a:t>[상세] — 작업 내용 열기</a:t>
+              <a:t>[로그인]</a:t>
             </a:r>
             <a:endParaRPr lang="en-US" sz="1100" dirty="0"/>
           </a:p>
@@ -9510,8 +10988,8 @@
         </p:nvSpPr>
         <p:spPr>
           <a:xfrm>
-            <a:off x="6446520" y="3035808"/>
-            <a:ext cx="237744" cy="237744"/>
+            <a:off x="8503920" y="4663440"/>
+            <a:ext cx="365760" cy="365760"/>
           </a:xfrm>
           <a:prstGeom prst="ellipse">
             <a:avLst/>
@@ -9525,202 +11003,6 @@
       <p:sp>
         <p:nvSpPr>
           <p:cNvPr id="19" name="Text 16"/>
-          <p:cNvSpPr/>
-          <p:nvPr/>
-        </p:nvSpPr>
-        <p:spPr>
-          <a:xfrm>
-            <a:off x="6446520" y="3035808"/>
-            <a:ext cx="237744" cy="237744"/>
-          </a:xfrm>
-          <a:prstGeom prst="rect">
-            <a:avLst/>
-          </a:prstGeom>
-          <a:noFill/>
-          <a:ln/>
-        </p:spPr>
-        <p:txBody>
-          <a:bodyPr wrap="square" lIns="0" tIns="0" rIns="0" bIns="0" rtlCol="0" anchor="ctr"/>
-          <a:lstStyle/>
-          <a:p>
-            <a:pPr algn="ctr" indent="0" marL="0">
-              <a:buNone/>
-            </a:pPr>
-            <a:r>
-              <a:rPr lang="en-US" sz="1100" b="1" dirty="0">
-                <a:solidFill>
-                  <a:srgbClr val="FFFFFF"/>
-                </a:solidFill>
-                <a:latin typeface="Arial" pitchFamily="34" charset="0"/>
-                <a:ea typeface="Arial" pitchFamily="34" charset="-122"/>
-                <a:cs typeface="Arial" pitchFamily="34" charset="-120"/>
-              </a:rPr>
-              <a:t>5</a:t>
-            </a:r>
-            <a:endParaRPr lang="en-US" sz="1100" dirty="0"/>
-          </a:p>
-        </p:txBody>
-      </p:sp>
-      <p:sp>
-        <p:nvSpPr>
-          <p:cNvPr id="20" name="Text 17"/>
-          <p:cNvSpPr/>
-          <p:nvPr/>
-        </p:nvSpPr>
-        <p:spPr>
-          <a:xfrm>
-            <a:off x="6766560" y="3017520"/>
-            <a:ext cx="1920240" cy="457200"/>
-          </a:xfrm>
-          <a:prstGeom prst="rect">
-            <a:avLst/>
-          </a:prstGeom>
-          <a:noFill/>
-          <a:ln/>
-        </p:spPr>
-        <p:txBody>
-          <a:bodyPr wrap="square" lIns="0" tIns="0" rIns="0" bIns="0" rtlCol="0" anchor="ctr"/>
-          <a:lstStyle/>
-          <a:p>
-            <a:pPr indent="0" marL="0">
-              <a:buNone/>
-            </a:pPr>
-            <a:r>
-              <a:rPr lang="en-US" sz="1100" dirty="0">
-                <a:solidFill>
-                  <a:srgbClr val="4A5560"/>
-                </a:solidFill>
-                <a:latin typeface="Arial" pitchFamily="34" charset="0"/>
-                <a:ea typeface="Arial" pitchFamily="34" charset="-122"/>
-                <a:cs typeface="Arial" pitchFamily="34" charset="-120"/>
-              </a:rPr>
-              <a:t>[프로파일] — 파형 보기</a:t>
-            </a:r>
-            <a:endParaRPr lang="en-US" sz="1100" dirty="0"/>
-          </a:p>
-        </p:txBody>
-      </p:sp>
-      <p:sp>
-        <p:nvSpPr>
-          <p:cNvPr id="21" name="Shape 18"/>
-          <p:cNvSpPr/>
-          <p:nvPr/>
-        </p:nvSpPr>
-        <p:spPr>
-          <a:xfrm>
-            <a:off x="6446520" y="3538728"/>
-            <a:ext cx="237744" cy="237744"/>
-          </a:xfrm>
-          <a:prstGeom prst="ellipse">
-            <a:avLst/>
-          </a:prstGeom>
-          <a:solidFill>
-            <a:srgbClr val="E76F51"/>
-          </a:solidFill>
-          <a:ln/>
-        </p:spPr>
-      </p:sp>
-      <p:sp>
-        <p:nvSpPr>
-          <p:cNvPr id="22" name="Text 19"/>
-          <p:cNvSpPr/>
-          <p:nvPr/>
-        </p:nvSpPr>
-        <p:spPr>
-          <a:xfrm>
-            <a:off x="6446520" y="3538728"/>
-            <a:ext cx="237744" cy="237744"/>
-          </a:xfrm>
-          <a:prstGeom prst="rect">
-            <a:avLst/>
-          </a:prstGeom>
-          <a:noFill/>
-          <a:ln/>
-        </p:spPr>
-        <p:txBody>
-          <a:bodyPr wrap="square" lIns="0" tIns="0" rIns="0" bIns="0" rtlCol="0" anchor="ctr"/>
-          <a:lstStyle/>
-          <a:p>
-            <a:pPr algn="ctr" indent="0" marL="0">
-              <a:buNone/>
-            </a:pPr>
-            <a:r>
-              <a:rPr lang="en-US" sz="1100" b="1" dirty="0">
-                <a:solidFill>
-                  <a:srgbClr val="FFFFFF"/>
-                </a:solidFill>
-                <a:latin typeface="Arial" pitchFamily="34" charset="0"/>
-                <a:ea typeface="Arial" pitchFamily="34" charset="-122"/>
-                <a:cs typeface="Arial" pitchFamily="34" charset="-120"/>
-              </a:rPr>
-              <a:t>6</a:t>
-            </a:r>
-            <a:endParaRPr lang="en-US" sz="1100" dirty="0"/>
-          </a:p>
-        </p:txBody>
-      </p:sp>
-      <p:sp>
-        <p:nvSpPr>
-          <p:cNvPr id="23" name="Text 20"/>
-          <p:cNvSpPr/>
-          <p:nvPr/>
-        </p:nvSpPr>
-        <p:spPr>
-          <a:xfrm>
-            <a:off x="6766560" y="3520440"/>
-            <a:ext cx="1920240" cy="457200"/>
-          </a:xfrm>
-          <a:prstGeom prst="rect">
-            <a:avLst/>
-          </a:prstGeom>
-          <a:noFill/>
-          <a:ln/>
-        </p:spPr>
-        <p:txBody>
-          <a:bodyPr wrap="square" lIns="0" tIns="0" rIns="0" bIns="0" rtlCol="0" anchor="ctr"/>
-          <a:lstStyle/>
-          <a:p>
-            <a:pPr indent="0" marL="0">
-              <a:buNone/>
-            </a:pPr>
-            <a:r>
-              <a:rPr lang="en-US" sz="1100" dirty="0">
-                <a:solidFill>
-                  <a:srgbClr val="4A5560"/>
-                </a:solidFill>
-                <a:latin typeface="Arial" pitchFamily="34" charset="0"/>
-                <a:ea typeface="Arial" pitchFamily="34" charset="-122"/>
-                <a:cs typeface="Arial" pitchFamily="34" charset="-120"/>
-              </a:rPr>
-              <a:t>[품질] — 품질 결과 보기</a:t>
-            </a:r>
-            <a:endParaRPr lang="en-US" sz="1100" dirty="0"/>
-          </a:p>
-        </p:txBody>
-      </p:sp>
-      <p:sp>
-        <p:nvSpPr>
-          <p:cNvPr id="24" name="Shape 21"/>
-          <p:cNvSpPr/>
-          <p:nvPr/>
-        </p:nvSpPr>
-        <p:spPr>
-          <a:xfrm>
-            <a:off x="8503920" y="4663440"/>
-            <a:ext cx="365760" cy="365760"/>
-          </a:xfrm>
-          <a:prstGeom prst="ellipse">
-            <a:avLst/>
-          </a:prstGeom>
-          <a:solidFill>
-            <a:srgbClr val="E76F51"/>
-          </a:solidFill>
-          <a:ln/>
-        </p:spPr>
-      </p:sp>
-      <p:sp>
-        <p:nvSpPr>
-          <p:cNvPr id="25" name="Text 22"/>
           <p:cNvSpPr/>
           <p:nvPr/>
         </p:nvSpPr>
@@ -9822,7 +11104,7 @@
                 <a:ea typeface="Arial" pitchFamily="34" charset="-122"/>
                 <a:cs typeface="Arial" pitchFamily="34" charset="-120"/>
               </a:rPr>
-              <a:t>3. 새 작업 만들기</a:t>
+              <a:t>2. 수집 모니터링</a:t>
             </a:r>
             <a:endParaRPr lang="en-US" sz="1800" dirty="0"/>
           </a:p>
@@ -9830,7 +11112,7 @@
       </p:sp>
       <p:pic>
         <p:nvPicPr>
-          <p:cNvPr id="3" name="Image 0" descr="/Users/geosoft/Documents/weld-dashboard/docs/2026-10-23/slides/imgs/02-new-job-dialog-n.png">    </p:cNvPr>
+          <p:cNvPr id="3" name="Image 0" descr="/Users/geosoft/Documents/weld-dashboard/docs/2026-10-23/slides/imgs/00-collection-monitoring-n.png">    </p:cNvPr>
           <p:cNvPicPr>
             <a:picLocks noChangeAspect="1"/>
           </p:cNvPicPr>
@@ -9981,7 +11263,7 @@
         <p:spPr>
           <a:xfrm>
             <a:off x="6766560" y="1005840"/>
-            <a:ext cx="1920240" cy="450669"/>
+            <a:ext cx="1920240" cy="457200"/>
           </a:xfrm>
           <a:prstGeom prst="rect">
             <a:avLst/>
@@ -10005,7 +11287,7 @@
                 <a:ea typeface="Arial" pitchFamily="34" charset="-122"/>
                 <a:cs typeface="Arial" pitchFamily="34" charset="-120"/>
               </a:rPr>
-              <a:t>공사 — 필수</a:t>
+              <a:t>왼쪽 [수집 모니터링] 메뉴</a:t>
             </a:r>
             <a:endParaRPr lang="en-US" sz="1100" dirty="0"/>
           </a:p>
@@ -10019,7 +11301,7 @@
         </p:nvSpPr>
         <p:spPr>
           <a:xfrm>
-            <a:off x="6446520" y="1520517"/>
+            <a:off x="6446520" y="1527048"/>
             <a:ext cx="237744" cy="237744"/>
           </a:xfrm>
           <a:prstGeom prst="ellipse">
@@ -10039,7 +11321,7 @@
         </p:nvSpPr>
         <p:spPr>
           <a:xfrm>
-            <a:off x="6446520" y="1520517"/>
+            <a:off x="6446520" y="1527048"/>
             <a:ext cx="237744" cy="237744"/>
           </a:xfrm>
           <a:prstGeom prst="rect">
@@ -10078,8 +11360,8 @@
         </p:nvSpPr>
         <p:spPr>
           <a:xfrm>
-            <a:off x="6766560" y="1502229"/>
-            <a:ext cx="1920240" cy="450669"/>
+            <a:off x="6766560" y="1508760"/>
+            <a:ext cx="1920240" cy="457200"/>
           </a:xfrm>
           <a:prstGeom prst="rect">
             <a:avLst/>
@@ -10103,7 +11385,7 @@
                 <a:ea typeface="Arial" pitchFamily="34" charset="-122"/>
                 <a:cs typeface="Arial" pitchFamily="34" charset="-120"/>
               </a:rPr>
-              <a:t>호기 · 품목 — 필수</a:t>
+              <a:t>조회·검색 조건 — 일자 · 시작·종료 · 보기 · 장비 · 작업 · 새로고침 주기 등</a:t>
             </a:r>
             <a:endParaRPr lang="en-US" sz="1100" dirty="0"/>
           </a:p>
@@ -10117,7 +11399,7 @@
         </p:nvSpPr>
         <p:spPr>
           <a:xfrm>
-            <a:off x="6446520" y="2016905"/>
+            <a:off x="6446520" y="2029968"/>
             <a:ext cx="237744" cy="237744"/>
           </a:xfrm>
           <a:prstGeom prst="ellipse">
@@ -10137,7 +11419,7 @@
         </p:nvSpPr>
         <p:spPr>
           <a:xfrm>
-            <a:off x="6446520" y="2016905"/>
+            <a:off x="6446520" y="2029968"/>
             <a:ext cx="237744" cy="237744"/>
           </a:xfrm>
           <a:prstGeom prst="rect">
@@ -10176,8 +11458,8 @@
         </p:nvSpPr>
         <p:spPr>
           <a:xfrm>
-            <a:off x="6766560" y="1998617"/>
-            <a:ext cx="1920240" cy="450669"/>
+            <a:off x="6766560" y="2011680"/>
+            <a:ext cx="1920240" cy="457200"/>
           </a:xfrm>
           <a:prstGeom prst="rect">
             <a:avLst/>
@@ -10201,7 +11483,7 @@
                 <a:ea typeface="Arial" pitchFamily="34" charset="-122"/>
                 <a:cs typeface="Arial" pitchFamily="34" charset="-120"/>
               </a:rPr>
-              <a:t>이음부 — 필수</a:t>
+              <a:t>[조회] · [초기화] · [새로고침]</a:t>
             </a:r>
             <a:endParaRPr lang="en-US" sz="1100" dirty="0"/>
           </a:p>
@@ -10215,7 +11497,7 @@
         </p:nvSpPr>
         <p:spPr>
           <a:xfrm>
-            <a:off x="6446520" y="2513294"/>
+            <a:off x="6446520" y="2532888"/>
             <a:ext cx="237744" cy="237744"/>
           </a:xfrm>
           <a:prstGeom prst="ellipse">
@@ -10235,7 +11517,7 @@
         </p:nvSpPr>
         <p:spPr>
           <a:xfrm>
-            <a:off x="6446520" y="2513294"/>
+            <a:off x="6446520" y="2532888"/>
             <a:ext cx="237744" cy="237744"/>
           </a:xfrm>
           <a:prstGeom prst="rect">
@@ -10274,8 +11556,8 @@
         </p:nvSpPr>
         <p:spPr>
           <a:xfrm>
-            <a:off x="6766560" y="2495006"/>
-            <a:ext cx="1920240" cy="450669"/>
+            <a:off x="6766560" y="2514600"/>
+            <a:ext cx="1920240" cy="457200"/>
           </a:xfrm>
           <a:prstGeom prst="rect">
             <a:avLst/>
@@ -10299,7 +11581,7 @@
                 <a:ea typeface="Arial" pitchFamily="34" charset="-122"/>
                 <a:cs typeface="Arial" pitchFamily="34" charset="-120"/>
               </a:rPr>
-              <a:t>작업자 — 선택</a:t>
+              <a:t>일자별 수집 타임라인 탭</a:t>
             </a:r>
             <a:endParaRPr lang="en-US" sz="1100" dirty="0"/>
           </a:p>
@@ -10313,7 +11595,7 @@
         </p:nvSpPr>
         <p:spPr>
           <a:xfrm>
-            <a:off x="6446520" y="3009682"/>
+            <a:off x="6446520" y="3035808"/>
             <a:ext cx="237744" cy="237744"/>
           </a:xfrm>
           <a:prstGeom prst="ellipse">
@@ -10333,7 +11615,7 @@
         </p:nvSpPr>
         <p:spPr>
           <a:xfrm>
-            <a:off x="6446520" y="3009682"/>
+            <a:off x="6446520" y="3035808"/>
             <a:ext cx="237744" cy="237744"/>
           </a:xfrm>
           <a:prstGeom prst="rect">
@@ -10372,8 +11654,8 @@
         </p:nvSpPr>
         <p:spPr>
           <a:xfrm>
-            <a:off x="6766560" y="2991394"/>
-            <a:ext cx="1920240" cy="450669"/>
+            <a:off x="6766560" y="3017520"/>
+            <a:ext cx="1920240" cy="457200"/>
           </a:xfrm>
           <a:prstGeom prst="rect">
             <a:avLst/>
@@ -10397,7 +11679,7 @@
                 <a:ea typeface="Arial" pitchFamily="34" charset="-122"/>
                 <a:cs typeface="Arial" pitchFamily="34" charset="-120"/>
               </a:rPr>
-              <a:t>시작 · 종료 시각 — 시작은 필수</a:t>
+              <a:t>타임라인 영역 — 시간축과 수집 막대</a:t>
             </a:r>
             <a:endParaRPr lang="en-US" sz="1100" dirty="0"/>
           </a:p>
@@ -10411,7 +11693,7 @@
         </p:nvSpPr>
         <p:spPr>
           <a:xfrm>
-            <a:off x="6446520" y="3506071"/>
+            <a:off x="6446520" y="3538728"/>
             <a:ext cx="237744" cy="237744"/>
           </a:xfrm>
           <a:prstGeom prst="ellipse">
@@ -10431,7 +11713,7 @@
         </p:nvSpPr>
         <p:spPr>
           <a:xfrm>
-            <a:off x="6446520" y="3506071"/>
+            <a:off x="6446520" y="3538728"/>
             <a:ext cx="237744" cy="237744"/>
           </a:xfrm>
           <a:prstGeom prst="rect">
@@ -10470,8 +11752,8 @@
         </p:nvSpPr>
         <p:spPr>
           <a:xfrm>
-            <a:off x="6766560" y="3487783"/>
-            <a:ext cx="1920240" cy="450669"/>
+            <a:off x="6766560" y="3520440"/>
+            <a:ext cx="1920240" cy="457200"/>
           </a:xfrm>
           <a:prstGeom prst="rect">
             <a:avLst/>
@@ -10495,7 +11777,7 @@
                 <a:ea typeface="Arial" pitchFamily="34" charset="-122"/>
                 <a:cs typeface="Arial" pitchFamily="34" charset="-120"/>
               </a:rPr>
-              <a:t>패스 구간 — 선택</a:t>
+              <a:t>보기 전환 — 리소스 · 로드맵</a:t>
             </a:r>
             <a:endParaRPr lang="en-US" sz="1100" dirty="0"/>
           </a:p>
@@ -10509,8 +11791,8 @@
         </p:nvSpPr>
         <p:spPr>
           <a:xfrm>
-            <a:off x="6446520" y="4002459"/>
-            <a:ext cx="237744" cy="237744"/>
+            <a:off x="8503920" y="4663440"/>
+            <a:ext cx="365760" cy="365760"/>
           </a:xfrm>
           <a:prstGeom prst="ellipse">
             <a:avLst/>
@@ -10524,104 +11806,6 @@
       <p:sp>
         <p:nvSpPr>
           <p:cNvPr id="25" name="Text 22"/>
-          <p:cNvSpPr/>
-          <p:nvPr/>
-        </p:nvSpPr>
-        <p:spPr>
-          <a:xfrm>
-            <a:off x="6446520" y="4002459"/>
-            <a:ext cx="237744" cy="237744"/>
-          </a:xfrm>
-          <a:prstGeom prst="rect">
-            <a:avLst/>
-          </a:prstGeom>
-          <a:noFill/>
-          <a:ln/>
-        </p:spPr>
-        <p:txBody>
-          <a:bodyPr wrap="square" lIns="0" tIns="0" rIns="0" bIns="0" rtlCol="0" anchor="ctr"/>
-          <a:lstStyle/>
-          <a:p>
-            <a:pPr algn="ctr" indent="0" marL="0">
-              <a:buNone/>
-            </a:pPr>
-            <a:r>
-              <a:rPr lang="en-US" sz="1100" b="1" dirty="0">
-                <a:solidFill>
-                  <a:srgbClr val="FFFFFF"/>
-                </a:solidFill>
-                <a:latin typeface="Arial" pitchFamily="34" charset="0"/>
-                <a:ea typeface="Arial" pitchFamily="34" charset="-122"/>
-                <a:cs typeface="Arial" pitchFamily="34" charset="-120"/>
-              </a:rPr>
-              <a:t>7</a:t>
-            </a:r>
-            <a:endParaRPr lang="en-US" sz="1100" dirty="0"/>
-          </a:p>
-        </p:txBody>
-      </p:sp>
-      <p:sp>
-        <p:nvSpPr>
-          <p:cNvPr id="26" name="Text 23"/>
-          <p:cNvSpPr/>
-          <p:nvPr/>
-        </p:nvSpPr>
-        <p:spPr>
-          <a:xfrm>
-            <a:off x="6766560" y="3984171"/>
-            <a:ext cx="1920240" cy="450669"/>
-          </a:xfrm>
-          <a:prstGeom prst="rect">
-            <a:avLst/>
-          </a:prstGeom>
-          <a:noFill/>
-          <a:ln/>
-        </p:spPr>
-        <p:txBody>
-          <a:bodyPr wrap="square" lIns="0" tIns="0" rIns="0" bIns="0" rtlCol="0" anchor="ctr"/>
-          <a:lstStyle/>
-          <a:p>
-            <a:pPr indent="0" marL="0">
-              <a:buNone/>
-            </a:pPr>
-            <a:r>
-              <a:rPr lang="en-US" sz="1100" dirty="0">
-                <a:solidFill>
-                  <a:srgbClr val="4A5560"/>
-                </a:solidFill>
-                <a:latin typeface="Arial" pitchFamily="34" charset="0"/>
-                <a:ea typeface="Arial" pitchFamily="34" charset="-122"/>
-                <a:cs typeface="Arial" pitchFamily="34" charset="-120"/>
-              </a:rPr>
-              <a:t>[만들기] — 저장</a:t>
-            </a:r>
-            <a:endParaRPr lang="en-US" sz="1100" dirty="0"/>
-          </a:p>
-        </p:txBody>
-      </p:sp>
-      <p:sp>
-        <p:nvSpPr>
-          <p:cNvPr id="27" name="Shape 24"/>
-          <p:cNvSpPr/>
-          <p:nvPr/>
-        </p:nvSpPr>
-        <p:spPr>
-          <a:xfrm>
-            <a:off x="8503920" y="4663440"/>
-            <a:ext cx="365760" cy="365760"/>
-          </a:xfrm>
-          <a:prstGeom prst="ellipse">
-            <a:avLst/>
-          </a:prstGeom>
-          <a:solidFill>
-            <a:srgbClr val="E76F51"/>
-          </a:solidFill>
-          <a:ln/>
-        </p:spPr>
-      </p:sp>
-      <p:sp>
-        <p:nvSpPr>
-          <p:cNvPr id="28" name="Text 25"/>
           <p:cNvSpPr/>
           <p:nvPr/>
         </p:nvSpPr>
@@ -10723,7 +11907,7 @@
                 <a:ea typeface="Arial" pitchFamily="34" charset="-122"/>
                 <a:cs typeface="Arial" pitchFamily="34" charset="-120"/>
               </a:rPr>
-              <a:t>4. 목록에서 상세 · 프로파일 · 품질 열기</a:t>
+              <a:t>3. 작업 관리 화면</a:t>
             </a:r>
             <a:endParaRPr lang="en-US" sz="1800" dirty="0"/>
           </a:p>
@@ -10731,7 +11915,7 @@
       </p:sp>
       <p:pic>
         <p:nvPicPr>
-          <p:cNvPr id="3" name="Image 0" descr="/Users/geosoft/Documents/weld-dashboard/docs/2026-10-23/slides/imgs/06-list-actions-n.png">    </p:cNvPr>
+          <p:cNvPr id="3" name="Image 0" descr="/Users/geosoft/Documents/weld-dashboard/docs/2026-10-23/slides/imgs/01-work-history-n.png">    </p:cNvPr>
           <p:cNvPicPr>
             <a:picLocks noChangeAspect="1"/>
           </p:cNvPicPr>
@@ -10906,7 +12090,7 @@
                 <a:ea typeface="Arial" pitchFamily="34" charset="-122"/>
                 <a:cs typeface="Arial" pitchFamily="34" charset="-120"/>
               </a:rPr>
-              <a:t>[상세] — 기본 정보 · 패스 · 첨부를 고치고 정리합니다</a:t>
+              <a:t>왼쪽 [작업 관리] 메뉴</a:t>
             </a:r>
             <a:endParaRPr lang="en-US" sz="1100" dirty="0"/>
           </a:p>
@@ -11004,7 +12188,7 @@
                 <a:ea typeface="Arial" pitchFamily="34" charset="-122"/>
                 <a:cs typeface="Arial" pitchFamily="34" charset="-120"/>
               </a:rPr>
-              <a:t>[프로파일] — 패스별 전류 · 전압 등 파형을 봅니다</a:t>
+              <a:t>[조회] — 목록 불러오기</a:t>
             </a:r>
             <a:endParaRPr lang="en-US" sz="1100" dirty="0"/>
           </a:p>
@@ -11102,7 +12286,7 @@
                 <a:ea typeface="Arial" pitchFamily="34" charset="-122"/>
                 <a:cs typeface="Arial" pitchFamily="34" charset="-120"/>
               </a:rPr>
-              <a:t>[품질] — 품질 결과와 파형을 함께 봅니다</a:t>
+              <a:t>[새 작업] — 새로 등록</a:t>
             </a:r>
             <a:endParaRPr lang="en-US" sz="1100" dirty="0"/>
           </a:p>
@@ -11116,8 +12300,8 @@
         </p:nvSpPr>
         <p:spPr>
           <a:xfrm>
-            <a:off x="8503920" y="4663440"/>
-            <a:ext cx="365760" cy="365760"/>
+            <a:off x="6446520" y="2532888"/>
+            <a:ext cx="237744" cy="237744"/>
           </a:xfrm>
           <a:prstGeom prst="ellipse">
             <a:avLst/>
@@ -11131,6 +12315,300 @@
       <p:sp>
         <p:nvSpPr>
           <p:cNvPr id="16" name="Text 13"/>
+          <p:cNvSpPr/>
+          <p:nvPr/>
+        </p:nvSpPr>
+        <p:spPr>
+          <a:xfrm>
+            <a:off x="6446520" y="2532888"/>
+            <a:ext cx="237744" cy="237744"/>
+          </a:xfrm>
+          <a:prstGeom prst="rect">
+            <a:avLst/>
+          </a:prstGeom>
+          <a:noFill/>
+          <a:ln/>
+        </p:spPr>
+        <p:txBody>
+          <a:bodyPr wrap="square" lIns="0" tIns="0" rIns="0" bIns="0" rtlCol="0" anchor="ctr"/>
+          <a:lstStyle/>
+          <a:p>
+            <a:pPr algn="ctr" indent="0" marL="0">
+              <a:buNone/>
+            </a:pPr>
+            <a:r>
+              <a:rPr lang="en-US" sz="1100" b="1" dirty="0">
+                <a:solidFill>
+                  <a:srgbClr val="FFFFFF"/>
+                </a:solidFill>
+                <a:latin typeface="Arial" pitchFamily="34" charset="0"/>
+                <a:ea typeface="Arial" pitchFamily="34" charset="-122"/>
+                <a:cs typeface="Arial" pitchFamily="34" charset="-120"/>
+              </a:rPr>
+              <a:t>4</a:t>
+            </a:r>
+            <a:endParaRPr lang="en-US" sz="1100" dirty="0"/>
+          </a:p>
+        </p:txBody>
+      </p:sp>
+      <p:sp>
+        <p:nvSpPr>
+          <p:cNvPr id="17" name="Text 14"/>
+          <p:cNvSpPr/>
+          <p:nvPr/>
+        </p:nvSpPr>
+        <p:spPr>
+          <a:xfrm>
+            <a:off x="6766560" y="2514600"/>
+            <a:ext cx="1920240" cy="457200"/>
+          </a:xfrm>
+          <a:prstGeom prst="rect">
+            <a:avLst/>
+          </a:prstGeom>
+          <a:noFill/>
+          <a:ln/>
+        </p:spPr>
+        <p:txBody>
+          <a:bodyPr wrap="square" lIns="0" tIns="0" rIns="0" bIns="0" rtlCol="0" anchor="ctr"/>
+          <a:lstStyle/>
+          <a:p>
+            <a:pPr indent="0" marL="0">
+              <a:buNone/>
+            </a:pPr>
+            <a:r>
+              <a:rPr lang="en-US" sz="1100" dirty="0">
+                <a:solidFill>
+                  <a:srgbClr val="4A5560"/>
+                </a:solidFill>
+                <a:latin typeface="Arial" pitchFamily="34" charset="0"/>
+                <a:ea typeface="Arial" pitchFamily="34" charset="-122"/>
+                <a:cs typeface="Arial" pitchFamily="34" charset="-120"/>
+              </a:rPr>
+              <a:t>[상세] — 작업 내용 열기</a:t>
+            </a:r>
+            <a:endParaRPr lang="en-US" sz="1100" dirty="0"/>
+          </a:p>
+        </p:txBody>
+      </p:sp>
+      <p:sp>
+        <p:nvSpPr>
+          <p:cNvPr id="18" name="Shape 15"/>
+          <p:cNvSpPr/>
+          <p:nvPr/>
+        </p:nvSpPr>
+        <p:spPr>
+          <a:xfrm>
+            <a:off x="6446520" y="3035808"/>
+            <a:ext cx="237744" cy="237744"/>
+          </a:xfrm>
+          <a:prstGeom prst="ellipse">
+            <a:avLst/>
+          </a:prstGeom>
+          <a:solidFill>
+            <a:srgbClr val="E76F51"/>
+          </a:solidFill>
+          <a:ln/>
+        </p:spPr>
+      </p:sp>
+      <p:sp>
+        <p:nvSpPr>
+          <p:cNvPr id="19" name="Text 16"/>
+          <p:cNvSpPr/>
+          <p:nvPr/>
+        </p:nvSpPr>
+        <p:spPr>
+          <a:xfrm>
+            <a:off x="6446520" y="3035808"/>
+            <a:ext cx="237744" cy="237744"/>
+          </a:xfrm>
+          <a:prstGeom prst="rect">
+            <a:avLst/>
+          </a:prstGeom>
+          <a:noFill/>
+          <a:ln/>
+        </p:spPr>
+        <p:txBody>
+          <a:bodyPr wrap="square" lIns="0" tIns="0" rIns="0" bIns="0" rtlCol="0" anchor="ctr"/>
+          <a:lstStyle/>
+          <a:p>
+            <a:pPr algn="ctr" indent="0" marL="0">
+              <a:buNone/>
+            </a:pPr>
+            <a:r>
+              <a:rPr lang="en-US" sz="1100" b="1" dirty="0">
+                <a:solidFill>
+                  <a:srgbClr val="FFFFFF"/>
+                </a:solidFill>
+                <a:latin typeface="Arial" pitchFamily="34" charset="0"/>
+                <a:ea typeface="Arial" pitchFamily="34" charset="-122"/>
+                <a:cs typeface="Arial" pitchFamily="34" charset="-120"/>
+              </a:rPr>
+              <a:t>5</a:t>
+            </a:r>
+            <a:endParaRPr lang="en-US" sz="1100" dirty="0"/>
+          </a:p>
+        </p:txBody>
+      </p:sp>
+      <p:sp>
+        <p:nvSpPr>
+          <p:cNvPr id="20" name="Text 17"/>
+          <p:cNvSpPr/>
+          <p:nvPr/>
+        </p:nvSpPr>
+        <p:spPr>
+          <a:xfrm>
+            <a:off x="6766560" y="3017520"/>
+            <a:ext cx="1920240" cy="457200"/>
+          </a:xfrm>
+          <a:prstGeom prst="rect">
+            <a:avLst/>
+          </a:prstGeom>
+          <a:noFill/>
+          <a:ln/>
+        </p:spPr>
+        <p:txBody>
+          <a:bodyPr wrap="square" lIns="0" tIns="0" rIns="0" bIns="0" rtlCol="0" anchor="ctr"/>
+          <a:lstStyle/>
+          <a:p>
+            <a:pPr indent="0" marL="0">
+              <a:buNone/>
+            </a:pPr>
+            <a:r>
+              <a:rPr lang="en-US" sz="1100" dirty="0">
+                <a:solidFill>
+                  <a:srgbClr val="4A5560"/>
+                </a:solidFill>
+                <a:latin typeface="Arial" pitchFamily="34" charset="0"/>
+                <a:ea typeface="Arial" pitchFamily="34" charset="-122"/>
+                <a:cs typeface="Arial" pitchFamily="34" charset="-120"/>
+              </a:rPr>
+              <a:t>[프로파일] — 파형 보기</a:t>
+            </a:r>
+            <a:endParaRPr lang="en-US" sz="1100" dirty="0"/>
+          </a:p>
+        </p:txBody>
+      </p:sp>
+      <p:sp>
+        <p:nvSpPr>
+          <p:cNvPr id="21" name="Shape 18"/>
+          <p:cNvSpPr/>
+          <p:nvPr/>
+        </p:nvSpPr>
+        <p:spPr>
+          <a:xfrm>
+            <a:off x="6446520" y="3538728"/>
+            <a:ext cx="237744" cy="237744"/>
+          </a:xfrm>
+          <a:prstGeom prst="ellipse">
+            <a:avLst/>
+          </a:prstGeom>
+          <a:solidFill>
+            <a:srgbClr val="E76F51"/>
+          </a:solidFill>
+          <a:ln/>
+        </p:spPr>
+      </p:sp>
+      <p:sp>
+        <p:nvSpPr>
+          <p:cNvPr id="22" name="Text 19"/>
+          <p:cNvSpPr/>
+          <p:nvPr/>
+        </p:nvSpPr>
+        <p:spPr>
+          <a:xfrm>
+            <a:off x="6446520" y="3538728"/>
+            <a:ext cx="237744" cy="237744"/>
+          </a:xfrm>
+          <a:prstGeom prst="rect">
+            <a:avLst/>
+          </a:prstGeom>
+          <a:noFill/>
+          <a:ln/>
+        </p:spPr>
+        <p:txBody>
+          <a:bodyPr wrap="square" lIns="0" tIns="0" rIns="0" bIns="0" rtlCol="0" anchor="ctr"/>
+          <a:lstStyle/>
+          <a:p>
+            <a:pPr algn="ctr" indent="0" marL="0">
+              <a:buNone/>
+            </a:pPr>
+            <a:r>
+              <a:rPr lang="en-US" sz="1100" b="1" dirty="0">
+                <a:solidFill>
+                  <a:srgbClr val="FFFFFF"/>
+                </a:solidFill>
+                <a:latin typeface="Arial" pitchFamily="34" charset="0"/>
+                <a:ea typeface="Arial" pitchFamily="34" charset="-122"/>
+                <a:cs typeface="Arial" pitchFamily="34" charset="-120"/>
+              </a:rPr>
+              <a:t>6</a:t>
+            </a:r>
+            <a:endParaRPr lang="en-US" sz="1100" dirty="0"/>
+          </a:p>
+        </p:txBody>
+      </p:sp>
+      <p:sp>
+        <p:nvSpPr>
+          <p:cNvPr id="23" name="Text 20"/>
+          <p:cNvSpPr/>
+          <p:nvPr/>
+        </p:nvSpPr>
+        <p:spPr>
+          <a:xfrm>
+            <a:off x="6766560" y="3520440"/>
+            <a:ext cx="1920240" cy="457200"/>
+          </a:xfrm>
+          <a:prstGeom prst="rect">
+            <a:avLst/>
+          </a:prstGeom>
+          <a:noFill/>
+          <a:ln/>
+        </p:spPr>
+        <p:txBody>
+          <a:bodyPr wrap="square" lIns="0" tIns="0" rIns="0" bIns="0" rtlCol="0" anchor="ctr"/>
+          <a:lstStyle/>
+          <a:p>
+            <a:pPr indent="0" marL="0">
+              <a:buNone/>
+            </a:pPr>
+            <a:r>
+              <a:rPr lang="en-US" sz="1100" dirty="0">
+                <a:solidFill>
+                  <a:srgbClr val="4A5560"/>
+                </a:solidFill>
+                <a:latin typeface="Arial" pitchFamily="34" charset="0"/>
+                <a:ea typeface="Arial" pitchFamily="34" charset="-122"/>
+                <a:cs typeface="Arial" pitchFamily="34" charset="-120"/>
+              </a:rPr>
+              <a:t>[품질] — 품질 결과 보기</a:t>
+            </a:r>
+            <a:endParaRPr lang="en-US" sz="1100" dirty="0"/>
+          </a:p>
+        </p:txBody>
+      </p:sp>
+      <p:sp>
+        <p:nvSpPr>
+          <p:cNvPr id="24" name="Shape 21"/>
+          <p:cNvSpPr/>
+          <p:nvPr/>
+        </p:nvSpPr>
+        <p:spPr>
+          <a:xfrm>
+            <a:off x="8503920" y="4663440"/>
+            <a:ext cx="365760" cy="365760"/>
+          </a:xfrm>
+          <a:prstGeom prst="ellipse">
+            <a:avLst/>
+          </a:prstGeom>
+          <a:solidFill>
+            <a:srgbClr val="E76F51"/>
+          </a:solidFill>
+          <a:ln/>
+        </p:spPr>
+      </p:sp>
+      <p:sp>
+        <p:nvSpPr>
+          <p:cNvPr id="25" name="Text 22"/>
           <p:cNvSpPr/>
           <p:nvPr/>
         </p:nvSpPr>
@@ -11232,7 +12710,7 @@
                 <a:ea typeface="Arial" pitchFamily="34" charset="-122"/>
                 <a:cs typeface="Arial" pitchFamily="34" charset="-120"/>
               </a:rPr>
-              <a:t>5. 작업 상세 — 기본 정보</a:t>
+              <a:t>4. 새 작업 만들기</a:t>
             </a:r>
             <a:endParaRPr lang="en-US" sz="1800" dirty="0"/>
           </a:p>
@@ -11240,7 +12718,7 @@
       </p:sp>
       <p:pic>
         <p:nvPicPr>
-          <p:cNvPr id="3" name="Image 0" descr="/Users/geosoft/Documents/weld-dashboard/docs/2026-10-23/slides/imgs/04-job-detail-info-n.png">    </p:cNvPr>
+          <p:cNvPr id="3" name="Image 0" descr="/Users/geosoft/Documents/weld-dashboard/docs/2026-10-23/slides/imgs/02-new-job-dialog-n.png">    </p:cNvPr>
           <p:cNvPicPr>
             <a:picLocks noChangeAspect="1"/>
           </p:cNvPicPr>
@@ -11391,7 +12869,7 @@
         <p:spPr>
           <a:xfrm>
             <a:off x="6766560" y="1005840"/>
-            <a:ext cx="1920240" cy="457200"/>
+            <a:ext cx="1920240" cy="450669"/>
           </a:xfrm>
           <a:prstGeom prst="rect">
             <a:avLst/>
@@ -11415,7 +12893,7 @@
                 <a:ea typeface="Arial" pitchFamily="34" charset="-122"/>
                 <a:cs typeface="Arial" pitchFamily="34" charset="-120"/>
               </a:rPr>
-              <a:t>작업 요약 카드</a:t>
+              <a:t>공사 — 필수</a:t>
             </a:r>
             <a:endParaRPr lang="en-US" sz="1100" dirty="0"/>
           </a:p>
@@ -11429,7 +12907,7 @@
         </p:nvSpPr>
         <p:spPr>
           <a:xfrm>
-            <a:off x="6446520" y="1527048"/>
+            <a:off x="6446520" y="1520517"/>
             <a:ext cx="237744" cy="237744"/>
           </a:xfrm>
           <a:prstGeom prst="ellipse">
@@ -11449,7 +12927,7 @@
         </p:nvSpPr>
         <p:spPr>
           <a:xfrm>
-            <a:off x="6446520" y="1527048"/>
+            <a:off x="6446520" y="1520517"/>
             <a:ext cx="237744" cy="237744"/>
           </a:xfrm>
           <a:prstGeom prst="rect">
@@ -11488,8 +12966,8 @@
         </p:nvSpPr>
         <p:spPr>
           <a:xfrm>
-            <a:off x="6766560" y="1508760"/>
-            <a:ext cx="1920240" cy="457200"/>
+            <a:off x="6766560" y="1502229"/>
+            <a:ext cx="1920240" cy="450669"/>
           </a:xfrm>
           <a:prstGeom prst="rect">
             <a:avLst/>
@@ -11513,7 +12991,7 @@
                 <a:ea typeface="Arial" pitchFamily="34" charset="-122"/>
                 <a:cs typeface="Arial" pitchFamily="34" charset="-120"/>
               </a:rPr>
-              <a:t>[기본 정보] 탭</a:t>
+              <a:t>호기 · 품목 — 필수</a:t>
             </a:r>
             <a:endParaRPr lang="en-US" sz="1100" dirty="0"/>
           </a:p>
@@ -11527,7 +13005,7 @@
         </p:nvSpPr>
         <p:spPr>
           <a:xfrm>
-            <a:off x="6446520" y="2029968"/>
+            <a:off x="6446520" y="2016905"/>
             <a:ext cx="237744" cy="237744"/>
           </a:xfrm>
           <a:prstGeom prst="ellipse">
@@ -11547,7 +13025,7 @@
         </p:nvSpPr>
         <p:spPr>
           <a:xfrm>
-            <a:off x="6446520" y="2029968"/>
+            <a:off x="6446520" y="2016905"/>
             <a:ext cx="237744" cy="237744"/>
           </a:xfrm>
           <a:prstGeom prst="rect">
@@ -11586,8 +13064,8 @@
         </p:nvSpPr>
         <p:spPr>
           <a:xfrm>
-            <a:off x="6766560" y="2011680"/>
-            <a:ext cx="1920240" cy="457200"/>
+            <a:off x="6766560" y="1998617"/>
+            <a:ext cx="1920240" cy="450669"/>
           </a:xfrm>
           <a:prstGeom prst="rect">
             <a:avLst/>
@@ -11611,7 +13089,7 @@
                 <a:ea typeface="Arial" pitchFamily="34" charset="-122"/>
                 <a:cs typeface="Arial" pitchFamily="34" charset="-120"/>
               </a:rPr>
-              <a:t>[저장]</a:t>
+              <a:t>이음부 — 필수</a:t>
             </a:r>
             <a:endParaRPr lang="en-US" sz="1100" dirty="0"/>
           </a:p>
@@ -11625,7 +13103,7 @@
         </p:nvSpPr>
         <p:spPr>
           <a:xfrm>
-            <a:off x="6446520" y="2532888"/>
+            <a:off x="6446520" y="2513294"/>
             <a:ext cx="237744" cy="237744"/>
           </a:xfrm>
           <a:prstGeom prst="ellipse">
@@ -11645,7 +13123,7 @@
         </p:nvSpPr>
         <p:spPr>
           <a:xfrm>
-            <a:off x="6446520" y="2532888"/>
+            <a:off x="6446520" y="2513294"/>
             <a:ext cx="237744" cy="237744"/>
           </a:xfrm>
           <a:prstGeom prst="rect">
@@ -11684,8 +13162,8 @@
         </p:nvSpPr>
         <p:spPr>
           <a:xfrm>
-            <a:off x="6766560" y="2514600"/>
-            <a:ext cx="1920240" cy="457200"/>
+            <a:off x="6766560" y="2495006"/>
+            <a:ext cx="1920240" cy="450669"/>
           </a:xfrm>
           <a:prstGeom prst="rect">
             <a:avLst/>
@@ -11709,7 +13187,7 @@
                 <a:ea typeface="Arial" pitchFamily="34" charset="-122"/>
                 <a:cs typeface="Arial" pitchFamily="34" charset="-120"/>
               </a:rPr>
-              <a:t>[작업 지우기] (되돌릴 수 없음)</a:t>
+              <a:t>작업자 — 선택</a:t>
             </a:r>
             <a:endParaRPr lang="en-US" sz="1100" dirty="0"/>
           </a:p>
@@ -11723,7 +13201,7 @@
         </p:nvSpPr>
         <p:spPr>
           <a:xfrm>
-            <a:off x="6446520" y="3035808"/>
+            <a:off x="6446520" y="3009682"/>
             <a:ext cx="237744" cy="237744"/>
           </a:xfrm>
           <a:prstGeom prst="ellipse">
@@ -11743,7 +13221,7 @@
         </p:nvSpPr>
         <p:spPr>
           <a:xfrm>
-            <a:off x="6446520" y="3035808"/>
+            <a:off x="6446520" y="3009682"/>
             <a:ext cx="237744" cy="237744"/>
           </a:xfrm>
           <a:prstGeom prst="rect">
@@ -11782,8 +13260,8 @@
         </p:nvSpPr>
         <p:spPr>
           <a:xfrm>
-            <a:off x="6766560" y="3017520"/>
-            <a:ext cx="1920240" cy="457200"/>
+            <a:off x="6766560" y="2991394"/>
+            <a:ext cx="1920240" cy="450669"/>
           </a:xfrm>
           <a:prstGeom prst="rect">
             <a:avLst/>
@@ -11807,7 +13285,7 @@
                 <a:ea typeface="Arial" pitchFamily="34" charset="-122"/>
                 <a:cs typeface="Arial" pitchFamily="34" charset="-120"/>
               </a:rPr>
-              <a:t>공사 · 품목 · 시간 등 입력 칸</a:t>
+              <a:t>시작 · 종료 시각 — 시작은 필수</a:t>
             </a:r>
             <a:endParaRPr lang="en-US" sz="1100" dirty="0"/>
           </a:p>
@@ -11821,7 +13299,7 @@
         </p:nvSpPr>
         <p:spPr>
           <a:xfrm>
-            <a:off x="6446520" y="3538728"/>
+            <a:off x="6446520" y="3506071"/>
             <a:ext cx="237744" cy="237744"/>
           </a:xfrm>
           <a:prstGeom prst="ellipse">
@@ -11841,7 +13319,7 @@
         </p:nvSpPr>
         <p:spPr>
           <a:xfrm>
-            <a:off x="6446520" y="3538728"/>
+            <a:off x="6446520" y="3506071"/>
             <a:ext cx="237744" cy="237744"/>
           </a:xfrm>
           <a:prstGeom prst="rect">
@@ -11880,8 +13358,8 @@
         </p:nvSpPr>
         <p:spPr>
           <a:xfrm>
-            <a:off x="6766560" y="3520440"/>
-            <a:ext cx="1920240" cy="457200"/>
+            <a:off x="6766560" y="3487783"/>
+            <a:ext cx="1920240" cy="450669"/>
           </a:xfrm>
           <a:prstGeom prst="rect">
             <a:avLst/>
@@ -11905,7 +13383,7 @@
                 <a:ea typeface="Arial" pitchFamily="34" charset="-122"/>
                 <a:cs typeface="Arial" pitchFamily="34" charset="-120"/>
               </a:rPr>
-              <a:t>프로파일 · 품질로 바로 이동</a:t>
+              <a:t>패스 구간 — 선택</a:t>
             </a:r>
             <a:endParaRPr lang="en-US" sz="1100" dirty="0"/>
           </a:p>
@@ -11919,8 +13397,8 @@
         </p:nvSpPr>
         <p:spPr>
           <a:xfrm>
-            <a:off x="8503920" y="4663440"/>
-            <a:ext cx="365760" cy="365760"/>
+            <a:off x="6446520" y="4002459"/>
+            <a:ext cx="237744" cy="237744"/>
           </a:xfrm>
           <a:prstGeom prst="ellipse">
             <a:avLst/>
@@ -11934,6 +13412,104 @@
       <p:sp>
         <p:nvSpPr>
           <p:cNvPr id="25" name="Text 22"/>
+          <p:cNvSpPr/>
+          <p:nvPr/>
+        </p:nvSpPr>
+        <p:spPr>
+          <a:xfrm>
+            <a:off x="6446520" y="4002459"/>
+            <a:ext cx="237744" cy="237744"/>
+          </a:xfrm>
+          <a:prstGeom prst="rect">
+            <a:avLst/>
+          </a:prstGeom>
+          <a:noFill/>
+          <a:ln/>
+        </p:spPr>
+        <p:txBody>
+          <a:bodyPr wrap="square" lIns="0" tIns="0" rIns="0" bIns="0" rtlCol="0" anchor="ctr"/>
+          <a:lstStyle/>
+          <a:p>
+            <a:pPr algn="ctr" indent="0" marL="0">
+              <a:buNone/>
+            </a:pPr>
+            <a:r>
+              <a:rPr lang="en-US" sz="1100" b="1" dirty="0">
+                <a:solidFill>
+                  <a:srgbClr val="FFFFFF"/>
+                </a:solidFill>
+                <a:latin typeface="Arial" pitchFamily="34" charset="0"/>
+                <a:ea typeface="Arial" pitchFamily="34" charset="-122"/>
+                <a:cs typeface="Arial" pitchFamily="34" charset="-120"/>
+              </a:rPr>
+              <a:t>7</a:t>
+            </a:r>
+            <a:endParaRPr lang="en-US" sz="1100" dirty="0"/>
+          </a:p>
+        </p:txBody>
+      </p:sp>
+      <p:sp>
+        <p:nvSpPr>
+          <p:cNvPr id="26" name="Text 23"/>
+          <p:cNvSpPr/>
+          <p:nvPr/>
+        </p:nvSpPr>
+        <p:spPr>
+          <a:xfrm>
+            <a:off x="6766560" y="3984171"/>
+            <a:ext cx="1920240" cy="450669"/>
+          </a:xfrm>
+          <a:prstGeom prst="rect">
+            <a:avLst/>
+          </a:prstGeom>
+          <a:noFill/>
+          <a:ln/>
+        </p:spPr>
+        <p:txBody>
+          <a:bodyPr wrap="square" lIns="0" tIns="0" rIns="0" bIns="0" rtlCol="0" anchor="ctr"/>
+          <a:lstStyle/>
+          <a:p>
+            <a:pPr indent="0" marL="0">
+              <a:buNone/>
+            </a:pPr>
+            <a:r>
+              <a:rPr lang="en-US" sz="1100" dirty="0">
+                <a:solidFill>
+                  <a:srgbClr val="4A5560"/>
+                </a:solidFill>
+                <a:latin typeface="Arial" pitchFamily="34" charset="0"/>
+                <a:ea typeface="Arial" pitchFamily="34" charset="-122"/>
+                <a:cs typeface="Arial" pitchFamily="34" charset="-120"/>
+              </a:rPr>
+              <a:t>[만들기] — 저장</a:t>
+            </a:r>
+            <a:endParaRPr lang="en-US" sz="1100" dirty="0"/>
+          </a:p>
+        </p:txBody>
+      </p:sp>
+      <p:sp>
+        <p:nvSpPr>
+          <p:cNvPr id="27" name="Shape 24"/>
+          <p:cNvSpPr/>
+          <p:nvPr/>
+        </p:nvSpPr>
+        <p:spPr>
+          <a:xfrm>
+            <a:off x="8503920" y="4663440"/>
+            <a:ext cx="365760" cy="365760"/>
+          </a:xfrm>
+          <a:prstGeom prst="ellipse">
+            <a:avLst/>
+          </a:prstGeom>
+          <a:solidFill>
+            <a:srgbClr val="E76F51"/>
+          </a:solidFill>
+          <a:ln/>
+        </p:spPr>
+      </p:sp>
+      <p:sp>
+        <p:nvSpPr>
+          <p:cNvPr id="28" name="Text 25"/>
           <p:cNvSpPr/>
           <p:nvPr/>
         </p:nvSpPr>
@@ -12035,7 +13611,7 @@
                 <a:ea typeface="Arial" pitchFamily="34" charset="-122"/>
                 <a:cs typeface="Arial" pitchFamily="34" charset="-120"/>
               </a:rPr>
-              <a:t>6. 작업 상세 — 패스</a:t>
+              <a:t>5. 목록에서 상세 · 프로파일 · 품질 열기</a:t>
             </a:r>
             <a:endParaRPr lang="en-US" sz="1800" dirty="0"/>
           </a:p>
@@ -12043,7 +13619,7 @@
       </p:sp>
       <p:pic>
         <p:nvPicPr>
-          <p:cNvPr id="3" name="Image 0" descr="/Users/geosoft/Documents/weld-dashboard/docs/2026-10-23/slides/imgs/05-job-detail-pass-n.png">    </p:cNvPr>
+          <p:cNvPr id="3" name="Image 0" descr="/Users/geosoft/Documents/weld-dashboard/docs/2026-10-23/slides/imgs/06-list-actions-n.png">    </p:cNvPr>
           <p:cNvPicPr>
             <a:picLocks noChangeAspect="1"/>
           </p:cNvPicPr>
@@ -12218,7 +13794,7 @@
                 <a:ea typeface="Arial" pitchFamily="34" charset="-122"/>
                 <a:cs typeface="Arial" pitchFamily="34" charset="-120"/>
               </a:rPr>
-              <a:t>[+ 패스 추가]</a:t>
+              <a:t>[상세] — 기본 정보 · 패스 · 첨부를 고치고 정리합니다</a:t>
             </a:r>
             <a:endParaRPr lang="en-US" sz="1100" dirty="0"/>
           </a:p>
@@ -12316,7 +13892,7 @@
                 <a:ea typeface="Arial" pitchFamily="34" charset="-122"/>
                 <a:cs typeface="Arial" pitchFamily="34" charset="-120"/>
               </a:rPr>
-              <a:t>패스 목록 (시작 · 종료)</a:t>
+              <a:t>[프로파일] — 패스별 전류 · 전압 등 파형을 봅니다</a:t>
             </a:r>
             <a:endParaRPr lang="en-US" sz="1100" dirty="0"/>
           </a:p>
@@ -12414,7 +13990,7 @@
                 <a:ea typeface="Arial" pitchFamily="34" charset="-122"/>
                 <a:cs typeface="Arial" pitchFamily="34" charset="-120"/>
               </a:rPr>
-              <a:t>수정 · 지우기 아이콘</a:t>
+              <a:t>[품질] — 품질 결과와 파형을 함께 봅니다</a:t>
             </a:r>
             <a:endParaRPr lang="en-US" sz="1100" dirty="0"/>
           </a:p>
@@ -12428,8 +14004,8 @@
         </p:nvSpPr>
         <p:spPr>
           <a:xfrm>
-            <a:off x="6446520" y="2532888"/>
-            <a:ext cx="237744" cy="237744"/>
+            <a:off x="8503920" y="4663440"/>
+            <a:ext cx="365760" cy="365760"/>
           </a:xfrm>
           <a:prstGeom prst="ellipse">
             <a:avLst/>
@@ -12443,104 +14019,6 @@
       <p:sp>
         <p:nvSpPr>
           <p:cNvPr id="16" name="Text 13"/>
-          <p:cNvSpPr/>
-          <p:nvPr/>
-        </p:nvSpPr>
-        <p:spPr>
-          <a:xfrm>
-            <a:off x="6446520" y="2532888"/>
-            <a:ext cx="237744" cy="237744"/>
-          </a:xfrm>
-          <a:prstGeom prst="rect">
-            <a:avLst/>
-          </a:prstGeom>
-          <a:noFill/>
-          <a:ln/>
-        </p:spPr>
-        <p:txBody>
-          <a:bodyPr wrap="square" lIns="0" tIns="0" rIns="0" bIns="0" rtlCol="0" anchor="ctr"/>
-          <a:lstStyle/>
-          <a:p>
-            <a:pPr algn="ctr" indent="0" marL="0">
-              <a:buNone/>
-            </a:pPr>
-            <a:r>
-              <a:rPr lang="en-US" sz="1100" b="1" dirty="0">
-                <a:solidFill>
-                  <a:srgbClr val="FFFFFF"/>
-                </a:solidFill>
-                <a:latin typeface="Arial" pitchFamily="34" charset="0"/>
-                <a:ea typeface="Arial" pitchFamily="34" charset="-122"/>
-                <a:cs typeface="Arial" pitchFamily="34" charset="-120"/>
-              </a:rPr>
-              <a:t>4</a:t>
-            </a:r>
-            <a:endParaRPr lang="en-US" sz="1100" dirty="0"/>
-          </a:p>
-        </p:txBody>
-      </p:sp>
-      <p:sp>
-        <p:nvSpPr>
-          <p:cNvPr id="17" name="Text 14"/>
-          <p:cNvSpPr/>
-          <p:nvPr/>
-        </p:nvSpPr>
-        <p:spPr>
-          <a:xfrm>
-            <a:off x="6766560" y="2514600"/>
-            <a:ext cx="1920240" cy="457200"/>
-          </a:xfrm>
-          <a:prstGeom prst="rect">
-            <a:avLst/>
-          </a:prstGeom>
-          <a:noFill/>
-          <a:ln/>
-        </p:spPr>
-        <p:txBody>
-          <a:bodyPr wrap="square" lIns="0" tIns="0" rIns="0" bIns="0" rtlCol="0" anchor="ctr"/>
-          <a:lstStyle/>
-          <a:p>
-            <a:pPr indent="0" marL="0">
-              <a:buNone/>
-            </a:pPr>
-            <a:r>
-              <a:rPr lang="en-US" sz="1100" dirty="0">
-                <a:solidFill>
-                  <a:srgbClr val="4A5560"/>
-                </a:solidFill>
-                <a:latin typeface="Arial" pitchFamily="34" charset="0"/>
-                <a:ea typeface="Arial" pitchFamily="34" charset="-122"/>
-                <a:cs typeface="Arial" pitchFamily="34" charset="-120"/>
-              </a:rPr>
-              <a:t>구간 규칙 안내 (겹침 불가)</a:t>
-            </a:r>
-            <a:endParaRPr lang="en-US" sz="1100" dirty="0"/>
-          </a:p>
-        </p:txBody>
-      </p:sp>
-      <p:sp>
-        <p:nvSpPr>
-          <p:cNvPr id="18" name="Shape 15"/>
-          <p:cNvSpPr/>
-          <p:nvPr/>
-        </p:nvSpPr>
-        <p:spPr>
-          <a:xfrm>
-            <a:off x="8503920" y="4663440"/>
-            <a:ext cx="365760" cy="365760"/>
-          </a:xfrm>
-          <a:prstGeom prst="ellipse">
-            <a:avLst/>
-          </a:prstGeom>
-          <a:solidFill>
-            <a:srgbClr val="E76F51"/>
-          </a:solidFill>
-          <a:ln/>
-        </p:spPr>
-      </p:sp>
-      <p:sp>
-        <p:nvSpPr>
-          <p:cNvPr id="19" name="Text 16"/>
           <p:cNvSpPr/>
           <p:nvPr/>
         </p:nvSpPr>
@@ -12642,7 +14120,7 @@
                 <a:ea typeface="Arial" pitchFamily="34" charset="-122"/>
                 <a:cs typeface="Arial" pitchFamily="34" charset="-120"/>
               </a:rPr>
-              <a:t>7. 작업 상세 — 패스 추가 창</a:t>
+              <a:t>6. 작업 상세 — 기본 정보</a:t>
             </a:r>
             <a:endParaRPr lang="en-US" sz="1800" dirty="0"/>
           </a:p>
@@ -12650,7 +14128,7 @@
       </p:sp>
       <p:pic>
         <p:nvPicPr>
-          <p:cNvPr id="3" name="Image 0" descr="/Users/geosoft/Documents/weld-dashboard/docs/2026-10-23/slides/imgs/08-pass-add-n.png">    </p:cNvPr>
+          <p:cNvPr id="3" name="Image 0" descr="/Users/geosoft/Documents/weld-dashboard/docs/2026-10-23/slides/imgs/04-job-detail-info-n.png">    </p:cNvPr>
           <p:cNvPicPr>
             <a:picLocks noChangeAspect="1"/>
           </p:cNvPicPr>
@@ -12825,7 +14303,7 @@
                 <a:ea typeface="Arial" pitchFamily="34" charset="-122"/>
                 <a:cs typeface="Arial" pitchFamily="34" charset="-120"/>
               </a:rPr>
-              <a:t>패스 번호 * — 중복되면 안 됩니다</a:t>
+              <a:t>작업 요약 카드</a:t>
             </a:r>
             <a:endParaRPr lang="en-US" sz="1100" dirty="0"/>
           </a:p>
@@ -12923,7 +14401,7 @@
                 <a:ea typeface="Arial" pitchFamily="34" charset="-122"/>
                 <a:cs typeface="Arial" pitchFamily="34" charset="-120"/>
               </a:rPr>
-              <a:t>종류 — 초층 · 채움 · 캡 등</a:t>
+              <a:t>[기본 정보] 탭</a:t>
             </a:r>
             <a:endParaRPr lang="en-US" sz="1100" dirty="0"/>
           </a:p>
@@ -13021,7 +14499,7 @@
                 <a:ea typeface="Arial" pitchFamily="34" charset="-122"/>
                 <a:cs typeface="Arial" pitchFamily="34" charset="-120"/>
               </a:rPr>
-              <a:t>시작 시각 — 비워 둘 수 있습니다</a:t>
+              <a:t>[저장]</a:t>
             </a:r>
             <a:endParaRPr lang="en-US" sz="1100" dirty="0"/>
           </a:p>
@@ -13119,7 +14597,7 @@
                 <a:ea typeface="Arial" pitchFamily="34" charset="-122"/>
                 <a:cs typeface="Arial" pitchFamily="34" charset="-120"/>
               </a:rPr>
-              <a:t>종료 시각 — 비워 둘 수 있습니다</a:t>
+              <a:t>[작업 지우기] (되돌릴 수 없음)</a:t>
             </a:r>
             <a:endParaRPr lang="en-US" sz="1100" dirty="0"/>
           </a:p>
@@ -13217,7 +14695,7 @@
                 <a:ea typeface="Arial" pitchFamily="34" charset="-122"/>
                 <a:cs typeface="Arial" pitchFamily="34" charset="-120"/>
               </a:rPr>
-              <a:t>작업 구간 안내 — 이 구간 안이어야 합니다</a:t>
+              <a:t>공사 · 품목 · 시간 등 입력 칸</a:t>
             </a:r>
             <a:endParaRPr lang="en-US" sz="1100" dirty="0"/>
           </a:p>
@@ -13315,7 +14793,7 @@
                 <a:ea typeface="Arial" pitchFamily="34" charset="-122"/>
                 <a:cs typeface="Arial" pitchFamily="34" charset="-120"/>
               </a:rPr>
-              <a:t>[추가] — 저장</a:t>
+              <a:t>[프로파일] · [품질 이슈] 로 바로 이동</a:t>
             </a:r>
             <a:endParaRPr lang="en-US" sz="1100" dirty="0"/>
           </a:p>
